--- a/EX_DURJOY_GHATI_CAX19_Brief.pptx
+++ b/EX_DURJOY_GHATI_CAX19_Brief.pptx
@@ -3093,6 +3093,14 @@
 <file path=ppt/slides/slide1.xml><?xml version="1.0" encoding="utf-8"?>
 <p:sld xmlns:a="http://schemas.openxmlformats.org/drawingml/2006/main" xmlns:p="http://schemas.openxmlformats.org/presentationml/2006/main" xmlns:r="http://schemas.openxmlformats.org/officeDocument/2006/relationships">
   <p:cSld>
+    <p:bg>
+      <p:bgPr>
+        <a:solidFill>
+          <a:srgbClr val="1B1F23"/>
+        </a:solidFill>
+        <a:effectLst/>
+      </p:bgPr>
+    </p:bg>
     <p:spTree>
       <p:nvGrpSpPr>
         <p:cNvPr id="1" name=""/>
@@ -3102,51 +3110,7 @@
       <p:grpSpPr/>
       <p:sp>
         <p:nvSpPr>
-          <p:cNvPr id="2" name="Rectangle 1"/>
-          <p:cNvSpPr/>
-          <p:nvPr/>
-        </p:nvSpPr>
-        <p:spPr>
-          <a:xfrm>
-            <a:off x="0" y="0"/>
-            <a:ext cx="12191695" cy="6858000"/>
-          </a:xfrm>
-          <a:prstGeom prst="rect">
-            <a:avLst/>
-          </a:prstGeom>
-          <a:solidFill>
-            <a:srgbClr val="1B1F23"/>
-          </a:solidFill>
-          <a:ln>
-            <a:noFill/>
-          </a:ln>
-          <a:effectLst/>
-        </p:spPr>
-        <p:style>
-          <a:lnRef idx="1">
-            <a:schemeClr val="accent1"/>
-          </a:lnRef>
-          <a:fillRef idx="3">
-            <a:schemeClr val="accent1"/>
-          </a:fillRef>
-          <a:effectRef idx="2">
-            <a:schemeClr val="accent1"/>
-          </a:effectRef>
-          <a:fontRef idx="minor">
-            <a:schemeClr val="lt1"/>
-          </a:fontRef>
-        </p:style>
-        <p:txBody>
-          <a:bodyPr rtlCol="0" anchor="ctr"/>
-          <a:lstStyle/>
-          <a:p>
-            <a:pPr algn="ctr"/>
-          </a:p>
-        </p:txBody>
-      </p:sp>
-      <p:sp>
-        <p:nvSpPr>
-          <p:cNvPr id="3" name="TextBox 2"/>
+          <p:cNvPr id="2" name="TextBox 1"/>
           <p:cNvSpPr txBox="1"/>
           <p:nvPr/>
         </p:nvSpPr>
@@ -3167,8 +3131,8 @@
           <a:lstStyle/>
           <a:p>
             <a:pPr algn="r"/>
-            <a:fld id="{1B72B1FF-B140-41BA-B11F-F41155ABB7C4}" type="slidenum">
-              <a:rPr lang="en-US" sz="1600" b="1">
+            <a:fld id="{D2F7023B-544E-4CEE-A359-A6D97100E1CC}" type="slidenum">
+              <a:rPr lang="en-US" sz="1600" b="1" dirty="0">
                 <a:solidFill>
                   <a:srgbClr val="B08D57"/>
                 </a:solidFill>
@@ -3190,7 +3154,7 @@
       </p:sp>
       <p:sp>
         <p:nvSpPr>
-          <p:cNvPr id="4" name="TextBox 3"/>
+          <p:cNvPr id="3" name="TextBox 2"/>
           <p:cNvSpPr txBox="1"/>
           <p:nvPr/>
         </p:nvSpPr>
@@ -3225,13 +3189,13 @@
       </p:sp>
       <p:sp>
         <p:nvSpPr>
-          <p:cNvPr id="5" name="TextBox 4"/>
+          <p:cNvPr id="4" name="TextBox 3"/>
           <p:cNvSpPr txBox="1"/>
           <p:nvPr/>
         </p:nvSpPr>
         <p:spPr>
           <a:xfrm>
-            <a:off x="548640" y="1965960"/>
+            <a:off x="548640" y="2011680"/>
             <a:ext cx="11094415" cy="1005840"/>
           </a:xfrm>
           <a:prstGeom prst="rect">
@@ -3260,13 +3224,13 @@
       </p:sp>
       <p:sp>
         <p:nvSpPr>
-          <p:cNvPr id="6" name="TextBox 5"/>
+          <p:cNvPr id="5" name="TextBox 4"/>
           <p:cNvSpPr txBox="1"/>
           <p:nvPr/>
         </p:nvSpPr>
         <p:spPr>
           <a:xfrm>
-            <a:off x="548640" y="3154680"/>
+            <a:off x="548640" y="3200400"/>
             <a:ext cx="11094415" cy="640080"/>
           </a:xfrm>
           <a:prstGeom prst="rect">
@@ -3293,376 +3257,16 @@
           </a:p>
         </p:txBody>
       </p:sp>
-      <p:sp>
-        <p:nvSpPr>
-          <p:cNvPr id="7" name="Rectangle 6"/>
-          <p:cNvSpPr/>
-          <p:nvPr/>
-        </p:nvSpPr>
-        <p:spPr>
-          <a:xfrm>
-            <a:off x="4724247" y="3886200"/>
-            <a:ext cx="2743200" cy="19050"/>
-          </a:xfrm>
-          <a:prstGeom prst="rect">
-            <a:avLst/>
-          </a:prstGeom>
-          <a:solidFill>
-            <a:srgbClr val="B08D57"/>
-          </a:solidFill>
-          <a:ln>
-            <a:noFill/>
-          </a:ln>
-          <a:effectLst/>
-        </p:spPr>
-        <p:style>
-          <a:lnRef idx="1">
-            <a:schemeClr val="accent1"/>
-          </a:lnRef>
-          <a:fillRef idx="3">
-            <a:schemeClr val="accent1"/>
-          </a:fillRef>
-          <a:effectRef idx="2">
-            <a:schemeClr val="accent1"/>
-          </a:effectRef>
-          <a:fontRef idx="minor">
-            <a:schemeClr val="lt1"/>
-          </a:fontRef>
-        </p:style>
-        <p:txBody>
-          <a:bodyPr rtlCol="0" anchor="ctr"/>
-          <a:lstStyle/>
-          <a:p>
-            <a:pPr algn="ctr"/>
-          </a:p>
-        </p:txBody>
-      </p:sp>
-      <p:sp>
-        <p:nvSpPr>
-          <p:cNvPr id="8" name="TextBox 7"/>
-          <p:cNvSpPr txBox="1"/>
-          <p:nvPr/>
-        </p:nvSpPr>
-        <p:spPr>
-          <a:xfrm>
-            <a:off x="548640" y="4069080"/>
-            <a:ext cx="11094415" cy="594360"/>
-          </a:xfrm>
-          <a:prstGeom prst="rect">
-            <a:avLst/>
-          </a:prstGeom>
-          <a:noFill/>
-        </p:spPr>
-        <p:txBody>
-          <a:bodyPr wrap="square" anchor="t" lIns="0" rIns="0" tIns="0" bIns="0">
-            <a:spAutoFit/>
-          </a:bodyPr>
-          <a:lstStyle/>
-          <a:p>
-            <a:pPr algn="ctr"/>
-            <a:r>
-              <a:rPr sz="3200" b="0" i="1" spc="100">
-                <a:solidFill>
-                  <a:srgbClr val="F4F2EC"/>
-                </a:solidFill>
-                <a:latin typeface="Arial"/>
-              </a:rPr>
-              <a:t>OBJECT-LESSONS MATRIX</a:t>
-            </a:r>
-          </a:p>
-        </p:txBody>
-      </p:sp>
-      <p:sp>
-        <p:nvSpPr>
-          <p:cNvPr id="9" name="TextBox 8"/>
-          <p:cNvSpPr txBox="1"/>
-          <p:nvPr/>
-        </p:nvSpPr>
-        <p:spPr>
-          <a:xfrm>
-            <a:off x="548640" y="5989320"/>
-            <a:ext cx="11094415" cy="365760"/>
-          </a:xfrm>
-          <a:prstGeom prst="rect">
-            <a:avLst/>
-          </a:prstGeom>
-          <a:noFill/>
-        </p:spPr>
-        <p:txBody>
-          <a:bodyPr wrap="square" anchor="t" lIns="0" rIns="0" tIns="0" bIns="0">
-            <a:spAutoFit/>
-          </a:bodyPr>
-          <a:lstStyle/>
-          <a:p>
-            <a:pPr algn="ctr"/>
-            <a:r>
-              <a:rPr sz="1800" b="0" i="0">
-                <a:solidFill>
-                  <a:srgbClr val="B08D57"/>
-                </a:solidFill>
-                <a:latin typeface="Arial"/>
-              </a:rPr>
-              <a:t>Command Post Exercise • 2025</a:t>
-            </a:r>
-          </a:p>
-        </p:txBody>
-      </p:sp>
-    </p:spTree>
-  </p:cSld>
-  <p:clrMapOvr>
-    <a:masterClrMapping/>
-  </p:clrMapOvr>
-</p:sld>
-</file>
-
-<file path=ppt/slides/slide10.xml><?xml version="1.0" encoding="utf-8"?>
-<p:sld xmlns:a="http://schemas.openxmlformats.org/drawingml/2006/main" xmlns:p="http://schemas.openxmlformats.org/presentationml/2006/main" xmlns:r="http://schemas.openxmlformats.org/officeDocument/2006/relationships">
-  <p:cSld>
-    <p:spTree>
-      <p:nvGrpSpPr>
-        <p:cNvPr id="1" name=""/>
-        <p:cNvGrpSpPr/>
-        <p:nvPr/>
-      </p:nvGrpSpPr>
-      <p:grpSpPr/>
-      <p:sp>
-        <p:nvSpPr>
-          <p:cNvPr id="2" name="Rectangle 1"/>
-          <p:cNvSpPr/>
-          <p:nvPr/>
-        </p:nvSpPr>
-        <p:spPr>
-          <a:xfrm>
-            <a:off x="0" y="0"/>
-            <a:ext cx="12191695" cy="6858000"/>
-          </a:xfrm>
-          <a:prstGeom prst="rect">
-            <a:avLst/>
-          </a:prstGeom>
-          <a:solidFill>
-            <a:srgbClr val="F4F2EC"/>
-          </a:solidFill>
-          <a:ln>
-            <a:noFill/>
-          </a:ln>
-          <a:effectLst/>
-        </p:spPr>
-        <p:style>
-          <a:lnRef idx="1">
-            <a:schemeClr val="accent1"/>
-          </a:lnRef>
-          <a:fillRef idx="3">
-            <a:schemeClr val="accent1"/>
-          </a:fillRef>
-          <a:effectRef idx="2">
-            <a:schemeClr val="accent1"/>
-          </a:effectRef>
-          <a:fontRef idx="minor">
-            <a:schemeClr val="lt1"/>
-          </a:fontRef>
-        </p:style>
-        <p:txBody>
-          <a:bodyPr rtlCol="0" anchor="ctr"/>
-          <a:lstStyle/>
-          <a:p>
-            <a:pPr algn="ctr"/>
-          </a:p>
-        </p:txBody>
-      </p:sp>
-      <p:sp>
-        <p:nvSpPr>
-          <p:cNvPr id="3" name="TextBox 2"/>
-          <p:cNvSpPr txBox="1"/>
-          <p:nvPr/>
-        </p:nvSpPr>
-        <p:spPr>
-          <a:xfrm>
-            <a:off x="9814255" y="6473952"/>
-            <a:ext cx="1828800" cy="320040"/>
-          </a:xfrm>
-          <a:prstGeom prst="rect">
-            <a:avLst/>
-          </a:prstGeom>
-          <a:noFill/>
-        </p:spPr>
-        <p:txBody>
-          <a:bodyPr wrap="none" lIns="0" rIns="0" tIns="0" bIns="0">
-            <a:spAutoFit/>
-          </a:bodyPr>
-          <a:lstStyle/>
-          <a:p>
-            <a:pPr algn="r"/>
-            <a:fld id="{8DC455E8-D6F8-41F5-855A-C32F096F80FA}" type="slidenum">
-              <a:rPr lang="en-US" sz="1600" b="1">
-                <a:solidFill>
-                  <a:srgbClr val="B08D57"/>
-                </a:solidFill>
-                <a:latin typeface="Arial"/>
-              </a:rPr>
-              <a:t>1</a:t>
-            </a:fld>
-            <a:r>
-              <a:rPr sz="1600" b="1">
-                <a:solidFill>
-                  <a:srgbClr val="B08D57"/>
-                </a:solidFill>
-                <a:latin typeface="Arial"/>
-              </a:rPr>
-              <a:t> / 13</a:t>
-            </a:r>
-          </a:p>
-        </p:txBody>
-      </p:sp>
-      <p:sp>
-        <p:nvSpPr>
-          <p:cNvPr id="4" name="TextBox 3"/>
-          <p:cNvSpPr txBox="1"/>
-          <p:nvPr/>
-        </p:nvSpPr>
-        <p:spPr>
-          <a:xfrm>
-            <a:off x="548640" y="137160"/>
-            <a:ext cx="2743200" cy="274320"/>
-          </a:xfrm>
-          <a:prstGeom prst="rect">
-            <a:avLst/>
-          </a:prstGeom>
-          <a:noFill/>
-        </p:spPr>
-        <p:txBody>
-          <a:bodyPr wrap="square" anchor="t" lIns="0" rIns="0" tIns="0" bIns="0">
-            <a:spAutoFit/>
-          </a:bodyPr>
-          <a:lstStyle/>
-          <a:p>
-            <a:pPr algn="l"/>
-            <a:r>
-              <a:rPr sz="1600" b="1" i="0" spc="60">
-                <a:solidFill>
-                  <a:srgbClr val="B08D57"/>
-                </a:solidFill>
-                <a:latin typeface="Arial"/>
-              </a:rPr>
-              <a:t>33 INF DIV</a:t>
-            </a:r>
-          </a:p>
-        </p:txBody>
-      </p:sp>
-      <p:sp>
-        <p:nvSpPr>
-          <p:cNvPr id="5" name="TextBox 4"/>
-          <p:cNvSpPr txBox="1"/>
-          <p:nvPr/>
-        </p:nvSpPr>
-        <p:spPr>
-          <a:xfrm>
-            <a:off x="7528255" y="137160"/>
-            <a:ext cx="4114800" cy="274320"/>
-          </a:xfrm>
-          <a:prstGeom prst="rect">
-            <a:avLst/>
-          </a:prstGeom>
-          <a:noFill/>
-        </p:spPr>
-        <p:txBody>
-          <a:bodyPr wrap="square" anchor="t" lIns="0" rIns="0" tIns="0" bIns="0">
-            <a:spAutoFit/>
-          </a:bodyPr>
-          <a:lstStyle/>
-          <a:p>
-            <a:pPr algn="r"/>
-            <a:r>
-              <a:rPr sz="1600" b="0" i="0" spc="40">
-                <a:solidFill>
-                  <a:srgbClr val="B08D57"/>
-                </a:solidFill>
-                <a:latin typeface="Arial"/>
-              </a:rPr>
-              <a:t>EX DURJOY GHATI (CAX)-19</a:t>
-            </a:r>
-          </a:p>
-        </p:txBody>
-      </p:sp>
-      <p:sp>
-        <p:nvSpPr>
-          <p:cNvPr id="6" name="TextBox 5"/>
-          <p:cNvSpPr txBox="1"/>
-          <p:nvPr/>
-        </p:nvSpPr>
-        <p:spPr>
-          <a:xfrm>
-            <a:off x="548640" y="6473952"/>
-            <a:ext cx="5486400" cy="320040"/>
-          </a:xfrm>
-          <a:prstGeom prst="rect">
-            <a:avLst/>
-          </a:prstGeom>
-          <a:noFill/>
-        </p:spPr>
-        <p:txBody>
-          <a:bodyPr wrap="square" anchor="t" lIns="0" rIns="0" tIns="0" bIns="0">
-            <a:spAutoFit/>
-          </a:bodyPr>
-          <a:lstStyle/>
-          <a:p>
-            <a:pPr algn="l"/>
-            <a:r>
-              <a:rPr sz="1600" b="0" i="1">
-                <a:solidFill>
-                  <a:srgbClr val="B08D57"/>
-                </a:solidFill>
-                <a:latin typeface="Arial"/>
-              </a:rPr>
-              <a:t>OFFICIAL / FOR BRIEFING USE ONLY</a:t>
-            </a:r>
-          </a:p>
-        </p:txBody>
-      </p:sp>
-      <p:sp>
-        <p:nvSpPr>
-          <p:cNvPr id="7" name="TextBox 6"/>
-          <p:cNvSpPr txBox="1"/>
-          <p:nvPr/>
-        </p:nvSpPr>
-        <p:spPr>
-          <a:xfrm>
-            <a:off x="548640" y="502920"/>
-            <a:ext cx="11094415" cy="777240"/>
-          </a:xfrm>
-          <a:prstGeom prst="rect">
-            <a:avLst/>
-          </a:prstGeom>
-          <a:noFill/>
-        </p:spPr>
-        <p:txBody>
-          <a:bodyPr wrap="square" anchor="t" lIns="0" rIns="0" tIns="0" bIns="0">
-            <a:spAutoFit/>
-          </a:bodyPr>
-          <a:lstStyle/>
-          <a:p>
-            <a:pPr algn="l"/>
-            <a:r>
-              <a:rPr sz="3600" b="1" i="0" spc="150">
-                <a:solidFill>
-                  <a:srgbClr val="1B1F23"/>
-                </a:solidFill>
-                <a:latin typeface="Arial"/>
-              </a:rPr>
-              <a:t>LESSON 5 — CONDUCT OF CAX — CORRECT PROCEDURE</a:t>
-            </a:r>
-          </a:p>
-        </p:txBody>
-      </p:sp>
       <p:cxnSp>
         <p:nvCxnSpPr>
-          <p:cNvPr id="8" name="Connector 7"/>
+          <p:cNvPr id="6" name="Connector 5"/>
           <p:cNvCxnSpPr/>
           <p:nvPr/>
         </p:nvCxnSpPr>
         <p:spPr>
           <a:xfrm>
-            <a:off x="548640" y="1298448"/>
-            <a:ext cx="11094415" cy="0"/>
+            <a:off x="4724247" y="3931920"/>
+            <a:ext cx="2743200" cy="0"/>
           </a:xfrm>
           <a:prstGeom prst="line">
             <a:avLst/>
@@ -3690,14 +3294,14 @@
       </p:cxnSp>
       <p:sp>
         <p:nvSpPr>
-          <p:cNvPr id="9" name="TextBox 8"/>
+          <p:cNvPr id="7" name="TextBox 6"/>
           <p:cNvSpPr txBox="1"/>
           <p:nvPr/>
         </p:nvSpPr>
         <p:spPr>
           <a:xfrm>
-            <a:off x="548640" y="1481328"/>
-            <a:ext cx="11094415" cy="411480"/>
+            <a:off x="548640" y="4114800"/>
+            <a:ext cx="11094415" cy="594360"/>
           </a:xfrm>
           <a:prstGeom prst="rect">
             <a:avLst/>
@@ -3710,711 +3314,29 @@
           </a:bodyPr>
           <a:lstStyle/>
           <a:p>
-            <a:pPr algn="l"/>
-            <a:r>
-              <a:rPr sz="2400" b="1" i="0">
-                <a:solidFill>
-                  <a:srgbClr val="4B5320"/>
-                </a:solidFill>
-                <a:latin typeface="Arial"/>
-              </a:rPr>
-              <a:t>Attainment Process</a:t>
-            </a:r>
-          </a:p>
-        </p:txBody>
-      </p:sp>
-      <p:graphicFrame>
-        <p:nvGraphicFramePr>
-          <p:cNvPr id="10" name="Table 9"/>
-          <p:cNvGraphicFramePr>
-            <a:graphicFrameLocks noGrp="1"/>
-          </p:cNvGraphicFramePr>
-          <p:nvPr/>
-        </p:nvGraphicFramePr>
-        <p:xfrm>
-          <a:off x="548640" y="1965960"/>
-          <a:ext cx="11094415" cy="3794760"/>
-        </p:xfrm>
-        <a:graphic>
-          <a:graphicData uri="http://schemas.openxmlformats.org/drawingml/2006/table">
-            <a:tbl>
-              <a:tblPr firstRow="0" bandRow="0">
-                <a:tableStyleId>{5940675A-B579-460E-94D1-54222C63F5DA}</a:tableStyleId>
-              </a:tblPr>
-              <a:tblGrid>
-                <a:gridCol w="1463040"/>
-                <a:gridCol w="9631375"/>
-              </a:tblGrid>
-              <a:tr h="457200">
-                <a:tc>
-                  <a:txBody>
-                    <a:bodyPr wrap="square"/>
-                    <a:lstStyle/>
-                    <a:p>
-                      <a:pPr algn="ctr">
-                        <a:lnSpc>
-                          <a:spcPct val="115000"/>
-                        </a:lnSpc>
-                      </a:pPr>
-                      <a:r>
-                        <a:rPr sz="2200" b="1">
-                          <a:solidFill>
-                            <a:srgbClr val="F4F2EC"/>
-                          </a:solidFill>
-                          <a:latin typeface="Arial"/>
-                        </a:rPr>
-                        <a:t>Phase</a:t>
-                      </a:r>
-                    </a:p>
-                  </a:txBody>
-                  <a:tcPr anchor="ctr" marL="109728" marR="109728" marT="54864" marB="54864">
-                    <a:lnB w="9525" cap="flat" cmpd="sng" algn="ctr">
-                      <a:solidFill>
-                        <a:srgbClr val="4B5320"/>
-                      </a:solidFill>
-                    </a:lnB>
-                    <a:lnT w="9525" cap="flat" cmpd="sng" algn="ctr">
-                      <a:solidFill>
-                        <a:srgbClr val="4B5320"/>
-                      </a:solidFill>
-                    </a:lnT>
-                    <a:lnR w="9525" cap="flat" cmpd="sng" algn="ctr">
-                      <a:solidFill>
-                        <a:srgbClr val="4B5320"/>
-                      </a:solidFill>
-                    </a:lnR>
-                    <a:lnL w="9525" cap="flat" cmpd="sng" algn="ctr">
-                      <a:solidFill>
-                        <a:srgbClr val="4B5320"/>
-                      </a:solidFill>
-                    </a:lnL>
-                    <a:solidFill>
-                      <a:srgbClr val="4B5320"/>
-                    </a:solidFill>
-                  </a:tcPr>
-                </a:tc>
-                <a:tc>
-                  <a:txBody>
-                    <a:bodyPr wrap="square"/>
-                    <a:lstStyle/>
-                    <a:p>
-                      <a:pPr algn="ctr">
-                        <a:lnSpc>
-                          <a:spcPct val="115000"/>
-                        </a:lnSpc>
-                      </a:pPr>
-                      <a:r>
-                        <a:rPr sz="2200" b="1">
-                          <a:solidFill>
-                            <a:srgbClr val="F4F2EC"/>
-                          </a:solidFill>
-                          <a:latin typeface="Arial"/>
-                        </a:rPr>
-                        <a:t>Key Activities</a:t>
-                      </a:r>
-                    </a:p>
-                  </a:txBody>
-                  <a:tcPr anchor="ctr" marL="109728" marR="109728" marT="54864" marB="54864">
-                    <a:lnB w="9525" cap="flat" cmpd="sng" algn="ctr">
-                      <a:solidFill>
-                        <a:srgbClr val="4B5320"/>
-                      </a:solidFill>
-                    </a:lnB>
-                    <a:lnT w="9525" cap="flat" cmpd="sng" algn="ctr">
-                      <a:solidFill>
-                        <a:srgbClr val="4B5320"/>
-                      </a:solidFill>
-                    </a:lnT>
-                    <a:lnR w="9525" cap="flat" cmpd="sng" algn="ctr">
-                      <a:solidFill>
-                        <a:srgbClr val="4B5320"/>
-                      </a:solidFill>
-                    </a:lnR>
-                    <a:lnL w="9525" cap="flat" cmpd="sng" algn="ctr">
-                      <a:solidFill>
-                        <a:srgbClr val="4B5320"/>
-                      </a:solidFill>
-                    </a:lnL>
-                    <a:solidFill>
-                      <a:srgbClr val="4B5320"/>
-                    </a:solidFill>
-                  </a:tcPr>
-                </a:tc>
-              </a:tr>
-              <a:tr h="667512">
-                <a:tc>
-                  <a:txBody>
-                    <a:bodyPr wrap="square"/>
-                    <a:lstStyle/>
-                    <a:p>
-                      <a:pPr algn="ctr">
-                        <a:lnSpc>
-                          <a:spcPct val="115000"/>
-                        </a:lnSpc>
-                      </a:pPr>
-                      <a:r>
-                        <a:rPr sz="2200" b="1">
-                          <a:solidFill>
-                            <a:srgbClr val="4B5320"/>
-                          </a:solidFill>
-                          <a:latin typeface="Arial"/>
-                        </a:rPr>
-                        <a:t>Prep Stage</a:t>
-                      </a:r>
-                    </a:p>
-                  </a:txBody>
-                  <a:tcPr anchor="ctr" marL="109728" marR="109728" marT="54864" marB="54864">
-                    <a:lnB w="9525" cap="flat" cmpd="sng" algn="ctr">
-                      <a:solidFill>
-                        <a:srgbClr val="4B5320"/>
-                      </a:solidFill>
-                    </a:lnB>
-                    <a:lnT w="9525" cap="flat" cmpd="sng" algn="ctr">
-                      <a:solidFill>
-                        <a:srgbClr val="4B5320"/>
-                      </a:solidFill>
-                    </a:lnT>
-                    <a:lnR w="9525" cap="flat" cmpd="sng" algn="ctr">
-                      <a:solidFill>
-                        <a:srgbClr val="4B5320"/>
-                      </a:solidFill>
-                    </a:lnR>
-                    <a:lnL w="9525" cap="flat" cmpd="sng" algn="ctr">
-                      <a:solidFill>
-                        <a:srgbClr val="4B5320"/>
-                      </a:solidFill>
-                    </a:lnL>
-                    <a:solidFill>
-                      <a:srgbClr val="F4F2EC"/>
-                    </a:solidFill>
-                  </a:tcPr>
-                </a:tc>
-                <a:tc>
-                  <a:txBody>
-                    <a:bodyPr wrap="square"/>
-                    <a:lstStyle/>
-                    <a:p>
-                      <a:pPr algn="l">
-                        <a:lnSpc>
-                          <a:spcPct val="115000"/>
-                        </a:lnSpc>
-                      </a:pPr>
-                      <a:r>
-                        <a:rPr sz="2000" b="0">
-                          <a:solidFill>
-                            <a:srgbClr val="1B1F23"/>
-                          </a:solidFill>
-                          <a:latin typeface="Arial"/>
-                        </a:rPr>
-                        <a:t>1. IPC, gr recce and Final Terr Updt.</a:t>
-                      </a:r>
-                    </a:p>
-                    <a:p>
-                      <a:pPr algn="l">
-                        <a:lnSpc>
-                          <a:spcPct val="115000"/>
-                        </a:lnSpc>
-                      </a:pPr>
-                      <a:r>
-                        <a:rPr sz="2000" b="0">
-                          <a:solidFill>
-                            <a:srgbClr val="1B1F23"/>
-                          </a:solidFill>
-                          <a:latin typeface="Arial"/>
-                        </a:rPr>
-                        <a:t>2. Tabletop WG, virtual depl and MPC/FCC.</a:t>
-                      </a:r>
-                    </a:p>
-                  </a:txBody>
-                  <a:tcPr anchor="ctr" marL="109728" marR="109728" marT="54864" marB="54864">
-                    <a:lnB w="9525" cap="flat" cmpd="sng" algn="ctr">
-                      <a:solidFill>
-                        <a:srgbClr val="4B5320"/>
-                      </a:solidFill>
-                    </a:lnB>
-                    <a:lnT w="9525" cap="flat" cmpd="sng" algn="ctr">
-                      <a:solidFill>
-                        <a:srgbClr val="4B5320"/>
-                      </a:solidFill>
-                    </a:lnT>
-                    <a:lnR w="9525" cap="flat" cmpd="sng" algn="ctr">
-                      <a:solidFill>
-                        <a:srgbClr val="4B5320"/>
-                      </a:solidFill>
-                    </a:lnR>
-                    <a:lnL w="9525" cap="flat" cmpd="sng" algn="ctr">
-                      <a:solidFill>
-                        <a:srgbClr val="4B5320"/>
-                      </a:solidFill>
-                    </a:lnL>
-                    <a:solidFill>
-                      <a:srgbClr val="F4F2EC"/>
-                    </a:solidFill>
-                  </a:tcPr>
-                </a:tc>
-              </a:tr>
-              <a:tr h="667512">
-                <a:tc>
-                  <a:txBody>
-                    <a:bodyPr wrap="square"/>
-                    <a:lstStyle/>
-                    <a:p>
-                      <a:pPr algn="ctr">
-                        <a:lnSpc>
-                          <a:spcPct val="115000"/>
-                        </a:lnSpc>
-                      </a:pPr>
-                      <a:r>
-                        <a:rPr sz="2200" b="1">
-                          <a:solidFill>
-                            <a:srgbClr val="4B5320"/>
-                          </a:solidFill>
-                          <a:latin typeface="Arial"/>
-                        </a:rPr>
-                        <a:t>PS-1</a:t>
-                      </a:r>
-                    </a:p>
-                  </a:txBody>
-                  <a:tcPr anchor="ctr" marL="109728" marR="109728" marT="54864" marB="54864">
-                    <a:lnB w="9525" cap="flat" cmpd="sng" algn="ctr">
-                      <a:solidFill>
-                        <a:srgbClr val="4B5320"/>
-                      </a:solidFill>
-                    </a:lnB>
-                    <a:lnT w="9525" cap="flat" cmpd="sng" algn="ctr">
-                      <a:solidFill>
-                        <a:srgbClr val="4B5320"/>
-                      </a:solidFill>
-                    </a:lnT>
-                    <a:lnR w="9525" cap="flat" cmpd="sng" algn="ctr">
-                      <a:solidFill>
-                        <a:srgbClr val="4B5320"/>
-                      </a:solidFill>
-                    </a:lnR>
-                    <a:lnL w="9525" cap="flat" cmpd="sng" algn="ctr">
-                      <a:solidFill>
-                        <a:srgbClr val="4B5320"/>
-                      </a:solidFill>
-                    </a:lnL>
-                    <a:solidFill>
-                      <a:srgbClr val="F4F2EC"/>
-                    </a:solidFill>
-                  </a:tcPr>
-                </a:tc>
-                <a:tc>
-                  <a:txBody>
-                    <a:bodyPr wrap="square"/>
-                    <a:lstStyle/>
-                    <a:p>
-                      <a:pPr algn="l">
-                        <a:lnSpc>
-                          <a:spcPct val="115000"/>
-                        </a:lnSpc>
-                      </a:pPr>
-                      <a:r>
-                        <a:rPr sz="2000" b="0">
-                          <a:solidFill>
-                            <a:srgbClr val="1B1F23"/>
-                          </a:solidFill>
-                          <a:latin typeface="Arial"/>
-                        </a:rPr>
-                        <a:t>1. Threat Model/HPT list and DST applied in threat ident.</a:t>
-                      </a:r>
-                    </a:p>
-                    <a:p>
-                      <a:pPr algn="l">
-                        <a:lnSpc>
-                          <a:spcPct val="115000"/>
-                        </a:lnSpc>
-                      </a:pPr>
-                      <a:r>
-                        <a:rPr sz="2000" b="0">
-                          <a:solidFill>
-                            <a:srgbClr val="1B1F23"/>
-                          </a:solidFill>
-                          <a:latin typeface="Arial"/>
-                        </a:rPr>
-                        <a:t>2. Spl SITREP and CCIR process initiated.</a:t>
-                      </a:r>
-                    </a:p>
-                  </a:txBody>
-                  <a:tcPr anchor="ctr" marL="109728" marR="109728" marT="54864" marB="54864">
-                    <a:lnB w="9525" cap="flat" cmpd="sng" algn="ctr">
-                      <a:solidFill>
-                        <a:srgbClr val="4B5320"/>
-                      </a:solidFill>
-                    </a:lnB>
-                    <a:lnT w="9525" cap="flat" cmpd="sng" algn="ctr">
-                      <a:solidFill>
-                        <a:srgbClr val="4B5320"/>
-                      </a:solidFill>
-                    </a:lnT>
-                    <a:lnR w="9525" cap="flat" cmpd="sng" algn="ctr">
-                      <a:solidFill>
-                        <a:srgbClr val="4B5320"/>
-                      </a:solidFill>
-                    </a:lnR>
-                    <a:lnL w="9525" cap="flat" cmpd="sng" algn="ctr">
-                      <a:solidFill>
-                        <a:srgbClr val="4B5320"/>
-                      </a:solidFill>
-                    </a:lnL>
-                    <a:solidFill>
-                      <a:srgbClr val="F4F2EC"/>
-                    </a:solidFill>
-                  </a:tcPr>
-                </a:tc>
-              </a:tr>
-              <a:tr h="667512">
-                <a:tc>
-                  <a:txBody>
-                    <a:bodyPr wrap="square"/>
-                    <a:lstStyle/>
-                    <a:p>
-                      <a:pPr algn="ctr">
-                        <a:lnSpc>
-                          <a:spcPct val="115000"/>
-                        </a:lnSpc>
-                      </a:pPr>
-                      <a:r>
-                        <a:rPr sz="2200" b="1">
-                          <a:solidFill>
-                            <a:srgbClr val="4B5320"/>
-                          </a:solidFill>
-                          <a:latin typeface="Arial"/>
-                        </a:rPr>
-                        <a:t>PS-2</a:t>
-                      </a:r>
-                    </a:p>
-                  </a:txBody>
-                  <a:tcPr anchor="ctr" marL="109728" marR="109728" marT="54864" marB="54864">
-                    <a:lnB w="9525" cap="flat" cmpd="sng" algn="ctr">
-                      <a:solidFill>
-                        <a:srgbClr val="4B5320"/>
-                      </a:solidFill>
-                    </a:lnB>
-                    <a:lnT w="9525" cap="flat" cmpd="sng" algn="ctr">
-                      <a:solidFill>
-                        <a:srgbClr val="4B5320"/>
-                      </a:solidFill>
-                    </a:lnT>
-                    <a:lnR w="9525" cap="flat" cmpd="sng" algn="ctr">
-                      <a:solidFill>
-                        <a:srgbClr val="4B5320"/>
-                      </a:solidFill>
-                    </a:lnR>
-                    <a:lnL w="9525" cap="flat" cmpd="sng" algn="ctr">
-                      <a:solidFill>
-                        <a:srgbClr val="4B5320"/>
-                      </a:solidFill>
-                    </a:lnL>
-                    <a:solidFill>
-                      <a:srgbClr val="F4F2EC"/>
-                    </a:solidFill>
-                  </a:tcPr>
-                </a:tc>
-                <a:tc>
-                  <a:txBody>
-                    <a:bodyPr wrap="square"/>
-                    <a:lstStyle/>
-                    <a:p>
-                      <a:pPr algn="l">
-                        <a:lnSpc>
-                          <a:spcPct val="115000"/>
-                        </a:lnSpc>
-                      </a:pPr>
-                      <a:r>
-                        <a:rPr sz="2000" b="0">
-                          <a:solidFill>
-                            <a:srgbClr val="1B1F23"/>
-                          </a:solidFill>
-                          <a:latin typeface="Arial"/>
-                        </a:rPr>
-                        <a:t>1. BOS Sync Matrix applied in decision rows.</a:t>
-                      </a:r>
-                    </a:p>
-                    <a:p>
-                      <a:pPr algn="l">
-                        <a:lnSpc>
-                          <a:spcPct val="115000"/>
-                        </a:lnSpc>
-                      </a:pPr>
-                      <a:r>
-                        <a:rPr sz="2000" b="0">
-                          <a:solidFill>
-                            <a:srgbClr val="1B1F23"/>
-                          </a:solidFill>
-                          <a:latin typeface="Arial"/>
-                        </a:rPr>
-                        <a:t>2. Two-tier div-bde play with EXCON dir.</a:t>
-                      </a:r>
-                    </a:p>
-                  </a:txBody>
-                  <a:tcPr anchor="ctr" marL="109728" marR="109728" marT="54864" marB="54864">
-                    <a:lnB w="9525" cap="flat" cmpd="sng" algn="ctr">
-                      <a:solidFill>
-                        <a:srgbClr val="4B5320"/>
-                      </a:solidFill>
-                    </a:lnB>
-                    <a:lnT w="9525" cap="flat" cmpd="sng" algn="ctr">
-                      <a:solidFill>
-                        <a:srgbClr val="4B5320"/>
-                      </a:solidFill>
-                    </a:lnT>
-                    <a:lnR w="9525" cap="flat" cmpd="sng" algn="ctr">
-                      <a:solidFill>
-                        <a:srgbClr val="4B5320"/>
-                      </a:solidFill>
-                    </a:lnR>
-                    <a:lnL w="9525" cap="flat" cmpd="sng" algn="ctr">
-                      <a:solidFill>
-                        <a:srgbClr val="4B5320"/>
-                      </a:solidFill>
-                    </a:lnL>
-                    <a:solidFill>
-                      <a:srgbClr val="F4F2EC"/>
-                    </a:solidFill>
-                  </a:tcPr>
-                </a:tc>
-              </a:tr>
-              <a:tr h="667512">
-                <a:tc>
-                  <a:txBody>
-                    <a:bodyPr wrap="square"/>
-                    <a:lstStyle/>
-                    <a:p>
-                      <a:pPr algn="ctr">
-                        <a:lnSpc>
-                          <a:spcPct val="115000"/>
-                        </a:lnSpc>
-                      </a:pPr>
-                      <a:r>
-                        <a:rPr sz="2200" b="1">
-                          <a:solidFill>
-                            <a:srgbClr val="4B5320"/>
-                          </a:solidFill>
-                          <a:latin typeface="Arial"/>
-                        </a:rPr>
-                        <a:t>PS-3</a:t>
-                      </a:r>
-                    </a:p>
-                  </a:txBody>
-                  <a:tcPr anchor="ctr" marL="109728" marR="109728" marT="54864" marB="54864">
-                    <a:lnB w="9525" cap="flat" cmpd="sng" algn="ctr">
-                      <a:solidFill>
-                        <a:srgbClr val="4B5320"/>
-                      </a:solidFill>
-                    </a:lnB>
-                    <a:lnT w="9525" cap="flat" cmpd="sng" algn="ctr">
-                      <a:solidFill>
-                        <a:srgbClr val="4B5320"/>
-                      </a:solidFill>
-                    </a:lnT>
-                    <a:lnR w="9525" cap="flat" cmpd="sng" algn="ctr">
-                      <a:solidFill>
-                        <a:srgbClr val="4B5320"/>
-                      </a:solidFill>
-                    </a:lnR>
-                    <a:lnL w="9525" cap="flat" cmpd="sng" algn="ctr">
-                      <a:solidFill>
-                        <a:srgbClr val="4B5320"/>
-                      </a:solidFill>
-                    </a:lnL>
-                    <a:solidFill>
-                      <a:srgbClr val="F4F2EC"/>
-                    </a:solidFill>
-                  </a:tcPr>
-                </a:tc>
-                <a:tc>
-                  <a:txBody>
-                    <a:bodyPr wrap="square"/>
-                    <a:lstStyle/>
-                    <a:p>
-                      <a:pPr algn="l">
-                        <a:lnSpc>
-                          <a:spcPct val="115000"/>
-                        </a:lnSpc>
-                      </a:pPr>
-                      <a:r>
-                        <a:rPr sz="2000" b="0">
-                          <a:solidFill>
-                            <a:srgbClr val="1B1F23"/>
-                          </a:solidFill>
-                          <a:latin typeface="Arial"/>
-                        </a:rPr>
-                        <a:t>1. Relative Cbt Power Matrix and Attk Guidance Matrix applied.</a:t>
-                      </a:r>
-                    </a:p>
-                    <a:p>
-                      <a:pPr algn="l">
-                        <a:lnSpc>
-                          <a:spcPct val="115000"/>
-                        </a:lnSpc>
-                      </a:pPr>
-                      <a:r>
-                        <a:rPr sz="2000" b="0">
-                          <a:solidFill>
-                            <a:srgbClr val="1B1F23"/>
-                          </a:solidFill>
-                          <a:latin typeface="Arial"/>
-                        </a:rPr>
-                        <a:t>2. Div HQ decision cycle iaw DST.</a:t>
-                      </a:r>
-                    </a:p>
-                  </a:txBody>
-                  <a:tcPr anchor="ctr" marL="109728" marR="109728" marT="54864" marB="54864">
-                    <a:lnB w="9525" cap="flat" cmpd="sng" algn="ctr">
-                      <a:solidFill>
-                        <a:srgbClr val="4B5320"/>
-                      </a:solidFill>
-                    </a:lnB>
-                    <a:lnT w="9525" cap="flat" cmpd="sng" algn="ctr">
-                      <a:solidFill>
-                        <a:srgbClr val="4B5320"/>
-                      </a:solidFill>
-                    </a:lnT>
-                    <a:lnR w="9525" cap="flat" cmpd="sng" algn="ctr">
-                      <a:solidFill>
-                        <a:srgbClr val="4B5320"/>
-                      </a:solidFill>
-                    </a:lnR>
-                    <a:lnL w="9525" cap="flat" cmpd="sng" algn="ctr">
-                      <a:solidFill>
-                        <a:srgbClr val="4B5320"/>
-                      </a:solidFill>
-                    </a:lnL>
-                    <a:solidFill>
-                      <a:srgbClr val="F4F2EC"/>
-                    </a:solidFill>
-                  </a:tcPr>
-                </a:tc>
-              </a:tr>
-              <a:tr h="667512">
-                <a:tc>
-                  <a:txBody>
-                    <a:bodyPr wrap="square"/>
-                    <a:lstStyle/>
-                    <a:p>
-                      <a:pPr algn="ctr">
-                        <a:lnSpc>
-                          <a:spcPct val="115000"/>
-                        </a:lnSpc>
-                      </a:pPr>
-                      <a:r>
-                        <a:rPr sz="2200" b="1">
-                          <a:solidFill>
-                            <a:srgbClr val="4B5320"/>
-                          </a:solidFill>
-                          <a:latin typeface="Arial"/>
-                        </a:rPr>
-                        <a:t>PS-4</a:t>
-                      </a:r>
-                    </a:p>
-                  </a:txBody>
-                  <a:tcPr anchor="ctr" marL="109728" marR="109728" marT="54864" marB="54864">
-                    <a:lnB w="9525" cap="flat" cmpd="sng" algn="ctr">
-                      <a:solidFill>
-                        <a:srgbClr val="4B5320"/>
-                      </a:solidFill>
-                    </a:lnB>
-                    <a:lnT w="9525" cap="flat" cmpd="sng" algn="ctr">
-                      <a:solidFill>
-                        <a:srgbClr val="4B5320"/>
-                      </a:solidFill>
-                    </a:lnT>
-                    <a:lnR w="9525" cap="flat" cmpd="sng" algn="ctr">
-                      <a:solidFill>
-                        <a:srgbClr val="4B5320"/>
-                      </a:solidFill>
-                    </a:lnR>
-                    <a:lnL w="9525" cap="flat" cmpd="sng" algn="ctr">
-                      <a:solidFill>
-                        <a:srgbClr val="4B5320"/>
-                      </a:solidFill>
-                    </a:lnL>
-                    <a:solidFill>
-                      <a:srgbClr val="F4F2EC"/>
-                    </a:solidFill>
-                  </a:tcPr>
-                </a:tc>
-                <a:tc>
-                  <a:txBody>
-                    <a:bodyPr wrap="square"/>
-                    <a:lstStyle/>
-                    <a:p>
-                      <a:pPr algn="l">
-                        <a:lnSpc>
-                          <a:spcPct val="115000"/>
-                        </a:lnSpc>
-                      </a:pPr>
-                      <a:r>
-                        <a:rPr sz="2000" b="0">
-                          <a:solidFill>
-                            <a:srgbClr val="1B1F23"/>
-                          </a:solidFill>
-                          <a:latin typeface="Arial"/>
-                        </a:rPr>
-                        <a:t>1. DST/CCIR/BOS Sync Matrix fully applied to Div HQ dir.</a:t>
-                      </a:r>
-                    </a:p>
-                    <a:p>
-                      <a:pPr algn="l">
-                        <a:lnSpc>
-                          <a:spcPct val="115000"/>
-                        </a:lnSpc>
-                      </a:pPr>
-                      <a:r>
-                        <a:rPr sz="2000" b="0">
-                          <a:solidFill>
-                            <a:srgbClr val="1B1F23"/>
-                          </a:solidFill>
-                          <a:latin typeface="Arial"/>
-                        </a:rPr>
-                        <a:t>2. Prep for AAR/LLT eval of comd and staff performance.</a:t>
-                      </a:r>
-                    </a:p>
-                  </a:txBody>
-                  <a:tcPr anchor="ctr" marL="109728" marR="109728" marT="54864" marB="54864">
-                    <a:lnB w="9525" cap="flat" cmpd="sng" algn="ctr">
-                      <a:solidFill>
-                        <a:srgbClr val="4B5320"/>
-                      </a:solidFill>
-                    </a:lnB>
-                    <a:lnT w="9525" cap="flat" cmpd="sng" algn="ctr">
-                      <a:solidFill>
-                        <a:srgbClr val="4B5320"/>
-                      </a:solidFill>
-                    </a:lnT>
-                    <a:lnR w="9525" cap="flat" cmpd="sng" algn="ctr">
-                      <a:solidFill>
-                        <a:srgbClr val="4B5320"/>
-                      </a:solidFill>
-                    </a:lnR>
-                    <a:lnL w="9525" cap="flat" cmpd="sng" algn="ctr">
-                      <a:solidFill>
-                        <a:srgbClr val="4B5320"/>
-                      </a:solidFill>
-                    </a:lnL>
-                    <a:solidFill>
-                      <a:srgbClr val="F4F2EC"/>
-                    </a:solidFill>
-                  </a:tcPr>
-                </a:tc>
-              </a:tr>
-            </a:tbl>
-          </a:graphicData>
-        </a:graphic>
-      </p:graphicFrame>
-      <p:sp>
-        <p:nvSpPr>
-          <p:cNvPr id="11" name="TextBox 10"/>
+            <a:pPr algn="ctr"/>
+            <a:r>
+              <a:rPr sz="3200" b="0" i="1" spc="100">
+                <a:solidFill>
+                  <a:srgbClr val="F4F2EC"/>
+                </a:solidFill>
+                <a:latin typeface="Arial"/>
+              </a:rPr>
+              <a:t>OBJECT-LESSONS MATRIX</a:t>
+            </a:r>
+          </a:p>
+        </p:txBody>
+      </p:sp>
+      <p:sp>
+        <p:nvSpPr>
+          <p:cNvPr id="8" name="TextBox 7"/>
           <p:cNvSpPr txBox="1"/>
           <p:nvPr/>
         </p:nvSpPr>
         <p:spPr>
           <a:xfrm>
-            <a:off x="548640" y="6080760"/>
-            <a:ext cx="11094415" cy="320040"/>
+            <a:off x="548640" y="5943600"/>
+            <a:ext cx="11094415" cy="365760"/>
           </a:xfrm>
           <a:prstGeom prst="rect">
             <a:avLst/>
@@ -4427,15 +3349,15 @@
           </a:bodyPr>
           <a:lstStyle/>
           <a:p>
-            <a:pPr algn="l"/>
-            <a:r>
-              <a:rPr sz="1600" b="0" i="1">
+            <a:pPr algn="ctr"/>
+            <a:r>
+              <a:rPr sz="2000" b="0" i="0">
                 <a:solidFill>
                   <a:srgbClr val="B08D57"/>
                 </a:solidFill>
                 <a:latin typeface="Arial"/>
               </a:rPr>
-              <a:t>Source: EX DURJOY GHATI Obj-Lessons Matrix, 33 Inf Div.</a:t>
+              <a:t>Command Post Exercise  •  2025</a:t>
             </a:r>
           </a:p>
         </p:txBody>
@@ -4448,9 +3370,17 @@
 </p:sld>
 </file>
 
-<file path=ppt/slides/slide11.xml><?xml version="1.0" encoding="utf-8"?>
+<file path=ppt/slides/slide10.xml><?xml version="1.0" encoding="utf-8"?>
 <p:sld xmlns:a="http://schemas.openxmlformats.org/drawingml/2006/main" xmlns:p="http://schemas.openxmlformats.org/presentationml/2006/main" xmlns:r="http://schemas.openxmlformats.org/officeDocument/2006/relationships">
   <p:cSld>
+    <p:bg>
+      <p:bgPr>
+        <a:solidFill>
+          <a:srgbClr val="F4F2EC"/>
+        </a:solidFill>
+        <a:effectLst/>
+      </p:bgPr>
+    </p:bg>
     <p:spTree>
       <p:nvGrpSpPr>
         <p:cNvPr id="1" name=""/>
@@ -4460,51 +3390,7 @@
       <p:grpSpPr/>
       <p:sp>
         <p:nvSpPr>
-          <p:cNvPr id="2" name="Rectangle 1"/>
-          <p:cNvSpPr/>
-          <p:nvPr/>
-        </p:nvSpPr>
-        <p:spPr>
-          <a:xfrm>
-            <a:off x="0" y="0"/>
-            <a:ext cx="12191695" cy="6858000"/>
-          </a:xfrm>
-          <a:prstGeom prst="rect">
-            <a:avLst/>
-          </a:prstGeom>
-          <a:solidFill>
-            <a:srgbClr val="F4F2EC"/>
-          </a:solidFill>
-          <a:ln>
-            <a:noFill/>
-          </a:ln>
-          <a:effectLst/>
-        </p:spPr>
-        <p:style>
-          <a:lnRef idx="1">
-            <a:schemeClr val="accent1"/>
-          </a:lnRef>
-          <a:fillRef idx="3">
-            <a:schemeClr val="accent1"/>
-          </a:fillRef>
-          <a:effectRef idx="2">
-            <a:schemeClr val="accent1"/>
-          </a:effectRef>
-          <a:fontRef idx="minor">
-            <a:schemeClr val="lt1"/>
-          </a:fontRef>
-        </p:style>
-        <p:txBody>
-          <a:bodyPr rtlCol="0" anchor="ctr"/>
-          <a:lstStyle/>
-          <a:p>
-            <a:pPr algn="ctr"/>
-          </a:p>
-        </p:txBody>
-      </p:sp>
-      <p:sp>
-        <p:nvSpPr>
-          <p:cNvPr id="3" name="TextBox 2"/>
+          <p:cNvPr id="2" name="TextBox 1"/>
           <p:cNvSpPr txBox="1"/>
           <p:nvPr/>
         </p:nvSpPr>
@@ -4525,8 +3411,8 @@
           <a:lstStyle/>
           <a:p>
             <a:pPr algn="r"/>
-            <a:fld id="{428A71EA-591B-47C8-9962-A34CE5240A4F}" type="slidenum">
-              <a:rPr lang="en-US" sz="1600" b="1">
+            <a:fld id="{A883B8BE-7F41-4970-A70A-3FD7DDE7AC2E}" type="slidenum">
+              <a:rPr lang="en-US" sz="1600" b="1" dirty="0">
                 <a:solidFill>
                   <a:srgbClr val="B08D57"/>
                 </a:solidFill>
@@ -4548,7 +3434,7 @@
       </p:sp>
       <p:sp>
         <p:nvSpPr>
-          <p:cNvPr id="4" name="TextBox 3"/>
+          <p:cNvPr id="3" name="TextBox 2"/>
           <p:cNvSpPr txBox="1"/>
           <p:nvPr/>
         </p:nvSpPr>
@@ -4583,7 +3469,7 @@
       </p:sp>
       <p:sp>
         <p:nvSpPr>
-          <p:cNvPr id="5" name="TextBox 4"/>
+          <p:cNvPr id="4" name="TextBox 3"/>
           <p:cNvSpPr txBox="1"/>
           <p:nvPr/>
         </p:nvSpPr>
@@ -4618,7 +3504,7 @@
       </p:sp>
       <p:sp>
         <p:nvSpPr>
-          <p:cNvPr id="6" name="TextBox 5"/>
+          <p:cNvPr id="5" name="TextBox 4"/>
           <p:cNvSpPr txBox="1"/>
           <p:nvPr/>
         </p:nvSpPr>
@@ -4653,7 +3539,7 @@
       </p:sp>
       <p:sp>
         <p:nvSpPr>
-          <p:cNvPr id="7" name="TextBox 6"/>
+          <p:cNvPr id="6" name="TextBox 5"/>
           <p:cNvSpPr txBox="1"/>
           <p:nvPr/>
         </p:nvSpPr>
@@ -4675,20 +3561,20 @@
           <a:p>
             <a:pPr algn="l"/>
             <a:r>
-              <a:rPr sz="4200" b="1" i="0" spc="150">
+              <a:rPr sz="3600" b="1" i="0" spc="150">
                 <a:solidFill>
                   <a:srgbClr val="1B1F23"/>
                 </a:solidFill>
                 <a:latin typeface="Arial"/>
               </a:rPr>
-              <a:t>KEY TAKEAWAYS</a:t>
+              <a:t>LESSON 5 — CONDUCT OF CAX — CORRECT PROCEDURE</a:t>
             </a:r>
           </a:p>
         </p:txBody>
       </p:sp>
       <p:cxnSp>
         <p:nvCxnSpPr>
-          <p:cNvPr id="8" name="Connector 7"/>
+          <p:cNvPr id="7" name="Connector 6"/>
           <p:cNvCxnSpPr/>
           <p:nvPr/>
         </p:nvCxnSpPr>
@@ -4723,14 +3609,14 @@
       </p:cxnSp>
       <p:sp>
         <p:nvSpPr>
-          <p:cNvPr id="9" name="TextBox 8"/>
+          <p:cNvPr id="8" name="TextBox 7"/>
           <p:cNvSpPr txBox="1"/>
           <p:nvPr/>
         </p:nvSpPr>
         <p:spPr>
           <a:xfrm>
-            <a:off x="548640" y="1737360"/>
-            <a:ext cx="548640" cy="777240"/>
+            <a:off x="548640" y="1417320"/>
+            <a:ext cx="11094415" cy="365760"/>
           </a:xfrm>
           <a:prstGeom prst="rect">
             <a:avLst/>
@@ -4745,17 +3631,699 @@
           <a:p>
             <a:pPr algn="l"/>
             <a:r>
-              <a:rPr sz="2600" b="1" i="0">
+              <a:rPr sz="2400" b="1" i="0">
                 <a:solidFill>
                   <a:srgbClr val="4B5320"/>
                 </a:solidFill>
                 <a:latin typeface="Arial"/>
               </a:rPr>
-              <a:t>1.</a:t>
-            </a:r>
-          </a:p>
-        </p:txBody>
-      </p:sp>
+              <a:t>Attainment Process</a:t>
+            </a:r>
+          </a:p>
+        </p:txBody>
+      </p:sp>
+      <p:graphicFrame>
+        <p:nvGraphicFramePr>
+          <p:cNvPr id="9" name="Table 8"/>
+          <p:cNvGraphicFramePr>
+            <a:graphicFrameLocks noGrp="1"/>
+          </p:cNvGraphicFramePr>
+          <p:nvPr/>
+        </p:nvGraphicFramePr>
+        <p:xfrm>
+          <a:off x="548640" y="1874519"/>
+          <a:ext cx="11094415" cy="3931920"/>
+        </p:xfrm>
+        <a:graphic>
+          <a:graphicData uri="http://schemas.openxmlformats.org/drawingml/2006/table">
+            <a:tbl>
+              <a:tblPr firstRow="0" bandRow="0">
+                <a:tableStyleId>{2D5ABB26-0587-4C30-8999-92F81FD0307C}</a:tableStyleId>
+              </a:tblPr>
+              <a:tblGrid>
+                <a:gridCol w="1371600"/>
+                <a:gridCol w="9722815"/>
+              </a:tblGrid>
+              <a:tr h="411480">
+                <a:tc>
+                  <a:txBody>
+                    <a:bodyPr wrap="square"/>
+                    <a:lstStyle/>
+                    <a:p>
+                      <a:pPr algn="ctr">
+                        <a:lnSpc>
+                          <a:spcPct val="110000"/>
+                        </a:lnSpc>
+                      </a:pPr>
+                      <a:r>
+                        <a:rPr sz="2000" b="1">
+                          <a:solidFill>
+                            <a:srgbClr val="F4F2EC"/>
+                          </a:solidFill>
+                          <a:latin typeface="Arial"/>
+                        </a:rPr>
+                        <a:t>Phase</a:t>
+                      </a:r>
+                    </a:p>
+                  </a:txBody>
+                  <a:tcPr anchor="ctr" marL="109728" marR="109728" marT="45720" marB="45720">
+                    <a:lnB w="9525" cap="flat" cmpd="sng" algn="ctr">
+                      <a:solidFill>
+                        <a:srgbClr val="4B5320"/>
+                      </a:solidFill>
+                    </a:lnB>
+                    <a:lnT w="9525" cap="flat" cmpd="sng" algn="ctr">
+                      <a:solidFill>
+                        <a:srgbClr val="4B5320"/>
+                      </a:solidFill>
+                    </a:lnT>
+                    <a:lnR w="9525" cap="flat" cmpd="sng" algn="ctr">
+                      <a:solidFill>
+                        <a:srgbClr val="4B5320"/>
+                      </a:solidFill>
+                    </a:lnR>
+                    <a:lnL w="9525" cap="flat" cmpd="sng" algn="ctr">
+                      <a:solidFill>
+                        <a:srgbClr val="4B5320"/>
+                      </a:solidFill>
+                    </a:lnL>
+                    <a:solidFill>
+                      <a:srgbClr val="4B5320"/>
+                    </a:solidFill>
+                  </a:tcPr>
+                </a:tc>
+                <a:tc>
+                  <a:txBody>
+                    <a:bodyPr wrap="square"/>
+                    <a:lstStyle/>
+                    <a:p>
+                      <a:pPr algn="ctr">
+                        <a:lnSpc>
+                          <a:spcPct val="110000"/>
+                        </a:lnSpc>
+                      </a:pPr>
+                      <a:r>
+                        <a:rPr sz="2000" b="1">
+                          <a:solidFill>
+                            <a:srgbClr val="F4F2EC"/>
+                          </a:solidFill>
+                          <a:latin typeface="Arial"/>
+                        </a:rPr>
+                        <a:t>Key Activities</a:t>
+                      </a:r>
+                    </a:p>
+                  </a:txBody>
+                  <a:tcPr anchor="ctr" marL="109728" marR="109728" marT="45720" marB="45720">
+                    <a:lnB w="9525" cap="flat" cmpd="sng" algn="ctr">
+                      <a:solidFill>
+                        <a:srgbClr val="4B5320"/>
+                      </a:solidFill>
+                    </a:lnB>
+                    <a:lnT w="9525" cap="flat" cmpd="sng" algn="ctr">
+                      <a:solidFill>
+                        <a:srgbClr val="4B5320"/>
+                      </a:solidFill>
+                    </a:lnT>
+                    <a:lnR w="9525" cap="flat" cmpd="sng" algn="ctr">
+                      <a:solidFill>
+                        <a:srgbClr val="4B5320"/>
+                      </a:solidFill>
+                    </a:lnR>
+                    <a:lnL w="9525" cap="flat" cmpd="sng" algn="ctr">
+                      <a:solidFill>
+                        <a:srgbClr val="4B5320"/>
+                      </a:solidFill>
+                    </a:lnL>
+                    <a:solidFill>
+                      <a:srgbClr val="4B5320"/>
+                    </a:solidFill>
+                  </a:tcPr>
+                </a:tc>
+              </a:tr>
+              <a:tr h="704088">
+                <a:tc>
+                  <a:txBody>
+                    <a:bodyPr wrap="square"/>
+                    <a:lstStyle/>
+                    <a:p>
+                      <a:pPr algn="ctr">
+                        <a:lnSpc>
+                          <a:spcPct val="110000"/>
+                        </a:lnSpc>
+                      </a:pPr>
+                      <a:r>
+                        <a:rPr sz="2000" b="1">
+                          <a:solidFill>
+                            <a:srgbClr val="4B5320"/>
+                          </a:solidFill>
+                          <a:latin typeface="Arial"/>
+                        </a:rPr>
+                        <a:t>Prep Stage</a:t>
+                      </a:r>
+                    </a:p>
+                  </a:txBody>
+                  <a:tcPr anchor="ctr" marL="109728" marR="109728" marT="45720" marB="45720">
+                    <a:lnB w="9525" cap="flat" cmpd="sng" algn="ctr">
+                      <a:solidFill>
+                        <a:srgbClr val="4B5320"/>
+                      </a:solidFill>
+                    </a:lnB>
+                    <a:lnT w="9525" cap="flat" cmpd="sng" algn="ctr">
+                      <a:solidFill>
+                        <a:srgbClr val="4B5320"/>
+                      </a:solidFill>
+                    </a:lnT>
+                    <a:lnR w="9525" cap="flat" cmpd="sng" algn="ctr">
+                      <a:solidFill>
+                        <a:srgbClr val="4B5320"/>
+                      </a:solidFill>
+                    </a:lnR>
+                    <a:lnL w="9525" cap="flat" cmpd="sng" algn="ctr">
+                      <a:solidFill>
+                        <a:srgbClr val="4B5320"/>
+                      </a:solidFill>
+                    </a:lnL>
+                    <a:solidFill>
+                      <a:srgbClr val="F4F2EC"/>
+                    </a:solidFill>
+                  </a:tcPr>
+                </a:tc>
+                <a:tc>
+                  <a:txBody>
+                    <a:bodyPr wrap="square"/>
+                    <a:lstStyle/>
+                    <a:p>
+                      <a:pPr algn="l">
+                        <a:lnSpc>
+                          <a:spcPct val="110000"/>
+                        </a:lnSpc>
+                      </a:pPr>
+                      <a:r>
+                        <a:rPr sz="2000" b="0">
+                          <a:solidFill>
+                            <a:srgbClr val="1B1F23"/>
+                          </a:solidFill>
+                          <a:latin typeface="Arial"/>
+                        </a:rPr>
+                        <a:t>IPC, gr recce and Final Terr Updt.</a:t>
+                      </a:r>
+                    </a:p>
+                    <a:p>
+                      <a:pPr algn="l">
+                        <a:lnSpc>
+                          <a:spcPct val="110000"/>
+                        </a:lnSpc>
+                      </a:pPr>
+                      <a:r>
+                        <a:rPr sz="2000" b="0">
+                          <a:solidFill>
+                            <a:srgbClr val="1B1F23"/>
+                          </a:solidFill>
+                          <a:latin typeface="Arial"/>
+                        </a:rPr>
+                        <a:t>Tabletop WG, virtual depl and MPC/FCC.</a:t>
+                      </a:r>
+                    </a:p>
+                  </a:txBody>
+                  <a:tcPr anchor="ctr" marL="109728" marR="109728" marT="45720" marB="45720">
+                    <a:lnB w="9525" cap="flat" cmpd="sng" algn="ctr">
+                      <a:solidFill>
+                        <a:srgbClr val="4B5320"/>
+                      </a:solidFill>
+                    </a:lnB>
+                    <a:lnT w="9525" cap="flat" cmpd="sng" algn="ctr">
+                      <a:solidFill>
+                        <a:srgbClr val="4B5320"/>
+                      </a:solidFill>
+                    </a:lnT>
+                    <a:lnR w="9525" cap="flat" cmpd="sng" algn="ctr">
+                      <a:solidFill>
+                        <a:srgbClr val="4B5320"/>
+                      </a:solidFill>
+                    </a:lnR>
+                    <a:lnL w="9525" cap="flat" cmpd="sng" algn="ctr">
+                      <a:solidFill>
+                        <a:srgbClr val="4B5320"/>
+                      </a:solidFill>
+                    </a:lnL>
+                    <a:solidFill>
+                      <a:srgbClr val="F4F2EC"/>
+                    </a:solidFill>
+                  </a:tcPr>
+                </a:tc>
+              </a:tr>
+              <a:tr h="704088">
+                <a:tc>
+                  <a:txBody>
+                    <a:bodyPr wrap="square"/>
+                    <a:lstStyle/>
+                    <a:p>
+                      <a:pPr algn="ctr">
+                        <a:lnSpc>
+                          <a:spcPct val="110000"/>
+                        </a:lnSpc>
+                      </a:pPr>
+                      <a:r>
+                        <a:rPr sz="2000" b="1">
+                          <a:solidFill>
+                            <a:srgbClr val="4B5320"/>
+                          </a:solidFill>
+                          <a:latin typeface="Arial"/>
+                        </a:rPr>
+                        <a:t>PS-1</a:t>
+                      </a:r>
+                    </a:p>
+                  </a:txBody>
+                  <a:tcPr anchor="ctr" marL="109728" marR="109728" marT="45720" marB="45720">
+                    <a:lnB w="9525" cap="flat" cmpd="sng" algn="ctr">
+                      <a:solidFill>
+                        <a:srgbClr val="4B5320"/>
+                      </a:solidFill>
+                    </a:lnB>
+                    <a:lnT w="9525" cap="flat" cmpd="sng" algn="ctr">
+                      <a:solidFill>
+                        <a:srgbClr val="4B5320"/>
+                      </a:solidFill>
+                    </a:lnT>
+                    <a:lnR w="9525" cap="flat" cmpd="sng" algn="ctr">
+                      <a:solidFill>
+                        <a:srgbClr val="4B5320"/>
+                      </a:solidFill>
+                    </a:lnR>
+                    <a:lnL w="9525" cap="flat" cmpd="sng" algn="ctr">
+                      <a:solidFill>
+                        <a:srgbClr val="4B5320"/>
+                      </a:solidFill>
+                    </a:lnL>
+                    <a:solidFill>
+                      <a:srgbClr val="F4F2EC"/>
+                    </a:solidFill>
+                  </a:tcPr>
+                </a:tc>
+                <a:tc>
+                  <a:txBody>
+                    <a:bodyPr wrap="square"/>
+                    <a:lstStyle/>
+                    <a:p>
+                      <a:pPr algn="l">
+                        <a:lnSpc>
+                          <a:spcPct val="110000"/>
+                        </a:lnSpc>
+                      </a:pPr>
+                      <a:r>
+                        <a:rPr sz="2000" b="0">
+                          <a:solidFill>
+                            <a:srgbClr val="1B1F23"/>
+                          </a:solidFill>
+                          <a:latin typeface="Arial"/>
+                        </a:rPr>
+                        <a:t>Threat Model/HPT list and DST applied in threat ident.</a:t>
+                      </a:r>
+                    </a:p>
+                    <a:p>
+                      <a:pPr algn="l">
+                        <a:lnSpc>
+                          <a:spcPct val="110000"/>
+                        </a:lnSpc>
+                      </a:pPr>
+                      <a:r>
+                        <a:rPr sz="2000" b="0">
+                          <a:solidFill>
+                            <a:srgbClr val="1B1F23"/>
+                          </a:solidFill>
+                          <a:latin typeface="Arial"/>
+                        </a:rPr>
+                        <a:t>Spl SITREP and CCIR process initiated.</a:t>
+                      </a:r>
+                    </a:p>
+                  </a:txBody>
+                  <a:tcPr anchor="ctr" marL="109728" marR="109728" marT="45720" marB="45720">
+                    <a:lnB w="9525" cap="flat" cmpd="sng" algn="ctr">
+                      <a:solidFill>
+                        <a:srgbClr val="4B5320"/>
+                      </a:solidFill>
+                    </a:lnB>
+                    <a:lnT w="9525" cap="flat" cmpd="sng" algn="ctr">
+                      <a:solidFill>
+                        <a:srgbClr val="4B5320"/>
+                      </a:solidFill>
+                    </a:lnT>
+                    <a:lnR w="9525" cap="flat" cmpd="sng" algn="ctr">
+                      <a:solidFill>
+                        <a:srgbClr val="4B5320"/>
+                      </a:solidFill>
+                    </a:lnR>
+                    <a:lnL w="9525" cap="flat" cmpd="sng" algn="ctr">
+                      <a:solidFill>
+                        <a:srgbClr val="4B5320"/>
+                      </a:solidFill>
+                    </a:lnL>
+                    <a:solidFill>
+                      <a:srgbClr val="F4F2EC"/>
+                    </a:solidFill>
+                  </a:tcPr>
+                </a:tc>
+              </a:tr>
+              <a:tr h="704088">
+                <a:tc>
+                  <a:txBody>
+                    <a:bodyPr wrap="square"/>
+                    <a:lstStyle/>
+                    <a:p>
+                      <a:pPr algn="ctr">
+                        <a:lnSpc>
+                          <a:spcPct val="110000"/>
+                        </a:lnSpc>
+                      </a:pPr>
+                      <a:r>
+                        <a:rPr sz="2000" b="1">
+                          <a:solidFill>
+                            <a:srgbClr val="4B5320"/>
+                          </a:solidFill>
+                          <a:latin typeface="Arial"/>
+                        </a:rPr>
+                        <a:t>PS-2</a:t>
+                      </a:r>
+                    </a:p>
+                  </a:txBody>
+                  <a:tcPr anchor="ctr" marL="109728" marR="109728" marT="45720" marB="45720">
+                    <a:lnB w="9525" cap="flat" cmpd="sng" algn="ctr">
+                      <a:solidFill>
+                        <a:srgbClr val="4B5320"/>
+                      </a:solidFill>
+                    </a:lnB>
+                    <a:lnT w="9525" cap="flat" cmpd="sng" algn="ctr">
+                      <a:solidFill>
+                        <a:srgbClr val="4B5320"/>
+                      </a:solidFill>
+                    </a:lnT>
+                    <a:lnR w="9525" cap="flat" cmpd="sng" algn="ctr">
+                      <a:solidFill>
+                        <a:srgbClr val="4B5320"/>
+                      </a:solidFill>
+                    </a:lnR>
+                    <a:lnL w="9525" cap="flat" cmpd="sng" algn="ctr">
+                      <a:solidFill>
+                        <a:srgbClr val="4B5320"/>
+                      </a:solidFill>
+                    </a:lnL>
+                    <a:solidFill>
+                      <a:srgbClr val="F4F2EC"/>
+                    </a:solidFill>
+                  </a:tcPr>
+                </a:tc>
+                <a:tc>
+                  <a:txBody>
+                    <a:bodyPr wrap="square"/>
+                    <a:lstStyle/>
+                    <a:p>
+                      <a:pPr algn="l">
+                        <a:lnSpc>
+                          <a:spcPct val="110000"/>
+                        </a:lnSpc>
+                      </a:pPr>
+                      <a:r>
+                        <a:rPr sz="2000" b="0">
+                          <a:solidFill>
+                            <a:srgbClr val="1B1F23"/>
+                          </a:solidFill>
+                          <a:latin typeface="Arial"/>
+                        </a:rPr>
+                        <a:t>BOS Sync Matrix applied in decision rows.</a:t>
+                      </a:r>
+                    </a:p>
+                    <a:p>
+                      <a:pPr algn="l">
+                        <a:lnSpc>
+                          <a:spcPct val="110000"/>
+                        </a:lnSpc>
+                      </a:pPr>
+                      <a:r>
+                        <a:rPr sz="2000" b="0">
+                          <a:solidFill>
+                            <a:srgbClr val="1B1F23"/>
+                          </a:solidFill>
+                          <a:latin typeface="Arial"/>
+                        </a:rPr>
+                        <a:t>Two-tier div-bde play with EXCON dir.</a:t>
+                      </a:r>
+                    </a:p>
+                  </a:txBody>
+                  <a:tcPr anchor="ctr" marL="109728" marR="109728" marT="45720" marB="45720">
+                    <a:lnB w="9525" cap="flat" cmpd="sng" algn="ctr">
+                      <a:solidFill>
+                        <a:srgbClr val="4B5320"/>
+                      </a:solidFill>
+                    </a:lnB>
+                    <a:lnT w="9525" cap="flat" cmpd="sng" algn="ctr">
+                      <a:solidFill>
+                        <a:srgbClr val="4B5320"/>
+                      </a:solidFill>
+                    </a:lnT>
+                    <a:lnR w="9525" cap="flat" cmpd="sng" algn="ctr">
+                      <a:solidFill>
+                        <a:srgbClr val="4B5320"/>
+                      </a:solidFill>
+                    </a:lnR>
+                    <a:lnL w="9525" cap="flat" cmpd="sng" algn="ctr">
+                      <a:solidFill>
+                        <a:srgbClr val="4B5320"/>
+                      </a:solidFill>
+                    </a:lnL>
+                    <a:solidFill>
+                      <a:srgbClr val="F4F2EC"/>
+                    </a:solidFill>
+                  </a:tcPr>
+                </a:tc>
+              </a:tr>
+              <a:tr h="704088">
+                <a:tc>
+                  <a:txBody>
+                    <a:bodyPr wrap="square"/>
+                    <a:lstStyle/>
+                    <a:p>
+                      <a:pPr algn="ctr">
+                        <a:lnSpc>
+                          <a:spcPct val="110000"/>
+                        </a:lnSpc>
+                      </a:pPr>
+                      <a:r>
+                        <a:rPr sz="2000" b="1">
+                          <a:solidFill>
+                            <a:srgbClr val="4B5320"/>
+                          </a:solidFill>
+                          <a:latin typeface="Arial"/>
+                        </a:rPr>
+                        <a:t>PS-3</a:t>
+                      </a:r>
+                    </a:p>
+                  </a:txBody>
+                  <a:tcPr anchor="ctr" marL="109728" marR="109728" marT="45720" marB="45720">
+                    <a:lnB w="9525" cap="flat" cmpd="sng" algn="ctr">
+                      <a:solidFill>
+                        <a:srgbClr val="4B5320"/>
+                      </a:solidFill>
+                    </a:lnB>
+                    <a:lnT w="9525" cap="flat" cmpd="sng" algn="ctr">
+                      <a:solidFill>
+                        <a:srgbClr val="4B5320"/>
+                      </a:solidFill>
+                    </a:lnT>
+                    <a:lnR w="9525" cap="flat" cmpd="sng" algn="ctr">
+                      <a:solidFill>
+                        <a:srgbClr val="4B5320"/>
+                      </a:solidFill>
+                    </a:lnR>
+                    <a:lnL w="9525" cap="flat" cmpd="sng" algn="ctr">
+                      <a:solidFill>
+                        <a:srgbClr val="4B5320"/>
+                      </a:solidFill>
+                    </a:lnL>
+                    <a:solidFill>
+                      <a:srgbClr val="F4F2EC"/>
+                    </a:solidFill>
+                  </a:tcPr>
+                </a:tc>
+                <a:tc>
+                  <a:txBody>
+                    <a:bodyPr wrap="square"/>
+                    <a:lstStyle/>
+                    <a:p>
+                      <a:pPr algn="l">
+                        <a:lnSpc>
+                          <a:spcPct val="110000"/>
+                        </a:lnSpc>
+                      </a:pPr>
+                      <a:r>
+                        <a:rPr sz="2000" b="0">
+                          <a:solidFill>
+                            <a:srgbClr val="1B1F23"/>
+                          </a:solidFill>
+                          <a:latin typeface="Arial"/>
+                        </a:rPr>
+                        <a:t>Relative Cbt Power and Attk Guidance Matrix applied.</a:t>
+                      </a:r>
+                    </a:p>
+                    <a:p>
+                      <a:pPr algn="l">
+                        <a:lnSpc>
+                          <a:spcPct val="110000"/>
+                        </a:lnSpc>
+                      </a:pPr>
+                      <a:r>
+                        <a:rPr sz="2000" b="0">
+                          <a:solidFill>
+                            <a:srgbClr val="1B1F23"/>
+                          </a:solidFill>
+                          <a:latin typeface="Arial"/>
+                        </a:rPr>
+                        <a:t>Div HQ decision cycle iaw DST.</a:t>
+                      </a:r>
+                    </a:p>
+                  </a:txBody>
+                  <a:tcPr anchor="ctr" marL="109728" marR="109728" marT="45720" marB="45720">
+                    <a:lnB w="9525" cap="flat" cmpd="sng" algn="ctr">
+                      <a:solidFill>
+                        <a:srgbClr val="4B5320"/>
+                      </a:solidFill>
+                    </a:lnB>
+                    <a:lnT w="9525" cap="flat" cmpd="sng" algn="ctr">
+                      <a:solidFill>
+                        <a:srgbClr val="4B5320"/>
+                      </a:solidFill>
+                    </a:lnT>
+                    <a:lnR w="9525" cap="flat" cmpd="sng" algn="ctr">
+                      <a:solidFill>
+                        <a:srgbClr val="4B5320"/>
+                      </a:solidFill>
+                    </a:lnR>
+                    <a:lnL w="9525" cap="flat" cmpd="sng" algn="ctr">
+                      <a:solidFill>
+                        <a:srgbClr val="4B5320"/>
+                      </a:solidFill>
+                    </a:lnL>
+                    <a:solidFill>
+                      <a:srgbClr val="F4F2EC"/>
+                    </a:solidFill>
+                  </a:tcPr>
+                </a:tc>
+              </a:tr>
+              <a:tr h="704088">
+                <a:tc>
+                  <a:txBody>
+                    <a:bodyPr wrap="square"/>
+                    <a:lstStyle/>
+                    <a:p>
+                      <a:pPr algn="ctr">
+                        <a:lnSpc>
+                          <a:spcPct val="110000"/>
+                        </a:lnSpc>
+                      </a:pPr>
+                      <a:r>
+                        <a:rPr sz="2000" b="1">
+                          <a:solidFill>
+                            <a:srgbClr val="4B5320"/>
+                          </a:solidFill>
+                          <a:latin typeface="Arial"/>
+                        </a:rPr>
+                        <a:t>PS-4</a:t>
+                      </a:r>
+                    </a:p>
+                  </a:txBody>
+                  <a:tcPr anchor="ctr" marL="109728" marR="109728" marT="45720" marB="45720">
+                    <a:lnB w="9525" cap="flat" cmpd="sng" algn="ctr">
+                      <a:solidFill>
+                        <a:srgbClr val="4B5320"/>
+                      </a:solidFill>
+                    </a:lnB>
+                    <a:lnT w="9525" cap="flat" cmpd="sng" algn="ctr">
+                      <a:solidFill>
+                        <a:srgbClr val="4B5320"/>
+                      </a:solidFill>
+                    </a:lnT>
+                    <a:lnR w="9525" cap="flat" cmpd="sng" algn="ctr">
+                      <a:solidFill>
+                        <a:srgbClr val="4B5320"/>
+                      </a:solidFill>
+                    </a:lnR>
+                    <a:lnL w="9525" cap="flat" cmpd="sng" algn="ctr">
+                      <a:solidFill>
+                        <a:srgbClr val="4B5320"/>
+                      </a:solidFill>
+                    </a:lnL>
+                    <a:solidFill>
+                      <a:srgbClr val="F4F2EC"/>
+                    </a:solidFill>
+                  </a:tcPr>
+                </a:tc>
+                <a:tc>
+                  <a:txBody>
+                    <a:bodyPr wrap="square"/>
+                    <a:lstStyle/>
+                    <a:p>
+                      <a:pPr algn="l">
+                        <a:lnSpc>
+                          <a:spcPct val="110000"/>
+                        </a:lnSpc>
+                      </a:pPr>
+                      <a:r>
+                        <a:rPr sz="2000" b="0">
+                          <a:solidFill>
+                            <a:srgbClr val="1B1F23"/>
+                          </a:solidFill>
+                          <a:latin typeface="Arial"/>
+                        </a:rPr>
+                        <a:t>DST/CCIR/BOS Sync Matrix fully applied to Div HQ dir.</a:t>
+                      </a:r>
+                    </a:p>
+                    <a:p>
+                      <a:pPr algn="l">
+                        <a:lnSpc>
+                          <a:spcPct val="110000"/>
+                        </a:lnSpc>
+                      </a:pPr>
+                      <a:r>
+                        <a:rPr sz="2000" b="0">
+                          <a:solidFill>
+                            <a:srgbClr val="1B1F23"/>
+                          </a:solidFill>
+                          <a:latin typeface="Arial"/>
+                        </a:rPr>
+                        <a:t>Prep for AAR/LLT eval of comd and staff performance.</a:t>
+                      </a:r>
+                    </a:p>
+                  </a:txBody>
+                  <a:tcPr anchor="ctr" marL="109728" marR="109728" marT="45720" marB="45720">
+                    <a:lnB w="9525" cap="flat" cmpd="sng" algn="ctr">
+                      <a:solidFill>
+                        <a:srgbClr val="4B5320"/>
+                      </a:solidFill>
+                    </a:lnB>
+                    <a:lnT w="9525" cap="flat" cmpd="sng" algn="ctr">
+                      <a:solidFill>
+                        <a:srgbClr val="4B5320"/>
+                      </a:solidFill>
+                    </a:lnT>
+                    <a:lnR w="9525" cap="flat" cmpd="sng" algn="ctr">
+                      <a:solidFill>
+                        <a:srgbClr val="4B5320"/>
+                      </a:solidFill>
+                    </a:lnR>
+                    <a:lnL w="9525" cap="flat" cmpd="sng" algn="ctr">
+                      <a:solidFill>
+                        <a:srgbClr val="4B5320"/>
+                      </a:solidFill>
+                    </a:lnL>
+                    <a:solidFill>
+                      <a:srgbClr val="F4F2EC"/>
+                    </a:solidFill>
+                  </a:tcPr>
+                </a:tc>
+              </a:tr>
+            </a:tbl>
+          </a:graphicData>
+        </a:graphic>
+      </p:graphicFrame>
       <p:sp>
         <p:nvSpPr>
           <p:cNvPr id="10" name="TextBox 9"/>
@@ -4764,8 +4332,8 @@
         </p:nvSpPr>
         <p:spPr>
           <a:xfrm>
-            <a:off x="1097280" y="1737360"/>
-            <a:ext cx="10545775" cy="777240"/>
+            <a:off x="548640" y="6035040"/>
+            <a:ext cx="11094415" cy="320040"/>
           </a:xfrm>
           <a:prstGeom prst="rect">
             <a:avLst/>
@@ -4778,315 +4346,15 @@
           </a:bodyPr>
           <a:lstStyle/>
           <a:p>
-            <a:pPr algn="l">
-              <a:lnSpc>
-                <a:spcPct val="120000"/>
-              </a:lnSpc>
-            </a:pPr>
-            <a:r>
-              <a:rPr sz="2600" b="0" i="0">
-                <a:solidFill>
-                  <a:srgbClr val="1B1F23"/>
-                </a:solidFill>
-                <a:latin typeface="Arial"/>
-              </a:rPr>
-              <a:t>Validation of the Div Ops Plan iaw Planning Directive 1/2025.</a:t>
-            </a:r>
-          </a:p>
-        </p:txBody>
-      </p:sp>
-      <p:sp>
-        <p:nvSpPr>
-          <p:cNvPr id="11" name="TextBox 10"/>
-          <p:cNvSpPr txBox="1"/>
-          <p:nvPr/>
-        </p:nvSpPr>
-        <p:spPr>
-          <a:xfrm>
-            <a:off x="548640" y="2514600"/>
-            <a:ext cx="548640" cy="777240"/>
-          </a:xfrm>
-          <a:prstGeom prst="rect">
-            <a:avLst/>
-          </a:prstGeom>
-          <a:noFill/>
-        </p:spPr>
-        <p:txBody>
-          <a:bodyPr wrap="square" anchor="t" lIns="0" rIns="0" tIns="0" bIns="0">
-            <a:spAutoFit/>
-          </a:bodyPr>
-          <a:lstStyle/>
-          <a:p>
             <a:pPr algn="l"/>
             <a:r>
-              <a:rPr sz="2600" b="1" i="0">
-                <a:solidFill>
-                  <a:srgbClr val="4B5320"/>
-                </a:solidFill>
-                <a:latin typeface="Arial"/>
-              </a:rPr>
-              <a:t>2.</a:t>
-            </a:r>
-          </a:p>
-        </p:txBody>
-      </p:sp>
-      <p:sp>
-        <p:nvSpPr>
-          <p:cNvPr id="12" name="TextBox 11"/>
-          <p:cNvSpPr txBox="1"/>
-          <p:nvPr/>
-        </p:nvSpPr>
-        <p:spPr>
-          <a:xfrm>
-            <a:off x="1097280" y="2514600"/>
-            <a:ext cx="10545775" cy="777240"/>
-          </a:xfrm>
-          <a:prstGeom prst="rect">
-            <a:avLst/>
-          </a:prstGeom>
-          <a:noFill/>
-        </p:spPr>
-        <p:txBody>
-          <a:bodyPr wrap="square" anchor="t" lIns="0" rIns="0" tIns="0" bIns="0">
-            <a:spAutoFit/>
-          </a:bodyPr>
-          <a:lstStyle/>
-          <a:p>
-            <a:pPr algn="l">
-              <a:lnSpc>
-                <a:spcPct val="120000"/>
-              </a:lnSpc>
-            </a:pPr>
-            <a:r>
-              <a:rPr sz="2600" b="0" i="0">
-                <a:solidFill>
-                  <a:srgbClr val="1B1F23"/>
-                </a:solidFill>
-                <a:latin typeface="Arial"/>
-              </a:rPr>
-              <a:t>Justification of resource alloc/use (arty, engr, log); identify need for addl resources.</a:t>
-            </a:r>
-          </a:p>
-        </p:txBody>
-      </p:sp>
-      <p:sp>
-        <p:nvSpPr>
-          <p:cNvPr id="13" name="TextBox 12"/>
-          <p:cNvSpPr txBox="1"/>
-          <p:nvPr/>
-        </p:nvSpPr>
-        <p:spPr>
-          <a:xfrm>
-            <a:off x="548640" y="3291840"/>
-            <a:ext cx="548640" cy="777240"/>
-          </a:xfrm>
-          <a:prstGeom prst="rect">
-            <a:avLst/>
-          </a:prstGeom>
-          <a:noFill/>
-        </p:spPr>
-        <p:txBody>
-          <a:bodyPr wrap="square" anchor="t" lIns="0" rIns="0" tIns="0" bIns="0">
-            <a:spAutoFit/>
-          </a:bodyPr>
-          <a:lstStyle/>
-          <a:p>
-            <a:pPr algn="l"/>
-            <a:r>
-              <a:rPr sz="2600" b="1" i="0">
-                <a:solidFill>
-                  <a:srgbClr val="4B5320"/>
-                </a:solidFill>
-                <a:latin typeface="Arial"/>
-              </a:rPr>
-              <a:t>3.</a:t>
-            </a:r>
-          </a:p>
-        </p:txBody>
-      </p:sp>
-      <p:sp>
-        <p:nvSpPr>
-          <p:cNvPr id="14" name="TextBox 13"/>
-          <p:cNvSpPr txBox="1"/>
-          <p:nvPr/>
-        </p:nvSpPr>
-        <p:spPr>
-          <a:xfrm>
-            <a:off x="1097280" y="3291840"/>
-            <a:ext cx="10545775" cy="777240"/>
-          </a:xfrm>
-          <a:prstGeom prst="rect">
-            <a:avLst/>
-          </a:prstGeom>
-          <a:noFill/>
-        </p:spPr>
-        <p:txBody>
-          <a:bodyPr wrap="square" anchor="t" lIns="0" rIns="0" tIns="0" bIns="0">
-            <a:spAutoFit/>
-          </a:bodyPr>
-          <a:lstStyle/>
-          <a:p>
-            <a:pPr algn="l">
-              <a:lnSpc>
-                <a:spcPct val="120000"/>
-              </a:lnSpc>
-            </a:pPr>
-            <a:r>
-              <a:rPr sz="2600" b="0" i="0">
-                <a:solidFill>
-                  <a:srgbClr val="1B1F23"/>
-                </a:solidFill>
-                <a:latin typeface="Arial"/>
-              </a:rPr>
-              <a:t>Validation of the time plan for simultaneous offn-def ops at div/bde level.</a:t>
-            </a:r>
-          </a:p>
-        </p:txBody>
-      </p:sp>
-      <p:sp>
-        <p:nvSpPr>
-          <p:cNvPr id="15" name="TextBox 14"/>
-          <p:cNvSpPr txBox="1"/>
-          <p:nvPr/>
-        </p:nvSpPr>
-        <p:spPr>
-          <a:xfrm>
-            <a:off x="548640" y="4069080"/>
-            <a:ext cx="548640" cy="777240"/>
-          </a:xfrm>
-          <a:prstGeom prst="rect">
-            <a:avLst/>
-          </a:prstGeom>
-          <a:noFill/>
-        </p:spPr>
-        <p:txBody>
-          <a:bodyPr wrap="square" anchor="t" lIns="0" rIns="0" tIns="0" bIns="0">
-            <a:spAutoFit/>
-          </a:bodyPr>
-          <a:lstStyle/>
-          <a:p>
-            <a:pPr algn="l"/>
-            <a:r>
-              <a:rPr sz="2600" b="1" i="0">
-                <a:solidFill>
-                  <a:srgbClr val="4B5320"/>
-                </a:solidFill>
-                <a:latin typeface="Arial"/>
-              </a:rPr>
-              <a:t>4.</a:t>
-            </a:r>
-          </a:p>
-        </p:txBody>
-      </p:sp>
-      <p:sp>
-        <p:nvSpPr>
-          <p:cNvPr id="16" name="TextBox 15"/>
-          <p:cNvSpPr txBox="1"/>
-          <p:nvPr/>
-        </p:nvSpPr>
-        <p:spPr>
-          <a:xfrm>
-            <a:off x="1097280" y="4069080"/>
-            <a:ext cx="10545775" cy="777240"/>
-          </a:xfrm>
-          <a:prstGeom prst="rect">
-            <a:avLst/>
-          </a:prstGeom>
-          <a:noFill/>
-        </p:spPr>
-        <p:txBody>
-          <a:bodyPr wrap="square" anchor="t" lIns="0" rIns="0" tIns="0" bIns="0">
-            <a:spAutoFit/>
-          </a:bodyPr>
-          <a:lstStyle/>
-          <a:p>
-            <a:pPr algn="l">
-              <a:lnSpc>
-                <a:spcPct val="120000"/>
-              </a:lnSpc>
-            </a:pPr>
-            <a:r>
-              <a:rPr sz="2600" b="0" i="0">
-                <a:solidFill>
-                  <a:srgbClr val="1B1F23"/>
-                </a:solidFill>
-                <a:latin typeface="Arial"/>
-              </a:rPr>
-              <a:t>Identification of coord requirements between Div HQ and flanking bde gps.</a:t>
-            </a:r>
-          </a:p>
-        </p:txBody>
-      </p:sp>
-      <p:sp>
-        <p:nvSpPr>
-          <p:cNvPr id="17" name="TextBox 16"/>
-          <p:cNvSpPr txBox="1"/>
-          <p:nvPr/>
-        </p:nvSpPr>
-        <p:spPr>
-          <a:xfrm>
-            <a:off x="548640" y="4846320"/>
-            <a:ext cx="548640" cy="777240"/>
-          </a:xfrm>
-          <a:prstGeom prst="rect">
-            <a:avLst/>
-          </a:prstGeom>
-          <a:noFill/>
-        </p:spPr>
-        <p:txBody>
-          <a:bodyPr wrap="square" anchor="t" lIns="0" rIns="0" tIns="0" bIns="0">
-            <a:spAutoFit/>
-          </a:bodyPr>
-          <a:lstStyle/>
-          <a:p>
-            <a:pPr algn="l"/>
-            <a:r>
-              <a:rPr sz="2600" b="1" i="0">
-                <a:solidFill>
-                  <a:srgbClr val="4B5320"/>
-                </a:solidFill>
-                <a:latin typeface="Arial"/>
-              </a:rPr>
-              <a:t>5.</a:t>
-            </a:r>
-          </a:p>
-        </p:txBody>
-      </p:sp>
-      <p:sp>
-        <p:nvSpPr>
-          <p:cNvPr id="18" name="TextBox 17"/>
-          <p:cNvSpPr txBox="1"/>
-          <p:nvPr/>
-        </p:nvSpPr>
-        <p:spPr>
-          <a:xfrm>
-            <a:off x="1097280" y="4846320"/>
-            <a:ext cx="10545775" cy="777240"/>
-          </a:xfrm>
-          <a:prstGeom prst="rect">
-            <a:avLst/>
-          </a:prstGeom>
-          <a:noFill/>
-        </p:spPr>
-        <p:txBody>
-          <a:bodyPr wrap="square" anchor="t" lIns="0" rIns="0" tIns="0" bIns="0">
-            <a:spAutoFit/>
-          </a:bodyPr>
-          <a:lstStyle/>
-          <a:p>
-            <a:pPr algn="l">
-              <a:lnSpc>
-                <a:spcPct val="120000"/>
-              </a:lnSpc>
-            </a:pPr>
-            <a:r>
-              <a:rPr sz="2600" b="0" i="0">
-                <a:solidFill>
-                  <a:srgbClr val="1B1F23"/>
-                </a:solidFill>
-                <a:latin typeface="Arial"/>
-              </a:rPr>
-              <a:t>Assessment of capability and correct emp of UWF/volunteer forces and BGB within the div AOP.</a:t>
+              <a:rPr sz="1600" b="0" i="1">
+                <a:solidFill>
+                  <a:srgbClr val="B08D57"/>
+                </a:solidFill>
+                <a:latin typeface="Arial"/>
+              </a:rPr>
+              <a:t>Source: EX DURJOY GHATI Obj-Lessons Matrix, 33 Inf Div.</a:t>
             </a:r>
           </a:p>
         </p:txBody>
@@ -5099,9 +4367,17 @@
 </p:sld>
 </file>
 
-<file path=ppt/slides/slide12.xml><?xml version="1.0" encoding="utf-8"?>
+<file path=ppt/slides/slide11.xml><?xml version="1.0" encoding="utf-8"?>
 <p:sld xmlns:a="http://schemas.openxmlformats.org/drawingml/2006/main" xmlns:p="http://schemas.openxmlformats.org/presentationml/2006/main" xmlns:r="http://schemas.openxmlformats.org/officeDocument/2006/relationships">
   <p:cSld>
+    <p:bg>
+      <p:bgPr>
+        <a:solidFill>
+          <a:srgbClr val="F4F2EC"/>
+        </a:solidFill>
+        <a:effectLst/>
+      </p:bgPr>
+    </p:bg>
     <p:spTree>
       <p:nvGrpSpPr>
         <p:cNvPr id="1" name=""/>
@@ -5111,51 +4387,7 @@
       <p:grpSpPr/>
       <p:sp>
         <p:nvSpPr>
-          <p:cNvPr id="2" name="Rectangle 1"/>
-          <p:cNvSpPr/>
-          <p:nvPr/>
-        </p:nvSpPr>
-        <p:spPr>
-          <a:xfrm>
-            <a:off x="0" y="0"/>
-            <a:ext cx="12191695" cy="6858000"/>
-          </a:xfrm>
-          <a:prstGeom prst="rect">
-            <a:avLst/>
-          </a:prstGeom>
-          <a:solidFill>
-            <a:srgbClr val="F4F2EC"/>
-          </a:solidFill>
-          <a:ln>
-            <a:noFill/>
-          </a:ln>
-          <a:effectLst/>
-        </p:spPr>
-        <p:style>
-          <a:lnRef idx="1">
-            <a:schemeClr val="accent1"/>
-          </a:lnRef>
-          <a:fillRef idx="3">
-            <a:schemeClr val="accent1"/>
-          </a:fillRef>
-          <a:effectRef idx="2">
-            <a:schemeClr val="accent1"/>
-          </a:effectRef>
-          <a:fontRef idx="minor">
-            <a:schemeClr val="lt1"/>
-          </a:fontRef>
-        </p:style>
-        <p:txBody>
-          <a:bodyPr rtlCol="0" anchor="ctr"/>
-          <a:lstStyle/>
-          <a:p>
-            <a:pPr algn="ctr"/>
-          </a:p>
-        </p:txBody>
-      </p:sp>
-      <p:sp>
-        <p:nvSpPr>
-          <p:cNvPr id="3" name="TextBox 2"/>
+          <p:cNvPr id="2" name="TextBox 1"/>
           <p:cNvSpPr txBox="1"/>
           <p:nvPr/>
         </p:nvSpPr>
@@ -5176,8 +4408,8 @@
           <a:lstStyle/>
           <a:p>
             <a:pPr algn="r"/>
-            <a:fld id="{12CE78C2-E8BC-478F-970A-7DB3C9C9704E}" type="slidenum">
-              <a:rPr lang="en-US" sz="1600" b="1">
+            <a:fld id="{C6EA8F3A-112A-4AFD-8F68-F020ABE0AA4E}" type="slidenum">
+              <a:rPr lang="en-US" sz="1600" b="1" dirty="0">
                 <a:solidFill>
                   <a:srgbClr val="B08D57"/>
                 </a:solidFill>
@@ -5199,7 +4431,7 @@
       </p:sp>
       <p:sp>
         <p:nvSpPr>
-          <p:cNvPr id="4" name="TextBox 3"/>
+          <p:cNvPr id="3" name="TextBox 2"/>
           <p:cNvSpPr txBox="1"/>
           <p:nvPr/>
         </p:nvSpPr>
@@ -5234,7 +4466,7 @@
       </p:sp>
       <p:sp>
         <p:nvSpPr>
-          <p:cNvPr id="5" name="TextBox 4"/>
+          <p:cNvPr id="4" name="TextBox 3"/>
           <p:cNvSpPr txBox="1"/>
           <p:nvPr/>
         </p:nvSpPr>
@@ -5269,7 +4501,7 @@
       </p:sp>
       <p:sp>
         <p:nvSpPr>
-          <p:cNvPr id="6" name="TextBox 5"/>
+          <p:cNvPr id="5" name="TextBox 4"/>
           <p:cNvSpPr txBox="1"/>
           <p:nvPr/>
         </p:nvSpPr>
@@ -5304,7 +4536,7 @@
       </p:sp>
       <p:sp>
         <p:nvSpPr>
-          <p:cNvPr id="7" name="TextBox 6"/>
+          <p:cNvPr id="6" name="TextBox 5"/>
           <p:cNvSpPr txBox="1"/>
           <p:nvPr/>
         </p:nvSpPr>
@@ -5332,14 +4564,14 @@
                 </a:solidFill>
                 <a:latin typeface="Arial"/>
               </a:rPr>
-              <a:t>RECOMMENDATIONS</a:t>
+              <a:t>KEY TAKEAWAYS</a:t>
             </a:r>
           </a:p>
         </p:txBody>
       </p:sp>
       <p:cxnSp>
         <p:nvCxnSpPr>
-          <p:cNvPr id="8" name="Connector 7"/>
+          <p:cNvPr id="7" name="Connector 6"/>
           <p:cNvCxnSpPr/>
           <p:nvPr/>
         </p:nvCxnSpPr>
@@ -5374,14 +4606,14 @@
       </p:cxnSp>
       <p:sp>
         <p:nvSpPr>
-          <p:cNvPr id="9" name="TextBox 8"/>
+          <p:cNvPr id="8" name="TextBox 7"/>
           <p:cNvSpPr txBox="1"/>
           <p:nvPr/>
         </p:nvSpPr>
         <p:spPr>
           <a:xfrm>
             <a:off x="548640" y="1737360"/>
-            <a:ext cx="548640" cy="868680"/>
+            <a:ext cx="548640" cy="777240"/>
           </a:xfrm>
           <a:prstGeom prst="rect">
             <a:avLst/>
@@ -5396,7 +4628,7 @@
           <a:p>
             <a:pPr algn="l"/>
             <a:r>
-              <a:rPr sz="2400" b="1" i="0">
+              <a:rPr sz="2600" b="1" i="0">
                 <a:solidFill>
                   <a:srgbClr val="4B5320"/>
                 </a:solidFill>
@@ -5409,14 +4641,14 @@
       </p:sp>
       <p:sp>
         <p:nvSpPr>
-          <p:cNvPr id="10" name="TextBox 9"/>
+          <p:cNvPr id="9" name="TextBox 8"/>
           <p:cNvSpPr txBox="1"/>
           <p:nvPr/>
         </p:nvSpPr>
         <p:spPr>
           <a:xfrm>
             <a:off x="1097280" y="1737360"/>
-            <a:ext cx="10545775" cy="868680"/>
+            <a:ext cx="10545775" cy="777240"/>
           </a:xfrm>
           <a:prstGeom prst="rect">
             <a:avLst/>
@@ -5431,31 +4663,31 @@
           <a:p>
             <a:pPr algn="l">
               <a:lnSpc>
-                <a:spcPct val="115000"/>
+                <a:spcPct val="120000"/>
               </a:lnSpc>
             </a:pPr>
             <a:r>
-              <a:rPr sz="2400" b="0" i="0">
+              <a:rPr sz="2600" b="0" i="0">
                 <a:solidFill>
                   <a:srgbClr val="1B1F23"/>
                 </a:solidFill>
                 <a:latin typeface="Arial"/>
               </a:rPr>
-              <a:t>Institutionalise the IPB/DDMP-to-Ops Plan sequence for simultaneous offn-def planning (addresses Lesson 1).</a:t>
-            </a:r>
-          </a:p>
-        </p:txBody>
-      </p:sp>
-      <p:sp>
-        <p:nvSpPr>
-          <p:cNvPr id="11" name="TextBox 10"/>
+              <a:t>Validation of the Div Ops Plan iaw Planning Directive 1/2025.</a:t>
+            </a:r>
+          </a:p>
+        </p:txBody>
+      </p:sp>
+      <p:sp>
+        <p:nvSpPr>
+          <p:cNvPr id="10" name="TextBox 9"/>
           <p:cNvSpPr txBox="1"/>
           <p:nvPr/>
         </p:nvSpPr>
         <p:spPr>
           <a:xfrm>
-            <a:off x="548640" y="2606040"/>
-            <a:ext cx="548640" cy="868680"/>
+            <a:off x="548640" y="2514600"/>
+            <a:ext cx="548640" cy="777240"/>
           </a:xfrm>
           <a:prstGeom prst="rect">
             <a:avLst/>
@@ -5470,7 +4702,7 @@
           <a:p>
             <a:pPr algn="l"/>
             <a:r>
-              <a:rPr sz="2400" b="1" i="0">
+              <a:rPr sz="2600" b="1" i="0">
                 <a:solidFill>
                   <a:srgbClr val="4B5320"/>
                 </a:solidFill>
@@ -5483,14 +4715,14 @@
       </p:sp>
       <p:sp>
         <p:nvSpPr>
-          <p:cNvPr id="12" name="TextBox 11"/>
+          <p:cNvPr id="11" name="TextBox 10"/>
           <p:cNvSpPr txBox="1"/>
           <p:nvPr/>
         </p:nvSpPr>
         <p:spPr>
           <a:xfrm>
-            <a:off x="1097280" y="2606040"/>
-            <a:ext cx="10545775" cy="868680"/>
+            <a:off x="1097280" y="2514600"/>
+            <a:ext cx="10545775" cy="777240"/>
           </a:xfrm>
           <a:prstGeom prst="rect">
             <a:avLst/>
@@ -5505,31 +4737,31 @@
           <a:p>
             <a:pPr algn="l">
               <a:lnSpc>
-                <a:spcPct val="115000"/>
+                <a:spcPct val="120000"/>
               </a:lnSpc>
             </a:pPr>
             <a:r>
-              <a:rPr sz="2400" b="0" i="0">
+              <a:rPr sz="2600" b="0" i="0">
                 <a:solidFill>
                   <a:srgbClr val="1B1F23"/>
                 </a:solidFill>
                 <a:latin typeface="Arial"/>
               </a:rPr>
-              <a:t>Formalise Comd Decision Points and delegated decision auth at div/bde level (addresses Lesson 2).</a:t>
-            </a:r>
-          </a:p>
-        </p:txBody>
-      </p:sp>
-      <p:sp>
-        <p:nvSpPr>
-          <p:cNvPr id="13" name="TextBox 12"/>
+              <a:t>Justification of resource alloc/use (arty, engr, log); identify addl resource needs.</a:t>
+            </a:r>
+          </a:p>
+        </p:txBody>
+      </p:sp>
+      <p:sp>
+        <p:nvSpPr>
+          <p:cNvPr id="12" name="TextBox 11"/>
           <p:cNvSpPr txBox="1"/>
           <p:nvPr/>
         </p:nvSpPr>
         <p:spPr>
           <a:xfrm>
-            <a:off x="548640" y="3474720"/>
-            <a:ext cx="548640" cy="868680"/>
+            <a:off x="548640" y="3291840"/>
+            <a:ext cx="548640" cy="777240"/>
           </a:xfrm>
           <a:prstGeom prst="rect">
             <a:avLst/>
@@ -5544,7 +4776,7 @@
           <a:p>
             <a:pPr algn="l"/>
             <a:r>
-              <a:rPr sz="2400" b="1" i="0">
+              <a:rPr sz="2600" b="1" i="0">
                 <a:solidFill>
                   <a:srgbClr val="4B5320"/>
                 </a:solidFill>
@@ -5557,14 +4789,14 @@
       </p:sp>
       <p:sp>
         <p:nvSpPr>
-          <p:cNvPr id="14" name="TextBox 13"/>
+          <p:cNvPr id="13" name="TextBox 12"/>
           <p:cNvSpPr txBox="1"/>
           <p:nvPr/>
         </p:nvSpPr>
         <p:spPr>
           <a:xfrm>
-            <a:off x="1097280" y="3474720"/>
-            <a:ext cx="10545775" cy="868680"/>
+            <a:off x="1097280" y="3291840"/>
+            <a:ext cx="10545775" cy="777240"/>
           </a:xfrm>
           <a:prstGeom prst="rect">
             <a:avLst/>
@@ -5579,31 +4811,31 @@
           <a:p>
             <a:pPr algn="l">
               <a:lnSpc>
-                <a:spcPct val="115000"/>
+                <a:spcPct val="120000"/>
               </a:lnSpc>
             </a:pPr>
             <a:r>
-              <a:rPr sz="2400" b="0" i="0">
+              <a:rPr sz="2600" b="0" i="0">
                 <a:solidFill>
                   <a:srgbClr val="1B1F23"/>
                 </a:solidFill>
                 <a:latin typeface="Arial"/>
               </a:rPr>
-              <a:t>Build ammo/CASEVAC contingency margins into the log plan for multi-sector ops (addresses Lesson 3).</a:t>
-            </a:r>
-          </a:p>
-        </p:txBody>
-      </p:sp>
-      <p:sp>
-        <p:nvSpPr>
-          <p:cNvPr id="15" name="TextBox 14"/>
+              <a:t>Validation of the time plan for simultaneous offn-def ops at div/bde level.</a:t>
+            </a:r>
+          </a:p>
+        </p:txBody>
+      </p:sp>
+      <p:sp>
+        <p:nvSpPr>
+          <p:cNvPr id="14" name="TextBox 13"/>
           <p:cNvSpPr txBox="1"/>
           <p:nvPr/>
         </p:nvSpPr>
         <p:spPr>
           <a:xfrm>
-            <a:off x="548640" y="4343400"/>
-            <a:ext cx="548640" cy="868680"/>
+            <a:off x="548640" y="4069080"/>
+            <a:ext cx="548640" cy="777240"/>
           </a:xfrm>
           <a:prstGeom prst="rect">
             <a:avLst/>
@@ -5618,7 +4850,7 @@
           <a:p>
             <a:pPr algn="l"/>
             <a:r>
-              <a:rPr sz="2400" b="1" i="0">
+              <a:rPr sz="2600" b="1" i="0">
                 <a:solidFill>
                   <a:srgbClr val="4B5320"/>
                 </a:solidFill>
@@ -5631,14 +4863,14 @@
       </p:sp>
       <p:sp>
         <p:nvSpPr>
-          <p:cNvPr id="16" name="TextBox 15"/>
+          <p:cNvPr id="15" name="TextBox 14"/>
           <p:cNvSpPr txBox="1"/>
           <p:nvPr/>
         </p:nvSpPr>
         <p:spPr>
           <a:xfrm>
-            <a:off x="1097280" y="4343400"/>
-            <a:ext cx="10545775" cy="868680"/>
+            <a:off x="1097280" y="4069080"/>
+            <a:ext cx="10545775" cy="777240"/>
           </a:xfrm>
           <a:prstGeom prst="rect">
             <a:avLst/>
@@ -5653,31 +4885,31 @@
           <a:p>
             <a:pPr algn="l">
               <a:lnSpc>
-                <a:spcPct val="115000"/>
+                <a:spcPct val="120000"/>
               </a:lnSpc>
             </a:pPr>
             <a:r>
-              <a:rPr sz="2400" b="0" i="0">
+              <a:rPr sz="2600" b="0" i="0">
                 <a:solidFill>
                   <a:srgbClr val="1B1F23"/>
                 </a:solidFill>
                 <a:latin typeface="Arial"/>
               </a:rPr>
-              <a:t>Standardise UWF/volunteer tasking, stay-behind cells and reporting drills (addresses Lesson 4).</a:t>
-            </a:r>
-          </a:p>
-        </p:txBody>
-      </p:sp>
-      <p:sp>
-        <p:nvSpPr>
-          <p:cNvPr id="17" name="TextBox 16"/>
+              <a:t>Identification of coord requirements between Div HQ and flanking bde gps.</a:t>
+            </a:r>
+          </a:p>
+        </p:txBody>
+      </p:sp>
+      <p:sp>
+        <p:nvSpPr>
+          <p:cNvPr id="16" name="TextBox 15"/>
           <p:cNvSpPr txBox="1"/>
           <p:nvPr/>
         </p:nvSpPr>
         <p:spPr>
           <a:xfrm>
-            <a:off x="548640" y="5212080"/>
-            <a:ext cx="548640" cy="868680"/>
+            <a:off x="548640" y="4846320"/>
+            <a:ext cx="548640" cy="777240"/>
           </a:xfrm>
           <a:prstGeom prst="rect">
             <a:avLst/>
@@ -5692,7 +4924,7 @@
           <a:p>
             <a:pPr algn="l"/>
             <a:r>
-              <a:rPr sz="2400" b="1" i="0">
+              <a:rPr sz="2600" b="1" i="0">
                 <a:solidFill>
                   <a:srgbClr val="4B5320"/>
                 </a:solidFill>
@@ -5705,14 +4937,14 @@
       </p:sp>
       <p:sp>
         <p:nvSpPr>
-          <p:cNvPr id="18" name="TextBox 17"/>
+          <p:cNvPr id="17" name="TextBox 16"/>
           <p:cNvSpPr txBox="1"/>
           <p:nvPr/>
         </p:nvSpPr>
         <p:spPr>
           <a:xfrm>
-            <a:off x="1097280" y="5212080"/>
-            <a:ext cx="10545775" cy="868680"/>
+            <a:off x="1097280" y="4846320"/>
+            <a:ext cx="10545775" cy="777240"/>
           </a:xfrm>
           <a:prstGeom prst="rect">
             <a:avLst/>
@@ -5727,17 +4959,17 @@
           <a:p>
             <a:pPr algn="l">
               <a:lnSpc>
-                <a:spcPct val="115000"/>
+                <a:spcPct val="120000"/>
               </a:lnSpc>
             </a:pPr>
             <a:r>
-              <a:rPr sz="2400" b="0" i="0">
+              <a:rPr sz="2600" b="0" i="0">
                 <a:solidFill>
                   <a:srgbClr val="1B1F23"/>
                 </a:solidFill>
                 <a:latin typeface="Arial"/>
               </a:rPr>
-              <a:t>Retain the DST/CCIR/BOS Sync Matrix as the standard CAX conduct procedure (addresses Lesson 5).</a:t>
+              <a:t>Assessment of capability and correct emp of UWF/volunteers and BGB within the div AOP.</a:t>
             </a:r>
           </a:p>
         </p:txBody>
@@ -5750,9 +4982,17 @@
 </p:sld>
 </file>
 
-<file path=ppt/slides/slide13.xml><?xml version="1.0" encoding="utf-8"?>
+<file path=ppt/slides/slide12.xml><?xml version="1.0" encoding="utf-8"?>
 <p:sld xmlns:a="http://schemas.openxmlformats.org/drawingml/2006/main" xmlns:p="http://schemas.openxmlformats.org/presentationml/2006/main" xmlns:r="http://schemas.openxmlformats.org/officeDocument/2006/relationships">
   <p:cSld>
+    <p:bg>
+      <p:bgPr>
+        <a:solidFill>
+          <a:srgbClr val="F4F2EC"/>
+        </a:solidFill>
+        <a:effectLst/>
+      </p:bgPr>
+    </p:bg>
     <p:spTree>
       <p:nvGrpSpPr>
         <p:cNvPr id="1" name=""/>
@@ -5762,51 +5002,7 @@
       <p:grpSpPr/>
       <p:sp>
         <p:nvSpPr>
-          <p:cNvPr id="2" name="Rectangle 1"/>
-          <p:cNvSpPr/>
-          <p:nvPr/>
-        </p:nvSpPr>
-        <p:spPr>
-          <a:xfrm>
-            <a:off x="0" y="0"/>
-            <a:ext cx="12191695" cy="6858000"/>
-          </a:xfrm>
-          <a:prstGeom prst="rect">
-            <a:avLst/>
-          </a:prstGeom>
-          <a:solidFill>
-            <a:srgbClr val="1B1F23"/>
-          </a:solidFill>
-          <a:ln>
-            <a:noFill/>
-          </a:ln>
-          <a:effectLst/>
-        </p:spPr>
-        <p:style>
-          <a:lnRef idx="1">
-            <a:schemeClr val="accent1"/>
-          </a:lnRef>
-          <a:fillRef idx="3">
-            <a:schemeClr val="accent1"/>
-          </a:fillRef>
-          <a:effectRef idx="2">
-            <a:schemeClr val="accent1"/>
-          </a:effectRef>
-          <a:fontRef idx="minor">
-            <a:schemeClr val="lt1"/>
-          </a:fontRef>
-        </p:style>
-        <p:txBody>
-          <a:bodyPr rtlCol="0" anchor="ctr"/>
-          <a:lstStyle/>
-          <a:p>
-            <a:pPr algn="ctr"/>
-          </a:p>
-        </p:txBody>
-      </p:sp>
-      <p:sp>
-        <p:nvSpPr>
-          <p:cNvPr id="3" name="TextBox 2"/>
+          <p:cNvPr id="2" name="TextBox 1"/>
           <p:cNvSpPr txBox="1"/>
           <p:nvPr/>
         </p:nvSpPr>
@@ -5827,8 +5023,8 @@
           <a:lstStyle/>
           <a:p>
             <a:pPr algn="r"/>
-            <a:fld id="{03145E9E-7009-4CF8-8ABA-5AA0C83C0C14}" type="slidenum">
-              <a:rPr lang="en-US" sz="1600" b="1">
+            <a:fld id="{689F40C1-C55F-4A41-8AC5-72CE7EB6AADA}" type="slidenum">
+              <a:rPr lang="en-US" sz="1600" b="1" dirty="0">
                 <a:solidFill>
                   <a:srgbClr val="B08D57"/>
                 </a:solidFill>
@@ -5850,14 +5046,14 @@
       </p:sp>
       <p:sp>
         <p:nvSpPr>
-          <p:cNvPr id="4" name="TextBox 3"/>
+          <p:cNvPr id="3" name="TextBox 2"/>
           <p:cNvSpPr txBox="1"/>
           <p:nvPr/>
         </p:nvSpPr>
         <p:spPr>
           <a:xfrm>
-            <a:off x="548640" y="2743200"/>
-            <a:ext cx="11094415" cy="731520"/>
+            <a:off x="548640" y="137160"/>
+            <a:ext cx="2743200" cy="274320"/>
           </a:xfrm>
           <a:prstGeom prst="rect">
             <a:avLst/>
@@ -5870,29 +5066,29 @@
           </a:bodyPr>
           <a:lstStyle/>
           <a:p>
-            <a:pPr algn="ctr"/>
-            <a:r>
-              <a:rPr sz="4000" b="1" i="0" spc="100">
+            <a:pPr algn="l"/>
+            <a:r>
+              <a:rPr sz="1600" b="1" i="0" spc="60">
                 <a:solidFill>
                   <a:srgbClr val="B08D57"/>
                 </a:solidFill>
                 <a:latin typeface="Arial"/>
               </a:rPr>
-              <a:t>QUESTIONS &amp; DISCUSSION</a:t>
-            </a:r>
-          </a:p>
-        </p:txBody>
-      </p:sp>
-      <p:sp>
-        <p:nvSpPr>
-          <p:cNvPr id="5" name="TextBox 4"/>
+              <a:t>33 INF DIV</a:t>
+            </a:r>
+          </a:p>
+        </p:txBody>
+      </p:sp>
+      <p:sp>
+        <p:nvSpPr>
+          <p:cNvPr id="4" name="TextBox 3"/>
           <p:cNvSpPr txBox="1"/>
           <p:nvPr/>
         </p:nvSpPr>
         <p:spPr>
           <a:xfrm>
-            <a:off x="548640" y="3566160"/>
-            <a:ext cx="11094415" cy="457200"/>
+            <a:off x="7528255" y="137160"/>
+            <a:ext cx="4114800" cy="274320"/>
           </a:xfrm>
           <a:prstGeom prst="rect">
             <a:avLst/>
@@ -5905,29 +5101,29 @@
           </a:bodyPr>
           <a:lstStyle/>
           <a:p>
-            <a:pPr algn="ctr"/>
-            <a:r>
-              <a:rPr sz="2000" b="0" i="0">
-                <a:solidFill>
-                  <a:srgbClr val="F4F2EC"/>
-                </a:solidFill>
-                <a:latin typeface="Arial"/>
-              </a:rPr>
-              <a:t>EX DURJOY GHATI (CAX)-19 • 33 INF DIV</a:t>
-            </a:r>
-          </a:p>
-        </p:txBody>
-      </p:sp>
-      <p:sp>
-        <p:nvSpPr>
-          <p:cNvPr id="6" name="TextBox 5"/>
+            <a:pPr algn="r"/>
+            <a:r>
+              <a:rPr sz="1600" b="0" i="0" spc="40">
+                <a:solidFill>
+                  <a:srgbClr val="B08D57"/>
+                </a:solidFill>
+                <a:latin typeface="Arial"/>
+              </a:rPr>
+              <a:t>EX DURJOY GHATI (CAX)-19</a:t>
+            </a:r>
+          </a:p>
+        </p:txBody>
+      </p:sp>
+      <p:sp>
+        <p:nvSpPr>
+          <p:cNvPr id="5" name="TextBox 4"/>
           <p:cNvSpPr txBox="1"/>
           <p:nvPr/>
         </p:nvSpPr>
         <p:spPr>
           <a:xfrm>
-            <a:off x="548640" y="6217920"/>
-            <a:ext cx="11094415" cy="365760"/>
+            <a:off x="548640" y="6473952"/>
+            <a:ext cx="5486400" cy="320040"/>
           </a:xfrm>
           <a:prstGeom prst="rect">
             <a:avLst/>
@@ -5940,7 +5136,7 @@
           </a:bodyPr>
           <a:lstStyle/>
           <a:p>
-            <a:pPr algn="ctr"/>
+            <a:pPr algn="l"/>
             <a:r>
               <a:rPr sz="1600" b="0" i="1">
                 <a:solidFill>
@@ -5948,127 +5144,21 @@
                 </a:solidFill>
                 <a:latin typeface="Arial"/>
               </a:rPr>
-              <a:t>RESTRICTED — INTERNAL USE</a:t>
-            </a:r>
-          </a:p>
-        </p:txBody>
-      </p:sp>
-    </p:spTree>
-  </p:cSld>
-  <p:clrMapOvr>
-    <a:masterClrMapping/>
-  </p:clrMapOvr>
-</p:sld>
-</file>
-
-<file path=ppt/slides/slide2.xml><?xml version="1.0" encoding="utf-8"?>
-<p:sld xmlns:a="http://schemas.openxmlformats.org/drawingml/2006/main" xmlns:p="http://schemas.openxmlformats.org/presentationml/2006/main" xmlns:r="http://schemas.openxmlformats.org/officeDocument/2006/relationships">
-  <p:cSld>
-    <p:spTree>
-      <p:nvGrpSpPr>
-        <p:cNvPr id="1" name=""/>
-        <p:cNvGrpSpPr/>
-        <p:nvPr/>
-      </p:nvGrpSpPr>
-      <p:grpSpPr/>
-      <p:sp>
-        <p:nvSpPr>
-          <p:cNvPr id="2" name="Rectangle 1"/>
-          <p:cNvSpPr/>
-          <p:nvPr/>
-        </p:nvSpPr>
-        <p:spPr>
-          <a:xfrm>
-            <a:off x="0" y="0"/>
-            <a:ext cx="12191695" cy="6858000"/>
-          </a:xfrm>
-          <a:prstGeom prst="rect">
-            <a:avLst/>
-          </a:prstGeom>
-          <a:solidFill>
-            <a:srgbClr val="F4F2EC"/>
-          </a:solidFill>
-          <a:ln>
-            <a:noFill/>
-          </a:ln>
-          <a:effectLst/>
-        </p:spPr>
-        <p:style>
-          <a:lnRef idx="1">
-            <a:schemeClr val="accent1"/>
-          </a:lnRef>
-          <a:fillRef idx="3">
-            <a:schemeClr val="accent1"/>
-          </a:fillRef>
-          <a:effectRef idx="2">
-            <a:schemeClr val="accent1"/>
-          </a:effectRef>
-          <a:fontRef idx="minor">
-            <a:schemeClr val="lt1"/>
-          </a:fontRef>
-        </p:style>
-        <p:txBody>
-          <a:bodyPr rtlCol="0" anchor="ctr"/>
-          <a:lstStyle/>
-          <a:p>
-            <a:pPr algn="ctr"/>
-          </a:p>
-        </p:txBody>
-      </p:sp>
-      <p:sp>
-        <p:nvSpPr>
-          <p:cNvPr id="3" name="TextBox 2"/>
+              <a:t>OFFICIAL / FOR BRIEFING USE ONLY</a:t>
+            </a:r>
+          </a:p>
+        </p:txBody>
+      </p:sp>
+      <p:sp>
+        <p:nvSpPr>
+          <p:cNvPr id="6" name="TextBox 5"/>
           <p:cNvSpPr txBox="1"/>
           <p:nvPr/>
         </p:nvSpPr>
         <p:spPr>
           <a:xfrm>
-            <a:off x="9814255" y="6473952"/>
-            <a:ext cx="1828800" cy="320040"/>
-          </a:xfrm>
-          <a:prstGeom prst="rect">
-            <a:avLst/>
-          </a:prstGeom>
-          <a:noFill/>
-        </p:spPr>
-        <p:txBody>
-          <a:bodyPr wrap="none" lIns="0" rIns="0" tIns="0" bIns="0">
-            <a:spAutoFit/>
-          </a:bodyPr>
-          <a:lstStyle/>
-          <a:p>
-            <a:pPr algn="r"/>
-            <a:fld id="{5E9FA395-6EAE-4298-AEBB-D066C7B79FD9}" type="slidenum">
-              <a:rPr lang="en-US" sz="1600" b="1">
-                <a:solidFill>
-                  <a:srgbClr val="B08D57"/>
-                </a:solidFill>
-                <a:latin typeface="Arial"/>
-              </a:rPr>
-              <a:t>1</a:t>
-            </a:fld>
-            <a:r>
-              <a:rPr sz="1600" b="1">
-                <a:solidFill>
-                  <a:srgbClr val="B08D57"/>
-                </a:solidFill>
-                <a:latin typeface="Arial"/>
-              </a:rPr>
-              <a:t> / 13</a:t>
-            </a:r>
-          </a:p>
-        </p:txBody>
-      </p:sp>
-      <p:sp>
-        <p:nvSpPr>
-          <p:cNvPr id="4" name="TextBox 3"/>
-          <p:cNvSpPr txBox="1"/>
-          <p:nvPr/>
-        </p:nvSpPr>
-        <p:spPr>
-          <a:xfrm>
-            <a:off x="548640" y="137160"/>
-            <a:ext cx="2743200" cy="274320"/>
+            <a:off x="548640" y="502920"/>
+            <a:ext cx="11094415" cy="777240"/>
           </a:xfrm>
           <a:prstGeom prst="rect">
             <a:avLst/>
@@ -6083,125 +5173,20 @@
           <a:p>
             <a:pPr algn="l"/>
             <a:r>
-              <a:rPr sz="1600" b="1" i="0" spc="60">
-                <a:solidFill>
-                  <a:srgbClr val="B08D57"/>
-                </a:solidFill>
-                <a:latin typeface="Arial"/>
-              </a:rPr>
-              <a:t>33 INF DIV</a:t>
-            </a:r>
-          </a:p>
-        </p:txBody>
-      </p:sp>
-      <p:sp>
-        <p:nvSpPr>
-          <p:cNvPr id="5" name="TextBox 4"/>
-          <p:cNvSpPr txBox="1"/>
-          <p:nvPr/>
-        </p:nvSpPr>
-        <p:spPr>
-          <a:xfrm>
-            <a:off x="7528255" y="137160"/>
-            <a:ext cx="4114800" cy="274320"/>
-          </a:xfrm>
-          <a:prstGeom prst="rect">
-            <a:avLst/>
-          </a:prstGeom>
-          <a:noFill/>
-        </p:spPr>
-        <p:txBody>
-          <a:bodyPr wrap="square" anchor="t" lIns="0" rIns="0" tIns="0" bIns="0">
-            <a:spAutoFit/>
-          </a:bodyPr>
-          <a:lstStyle/>
-          <a:p>
-            <a:pPr algn="r"/>
-            <a:r>
-              <a:rPr sz="1600" b="0" i="0" spc="40">
-                <a:solidFill>
-                  <a:srgbClr val="B08D57"/>
-                </a:solidFill>
-                <a:latin typeface="Arial"/>
-              </a:rPr>
-              <a:t>EX DURJOY GHATI (CAX)-19</a:t>
-            </a:r>
-          </a:p>
-        </p:txBody>
-      </p:sp>
-      <p:sp>
-        <p:nvSpPr>
-          <p:cNvPr id="6" name="TextBox 5"/>
-          <p:cNvSpPr txBox="1"/>
-          <p:nvPr/>
-        </p:nvSpPr>
-        <p:spPr>
-          <a:xfrm>
-            <a:off x="548640" y="6473952"/>
-            <a:ext cx="5486400" cy="320040"/>
-          </a:xfrm>
-          <a:prstGeom prst="rect">
-            <a:avLst/>
-          </a:prstGeom>
-          <a:noFill/>
-        </p:spPr>
-        <p:txBody>
-          <a:bodyPr wrap="square" anchor="t" lIns="0" rIns="0" tIns="0" bIns="0">
-            <a:spAutoFit/>
-          </a:bodyPr>
-          <a:lstStyle/>
-          <a:p>
-            <a:pPr algn="l"/>
-            <a:r>
-              <a:rPr sz="1600" b="0" i="1">
-                <a:solidFill>
-                  <a:srgbClr val="B08D57"/>
-                </a:solidFill>
-                <a:latin typeface="Arial"/>
-              </a:rPr>
-              <a:t>OFFICIAL / FOR BRIEFING USE ONLY</a:t>
-            </a:r>
-          </a:p>
-        </p:txBody>
-      </p:sp>
-      <p:sp>
-        <p:nvSpPr>
-          <p:cNvPr id="7" name="TextBox 6"/>
-          <p:cNvSpPr txBox="1"/>
-          <p:nvPr/>
-        </p:nvSpPr>
-        <p:spPr>
-          <a:xfrm>
-            <a:off x="548640" y="502920"/>
-            <a:ext cx="11094415" cy="777240"/>
-          </a:xfrm>
-          <a:prstGeom prst="rect">
-            <a:avLst/>
-          </a:prstGeom>
-          <a:noFill/>
-        </p:spPr>
-        <p:txBody>
-          <a:bodyPr wrap="square" anchor="t" lIns="0" rIns="0" tIns="0" bIns="0">
-            <a:spAutoFit/>
-          </a:bodyPr>
-          <a:lstStyle/>
-          <a:p>
-            <a:pPr algn="l"/>
-            <a:r>
               <a:rPr sz="4200" b="1" i="0" spc="150">
                 <a:solidFill>
                   <a:srgbClr val="1B1F23"/>
                 </a:solidFill>
                 <a:latin typeface="Arial"/>
               </a:rPr>
-              <a:t>AGENDA</a:t>
+              <a:t>RECOMMENDATIONS</a:t>
             </a:r>
           </a:p>
         </p:txBody>
       </p:sp>
       <p:cxnSp>
         <p:nvCxnSpPr>
-          <p:cNvPr id="8" name="Connector 7"/>
+          <p:cNvPr id="7" name="Connector 6"/>
           <p:cNvCxnSpPr/>
           <p:nvPr/>
         </p:nvCxnSpPr>
@@ -6236,14 +5221,49 @@
       </p:cxnSp>
       <p:sp>
         <p:nvSpPr>
+          <p:cNvPr id="8" name="TextBox 7"/>
+          <p:cNvSpPr txBox="1"/>
+          <p:nvPr/>
+        </p:nvSpPr>
+        <p:spPr>
+          <a:xfrm>
+            <a:off x="548640" y="1737360"/>
+            <a:ext cx="548640" cy="868680"/>
+          </a:xfrm>
+          <a:prstGeom prst="rect">
+            <a:avLst/>
+          </a:prstGeom>
+          <a:noFill/>
+        </p:spPr>
+        <p:txBody>
+          <a:bodyPr wrap="square" anchor="t" lIns="0" rIns="0" tIns="0" bIns="0">
+            <a:spAutoFit/>
+          </a:bodyPr>
+          <a:lstStyle/>
+          <a:p>
+            <a:pPr algn="l"/>
+            <a:r>
+              <a:rPr sz="2400" b="1" i="0">
+                <a:solidFill>
+                  <a:srgbClr val="4B5320"/>
+                </a:solidFill>
+                <a:latin typeface="Arial"/>
+              </a:rPr>
+              <a:t>1.</a:t>
+            </a:r>
+          </a:p>
+        </p:txBody>
+      </p:sp>
+      <p:sp>
+        <p:nvSpPr>
           <p:cNvPr id="9" name="TextBox 8"/>
           <p:cNvSpPr txBox="1"/>
           <p:nvPr/>
         </p:nvSpPr>
         <p:spPr>
           <a:xfrm>
-            <a:off x="548640" y="1783080"/>
-            <a:ext cx="822960" cy="658368"/>
+            <a:off x="1097280" y="1737360"/>
+            <a:ext cx="10545775" cy="868680"/>
           </a:xfrm>
           <a:prstGeom prst="rect">
             <a:avLst/>
@@ -6251,20 +5271,24 @@
           <a:noFill/>
         </p:spPr>
         <p:txBody>
-          <a:bodyPr wrap="square" anchor="ctr" lIns="0" rIns="0" tIns="0" bIns="0">
+          <a:bodyPr wrap="square" anchor="t" lIns="0" rIns="0" tIns="0" bIns="0">
             <a:spAutoFit/>
           </a:bodyPr>
           <a:lstStyle/>
           <a:p>
-            <a:pPr algn="l"/>
-            <a:r>
-              <a:rPr sz="2600" b="1" i="0">
-                <a:solidFill>
-                  <a:srgbClr val="4B5320"/>
-                </a:solidFill>
-                <a:latin typeface="Arial"/>
-              </a:rPr>
-              <a:t>1.</a:t>
+            <a:pPr algn="l">
+              <a:lnSpc>
+                <a:spcPct val="115000"/>
+              </a:lnSpc>
+            </a:pPr>
+            <a:r>
+              <a:rPr sz="2400" b="0" i="0">
+                <a:solidFill>
+                  <a:srgbClr val="1B1F23"/>
+                </a:solidFill>
+                <a:latin typeface="Arial"/>
+              </a:rPr>
+              <a:t>Institutionalise the IPB/DDMP-to-Ops Plan sequence for simultaneous offn-def planning (addresses Lesson 1).</a:t>
             </a:r>
           </a:p>
         </p:txBody>
@@ -6277,8 +5301,8 @@
         </p:nvSpPr>
         <p:spPr>
           <a:xfrm>
-            <a:off x="1371600" y="1783080"/>
-            <a:ext cx="10271455" cy="658368"/>
+            <a:off x="548640" y="2606040"/>
+            <a:ext cx="548640" cy="868680"/>
           </a:xfrm>
           <a:prstGeom prst="rect">
             <a:avLst/>
@@ -6286,20 +5310,20 @@
           <a:noFill/>
         </p:spPr>
         <p:txBody>
-          <a:bodyPr wrap="square" anchor="ctr" lIns="0" rIns="0" tIns="0" bIns="0">
+          <a:bodyPr wrap="square" anchor="t" lIns="0" rIns="0" tIns="0" bIns="0">
             <a:spAutoFit/>
           </a:bodyPr>
           <a:lstStyle/>
           <a:p>
             <a:pPr algn="l"/>
             <a:r>
-              <a:rPr sz="2600" b="0" i="0">
-                <a:solidFill>
-                  <a:srgbClr val="1B1F23"/>
-                </a:solidFill>
-                <a:latin typeface="Arial"/>
-              </a:rPr>
-              <a:t>Aim &amp; Objectives</a:t>
+              <a:rPr sz="2400" b="1" i="0">
+                <a:solidFill>
+                  <a:srgbClr val="4B5320"/>
+                </a:solidFill>
+                <a:latin typeface="Arial"/>
+              </a:rPr>
+              <a:t>2.</a:t>
             </a:r>
           </a:p>
         </p:txBody>
@@ -6312,8 +5336,8 @@
         </p:nvSpPr>
         <p:spPr>
           <a:xfrm>
-            <a:off x="548640" y="2441448"/>
-            <a:ext cx="822960" cy="658368"/>
+            <a:off x="1097280" y="2606040"/>
+            <a:ext cx="10545775" cy="868680"/>
           </a:xfrm>
           <a:prstGeom prst="rect">
             <a:avLst/>
@@ -6321,20 +5345,24 @@
           <a:noFill/>
         </p:spPr>
         <p:txBody>
-          <a:bodyPr wrap="square" anchor="ctr" lIns="0" rIns="0" tIns="0" bIns="0">
+          <a:bodyPr wrap="square" anchor="t" lIns="0" rIns="0" tIns="0" bIns="0">
             <a:spAutoFit/>
           </a:bodyPr>
           <a:lstStyle/>
           <a:p>
-            <a:pPr algn="l"/>
-            <a:r>
-              <a:rPr sz="2600" b="1" i="0">
-                <a:solidFill>
-                  <a:srgbClr val="4B5320"/>
-                </a:solidFill>
-                <a:latin typeface="Arial"/>
-              </a:rPr>
-              <a:t>2.</a:t>
+            <a:pPr algn="l">
+              <a:lnSpc>
+                <a:spcPct val="115000"/>
+              </a:lnSpc>
+            </a:pPr>
+            <a:r>
+              <a:rPr sz="2400" b="0" i="0">
+                <a:solidFill>
+                  <a:srgbClr val="1B1F23"/>
+                </a:solidFill>
+                <a:latin typeface="Arial"/>
+              </a:rPr>
+              <a:t>Formalise Comd Decision Points and delegated decision auth at div/bde level (addresses Lesson 2).</a:t>
             </a:r>
           </a:p>
         </p:txBody>
@@ -6347,8 +5375,8 @@
         </p:nvSpPr>
         <p:spPr>
           <a:xfrm>
-            <a:off x="1371600" y="2441448"/>
-            <a:ext cx="10271455" cy="658368"/>
+            <a:off x="548640" y="3474720"/>
+            <a:ext cx="548640" cy="868680"/>
           </a:xfrm>
           <a:prstGeom prst="rect">
             <a:avLst/>
@@ -6356,20 +5384,20 @@
           <a:noFill/>
         </p:spPr>
         <p:txBody>
-          <a:bodyPr wrap="square" anchor="ctr" lIns="0" rIns="0" tIns="0" bIns="0">
+          <a:bodyPr wrap="square" anchor="t" lIns="0" rIns="0" tIns="0" bIns="0">
             <a:spAutoFit/>
           </a:bodyPr>
           <a:lstStyle/>
           <a:p>
             <a:pPr algn="l"/>
             <a:r>
-              <a:rPr sz="2600" b="0" i="0">
-                <a:solidFill>
-                  <a:srgbClr val="1B1F23"/>
-                </a:solidFill>
-                <a:latin typeface="Arial"/>
-              </a:rPr>
-              <a:t>Exercise Framework</a:t>
+              <a:rPr sz="2400" b="1" i="0">
+                <a:solidFill>
+                  <a:srgbClr val="4B5320"/>
+                </a:solidFill>
+                <a:latin typeface="Arial"/>
+              </a:rPr>
+              <a:t>3.</a:t>
             </a:r>
           </a:p>
         </p:txBody>
@@ -6382,8 +5410,8 @@
         </p:nvSpPr>
         <p:spPr>
           <a:xfrm>
-            <a:off x="548640" y="3099816"/>
-            <a:ext cx="822960" cy="658368"/>
+            <a:off x="1097280" y="3474720"/>
+            <a:ext cx="10545775" cy="868680"/>
           </a:xfrm>
           <a:prstGeom prst="rect">
             <a:avLst/>
@@ -6391,20 +5419,24 @@
           <a:noFill/>
         </p:spPr>
         <p:txBody>
-          <a:bodyPr wrap="square" anchor="ctr" lIns="0" rIns="0" tIns="0" bIns="0">
+          <a:bodyPr wrap="square" anchor="t" lIns="0" rIns="0" tIns="0" bIns="0">
             <a:spAutoFit/>
           </a:bodyPr>
           <a:lstStyle/>
           <a:p>
-            <a:pPr algn="l"/>
-            <a:r>
-              <a:rPr sz="2600" b="1" i="0">
-                <a:solidFill>
-                  <a:srgbClr val="4B5320"/>
-                </a:solidFill>
-                <a:latin typeface="Arial"/>
-              </a:rPr>
-              <a:t>3.</a:t>
+            <a:pPr algn="l">
+              <a:lnSpc>
+                <a:spcPct val="115000"/>
+              </a:lnSpc>
+            </a:pPr>
+            <a:r>
+              <a:rPr sz="2400" b="0" i="0">
+                <a:solidFill>
+                  <a:srgbClr val="1B1F23"/>
+                </a:solidFill>
+                <a:latin typeface="Arial"/>
+              </a:rPr>
+              <a:t>Build ammo/CASEVAC contingency margins into the log plan for multi-sector ops (addresses Lesson 3).</a:t>
             </a:r>
           </a:p>
         </p:txBody>
@@ -6417,8 +5449,8 @@
         </p:nvSpPr>
         <p:spPr>
           <a:xfrm>
-            <a:off x="1371600" y="3099816"/>
-            <a:ext cx="10271455" cy="658368"/>
+            <a:off x="548640" y="4343400"/>
+            <a:ext cx="548640" cy="868680"/>
           </a:xfrm>
           <a:prstGeom prst="rect">
             <a:avLst/>
@@ -6426,20 +5458,20 @@
           <a:noFill/>
         </p:spPr>
         <p:txBody>
-          <a:bodyPr wrap="square" anchor="ctr" lIns="0" rIns="0" tIns="0" bIns="0">
+          <a:bodyPr wrap="square" anchor="t" lIns="0" rIns="0" tIns="0" bIns="0">
             <a:spAutoFit/>
           </a:bodyPr>
           <a:lstStyle/>
           <a:p>
             <a:pPr algn="l"/>
             <a:r>
-              <a:rPr sz="2600" b="0" i="0">
-                <a:solidFill>
-                  <a:srgbClr val="1B1F23"/>
-                </a:solidFill>
-                <a:latin typeface="Arial"/>
-              </a:rPr>
-              <a:t>Lessons Matrix — Overview</a:t>
+              <a:rPr sz="2400" b="1" i="0">
+                <a:solidFill>
+                  <a:srgbClr val="4B5320"/>
+                </a:solidFill>
+                <a:latin typeface="Arial"/>
+              </a:rPr>
+              <a:t>4.</a:t>
             </a:r>
           </a:p>
         </p:txBody>
@@ -6452,8 +5484,8 @@
         </p:nvSpPr>
         <p:spPr>
           <a:xfrm>
-            <a:off x="548640" y="3758184"/>
-            <a:ext cx="822960" cy="658368"/>
+            <a:off x="1097280" y="4343400"/>
+            <a:ext cx="10545775" cy="868680"/>
           </a:xfrm>
           <a:prstGeom prst="rect">
             <a:avLst/>
@@ -6461,20 +5493,24 @@
           <a:noFill/>
         </p:spPr>
         <p:txBody>
-          <a:bodyPr wrap="square" anchor="ctr" lIns="0" rIns="0" tIns="0" bIns="0">
+          <a:bodyPr wrap="square" anchor="t" lIns="0" rIns="0" tIns="0" bIns="0">
             <a:spAutoFit/>
           </a:bodyPr>
           <a:lstStyle/>
           <a:p>
-            <a:pPr algn="l"/>
-            <a:r>
-              <a:rPr sz="2600" b="1" i="0">
-                <a:solidFill>
-                  <a:srgbClr val="4B5320"/>
-                </a:solidFill>
-                <a:latin typeface="Arial"/>
-              </a:rPr>
-              <a:t>4.</a:t>
+            <a:pPr algn="l">
+              <a:lnSpc>
+                <a:spcPct val="115000"/>
+              </a:lnSpc>
+            </a:pPr>
+            <a:r>
+              <a:rPr sz="2400" b="0" i="0">
+                <a:solidFill>
+                  <a:srgbClr val="1B1F23"/>
+                </a:solidFill>
+                <a:latin typeface="Arial"/>
+              </a:rPr>
+              <a:t>Standardise UWF/volunteer tasking, stay-behind cells and reporting drills (addresses Lesson 4).</a:t>
             </a:r>
           </a:p>
         </p:txBody>
@@ -6487,8 +5523,8 @@
         </p:nvSpPr>
         <p:spPr>
           <a:xfrm>
-            <a:off x="1371600" y="3758184"/>
-            <a:ext cx="10271455" cy="658368"/>
+            <a:off x="548640" y="5212080"/>
+            <a:ext cx="548640" cy="868680"/>
           </a:xfrm>
           <a:prstGeom prst="rect">
             <a:avLst/>
@@ -6496,20 +5532,20 @@
           <a:noFill/>
         </p:spPr>
         <p:txBody>
-          <a:bodyPr wrap="square" anchor="ctr" lIns="0" rIns="0" tIns="0" bIns="0">
+          <a:bodyPr wrap="square" anchor="t" lIns="0" rIns="0" tIns="0" bIns="0">
             <a:spAutoFit/>
           </a:bodyPr>
           <a:lstStyle/>
           <a:p>
             <a:pPr algn="l"/>
             <a:r>
-              <a:rPr sz="2600" b="0" i="0">
-                <a:solidFill>
-                  <a:srgbClr val="1B1F23"/>
-                </a:solidFill>
-                <a:latin typeface="Arial"/>
-              </a:rPr>
-              <a:t>Attainment Process by Phase</a:t>
+              <a:rPr sz="2400" b="1" i="0">
+                <a:solidFill>
+                  <a:srgbClr val="4B5320"/>
+                </a:solidFill>
+                <a:latin typeface="Arial"/>
+              </a:rPr>
+              <a:t>5.</a:t>
             </a:r>
           </a:p>
         </p:txBody>
@@ -6522,8 +5558,8 @@
         </p:nvSpPr>
         <p:spPr>
           <a:xfrm>
-            <a:off x="548640" y="4416552"/>
-            <a:ext cx="822960" cy="658368"/>
+            <a:off x="1097280" y="5212080"/>
+            <a:ext cx="10545775" cy="868680"/>
           </a:xfrm>
           <a:prstGeom prst="rect">
             <a:avLst/>
@@ -6531,125 +5567,24 @@
           <a:noFill/>
         </p:spPr>
         <p:txBody>
-          <a:bodyPr wrap="square" anchor="ctr" lIns="0" rIns="0" tIns="0" bIns="0">
+          <a:bodyPr wrap="square" anchor="t" lIns="0" rIns="0" tIns="0" bIns="0">
             <a:spAutoFit/>
           </a:bodyPr>
           <a:lstStyle/>
           <a:p>
-            <a:pPr algn="l"/>
-            <a:r>
-              <a:rPr sz="2600" b="1" i="0">
-                <a:solidFill>
-                  <a:srgbClr val="4B5320"/>
-                </a:solidFill>
-                <a:latin typeface="Arial"/>
-              </a:rPr>
-              <a:t>5.</a:t>
-            </a:r>
-          </a:p>
-        </p:txBody>
-      </p:sp>
-      <p:sp>
-        <p:nvSpPr>
-          <p:cNvPr id="18" name="TextBox 17"/>
-          <p:cNvSpPr txBox="1"/>
-          <p:nvPr/>
-        </p:nvSpPr>
-        <p:spPr>
-          <a:xfrm>
-            <a:off x="1371600" y="4416552"/>
-            <a:ext cx="10271455" cy="658368"/>
-          </a:xfrm>
-          <a:prstGeom prst="rect">
-            <a:avLst/>
-          </a:prstGeom>
-          <a:noFill/>
-        </p:spPr>
-        <p:txBody>
-          <a:bodyPr wrap="square" anchor="ctr" lIns="0" rIns="0" tIns="0" bIns="0">
-            <a:spAutoFit/>
-          </a:bodyPr>
-          <a:lstStyle/>
-          <a:p>
-            <a:pPr algn="l"/>
-            <a:r>
-              <a:rPr sz="2600" b="0" i="0">
+            <a:pPr algn="l">
+              <a:lnSpc>
+                <a:spcPct val="115000"/>
+              </a:lnSpc>
+            </a:pPr>
+            <a:r>
+              <a:rPr sz="2400" b="0" i="0">
                 <a:solidFill>
                   <a:srgbClr val="1B1F23"/>
                 </a:solidFill>
                 <a:latin typeface="Arial"/>
               </a:rPr>
-              <a:t>Key Takeaways</a:t>
-            </a:r>
-          </a:p>
-        </p:txBody>
-      </p:sp>
-      <p:sp>
-        <p:nvSpPr>
-          <p:cNvPr id="19" name="TextBox 18"/>
-          <p:cNvSpPr txBox="1"/>
-          <p:nvPr/>
-        </p:nvSpPr>
-        <p:spPr>
-          <a:xfrm>
-            <a:off x="548640" y="5074920"/>
-            <a:ext cx="822960" cy="658368"/>
-          </a:xfrm>
-          <a:prstGeom prst="rect">
-            <a:avLst/>
-          </a:prstGeom>
-          <a:noFill/>
-        </p:spPr>
-        <p:txBody>
-          <a:bodyPr wrap="square" anchor="ctr" lIns="0" rIns="0" tIns="0" bIns="0">
-            <a:spAutoFit/>
-          </a:bodyPr>
-          <a:lstStyle/>
-          <a:p>
-            <a:pPr algn="l"/>
-            <a:r>
-              <a:rPr sz="2600" b="1" i="0">
-                <a:solidFill>
-                  <a:srgbClr val="4B5320"/>
-                </a:solidFill>
-                <a:latin typeface="Arial"/>
-              </a:rPr>
-              <a:t>6.</a:t>
-            </a:r>
-          </a:p>
-        </p:txBody>
-      </p:sp>
-      <p:sp>
-        <p:nvSpPr>
-          <p:cNvPr id="20" name="TextBox 19"/>
-          <p:cNvSpPr txBox="1"/>
-          <p:nvPr/>
-        </p:nvSpPr>
-        <p:spPr>
-          <a:xfrm>
-            <a:off x="1371600" y="5074920"/>
-            <a:ext cx="10271455" cy="658368"/>
-          </a:xfrm>
-          <a:prstGeom prst="rect">
-            <a:avLst/>
-          </a:prstGeom>
-          <a:noFill/>
-        </p:spPr>
-        <p:txBody>
-          <a:bodyPr wrap="square" anchor="ctr" lIns="0" rIns="0" tIns="0" bIns="0">
-            <a:spAutoFit/>
-          </a:bodyPr>
-          <a:lstStyle/>
-          <a:p>
-            <a:pPr algn="l"/>
-            <a:r>
-              <a:rPr sz="2600" b="0" i="0">
-                <a:solidFill>
-                  <a:srgbClr val="1B1F23"/>
-                </a:solidFill>
-                <a:latin typeface="Arial"/>
-              </a:rPr>
-              <a:t>Recommendations</a:t>
+              <a:t>Retain the DST/CCIR/BOS Sync Matrix as the standard CAX conduct procedure (addresses Lesson 5).</a:t>
             </a:r>
           </a:p>
         </p:txBody>
@@ -6662,9 +5597,17 @@
 </p:sld>
 </file>
 
-<file path=ppt/slides/slide3.xml><?xml version="1.0" encoding="utf-8"?>
+<file path=ppt/slides/slide13.xml><?xml version="1.0" encoding="utf-8"?>
 <p:sld xmlns:a="http://schemas.openxmlformats.org/drawingml/2006/main" xmlns:p="http://schemas.openxmlformats.org/presentationml/2006/main" xmlns:r="http://schemas.openxmlformats.org/officeDocument/2006/relationships">
   <p:cSld>
+    <p:bg>
+      <p:bgPr>
+        <a:solidFill>
+          <a:srgbClr val="1B1F23"/>
+        </a:solidFill>
+        <a:effectLst/>
+      </p:bgPr>
+    </p:bg>
     <p:spTree>
       <p:nvGrpSpPr>
         <p:cNvPr id="1" name=""/>
@@ -6674,51 +5617,7 @@
       <p:grpSpPr/>
       <p:sp>
         <p:nvSpPr>
-          <p:cNvPr id="2" name="Rectangle 1"/>
-          <p:cNvSpPr/>
-          <p:nvPr/>
-        </p:nvSpPr>
-        <p:spPr>
-          <a:xfrm>
-            <a:off x="0" y="0"/>
-            <a:ext cx="12191695" cy="6858000"/>
-          </a:xfrm>
-          <a:prstGeom prst="rect">
-            <a:avLst/>
-          </a:prstGeom>
-          <a:solidFill>
-            <a:srgbClr val="F4F2EC"/>
-          </a:solidFill>
-          <a:ln>
-            <a:noFill/>
-          </a:ln>
-          <a:effectLst/>
-        </p:spPr>
-        <p:style>
-          <a:lnRef idx="1">
-            <a:schemeClr val="accent1"/>
-          </a:lnRef>
-          <a:fillRef idx="3">
-            <a:schemeClr val="accent1"/>
-          </a:fillRef>
-          <a:effectRef idx="2">
-            <a:schemeClr val="accent1"/>
-          </a:effectRef>
-          <a:fontRef idx="minor">
-            <a:schemeClr val="lt1"/>
-          </a:fontRef>
-        </p:style>
-        <p:txBody>
-          <a:bodyPr rtlCol="0" anchor="ctr"/>
-          <a:lstStyle/>
-          <a:p>
-            <a:pPr algn="ctr"/>
-          </a:p>
-        </p:txBody>
-      </p:sp>
-      <p:sp>
-        <p:nvSpPr>
-          <p:cNvPr id="3" name="TextBox 2"/>
+          <p:cNvPr id="2" name="TextBox 1"/>
           <p:cNvSpPr txBox="1"/>
           <p:nvPr/>
         </p:nvSpPr>
@@ -6739,8 +5638,8 @@
           <a:lstStyle/>
           <a:p>
             <a:pPr algn="r"/>
-            <a:fld id="{E279B469-17A0-472A-80FC-EFD19CDF07F9}" type="slidenum">
-              <a:rPr lang="en-US" sz="1600" b="1">
+            <a:fld id="{526F4580-3929-48C7-83A3-7C99C6DAE1ED}" type="slidenum">
+              <a:rPr lang="en-US" sz="1600" b="1" dirty="0">
                 <a:solidFill>
                   <a:srgbClr val="B08D57"/>
                 </a:solidFill>
@@ -6762,14 +5661,14 @@
       </p:sp>
       <p:sp>
         <p:nvSpPr>
-          <p:cNvPr id="4" name="TextBox 3"/>
+          <p:cNvPr id="3" name="TextBox 2"/>
           <p:cNvSpPr txBox="1"/>
           <p:nvPr/>
         </p:nvSpPr>
         <p:spPr>
           <a:xfrm>
-            <a:off x="548640" y="137160"/>
-            <a:ext cx="2743200" cy="274320"/>
+            <a:off x="548640" y="2743200"/>
+            <a:ext cx="11094415" cy="731520"/>
           </a:xfrm>
           <a:prstGeom prst="rect">
             <a:avLst/>
@@ -6782,29 +5681,29 @@
           </a:bodyPr>
           <a:lstStyle/>
           <a:p>
-            <a:pPr algn="l"/>
-            <a:r>
-              <a:rPr sz="1600" b="1" i="0" spc="60">
+            <a:pPr algn="ctr"/>
+            <a:r>
+              <a:rPr sz="4000" b="1" i="0" spc="100">
                 <a:solidFill>
                   <a:srgbClr val="B08D57"/>
                 </a:solidFill>
                 <a:latin typeface="Arial"/>
               </a:rPr>
-              <a:t>33 INF DIV</a:t>
-            </a:r>
-          </a:p>
-        </p:txBody>
-      </p:sp>
-      <p:sp>
-        <p:nvSpPr>
-          <p:cNvPr id="5" name="TextBox 4"/>
+              <a:t>QUESTIONS &amp; DISCUSSION</a:t>
+            </a:r>
+          </a:p>
+        </p:txBody>
+      </p:sp>
+      <p:sp>
+        <p:nvSpPr>
+          <p:cNvPr id="4" name="TextBox 3"/>
           <p:cNvSpPr txBox="1"/>
           <p:nvPr/>
         </p:nvSpPr>
         <p:spPr>
           <a:xfrm>
-            <a:off x="7528255" y="137160"/>
-            <a:ext cx="4114800" cy="274320"/>
+            <a:off x="548640" y="3566160"/>
+            <a:ext cx="11094415" cy="457200"/>
           </a:xfrm>
           <a:prstGeom prst="rect">
             <a:avLst/>
@@ -6817,29 +5716,29 @@
           </a:bodyPr>
           <a:lstStyle/>
           <a:p>
-            <a:pPr algn="r"/>
-            <a:r>
-              <a:rPr sz="1600" b="0" i="0" spc="40">
-                <a:solidFill>
-                  <a:srgbClr val="B08D57"/>
-                </a:solidFill>
-                <a:latin typeface="Arial"/>
-              </a:rPr>
-              <a:t>EX DURJOY GHATI (CAX)-19</a:t>
-            </a:r>
-          </a:p>
-        </p:txBody>
-      </p:sp>
-      <p:sp>
-        <p:nvSpPr>
-          <p:cNvPr id="6" name="TextBox 5"/>
+            <a:pPr algn="ctr"/>
+            <a:r>
+              <a:rPr sz="2000" b="0" i="0">
+                <a:solidFill>
+                  <a:srgbClr val="F4F2EC"/>
+                </a:solidFill>
+                <a:latin typeface="Arial"/>
+              </a:rPr>
+              <a:t>EX DURJOY GHATI (CAX)-19  •  33 INF DIV</a:t>
+            </a:r>
+          </a:p>
+        </p:txBody>
+      </p:sp>
+      <p:sp>
+        <p:nvSpPr>
+          <p:cNvPr id="5" name="TextBox 4"/>
           <p:cNvSpPr txBox="1"/>
           <p:nvPr/>
         </p:nvSpPr>
         <p:spPr>
           <a:xfrm>
-            <a:off x="548640" y="6473952"/>
-            <a:ext cx="5486400" cy="320040"/>
+            <a:off x="548640" y="6217920"/>
+            <a:ext cx="11094415" cy="365760"/>
           </a:xfrm>
           <a:prstGeom prst="rect">
             <a:avLst/>
@@ -6852,7 +5751,7 @@
           </a:bodyPr>
           <a:lstStyle/>
           <a:p>
-            <a:pPr algn="l"/>
+            <a:pPr algn="ctr"/>
             <a:r>
               <a:rPr sz="1600" b="0" i="1">
                 <a:solidFill>
@@ -6860,21 +5759,91 @@
                 </a:solidFill>
                 <a:latin typeface="Arial"/>
               </a:rPr>
-              <a:t>OFFICIAL / FOR BRIEFING USE ONLY</a:t>
-            </a:r>
-          </a:p>
-        </p:txBody>
-      </p:sp>
-      <p:sp>
-        <p:nvSpPr>
-          <p:cNvPr id="7" name="TextBox 6"/>
+              <a:t>RESTRICTED — INTERNAL USE</a:t>
+            </a:r>
+          </a:p>
+        </p:txBody>
+      </p:sp>
+    </p:spTree>
+  </p:cSld>
+  <p:clrMapOvr>
+    <a:masterClrMapping/>
+  </p:clrMapOvr>
+</p:sld>
+</file>
+
+<file path=ppt/slides/slide2.xml><?xml version="1.0" encoding="utf-8"?>
+<p:sld xmlns:a="http://schemas.openxmlformats.org/drawingml/2006/main" xmlns:p="http://schemas.openxmlformats.org/presentationml/2006/main" xmlns:r="http://schemas.openxmlformats.org/officeDocument/2006/relationships">
+  <p:cSld>
+    <p:bg>
+      <p:bgPr>
+        <a:solidFill>
+          <a:srgbClr val="F4F2EC"/>
+        </a:solidFill>
+        <a:effectLst/>
+      </p:bgPr>
+    </p:bg>
+    <p:spTree>
+      <p:nvGrpSpPr>
+        <p:cNvPr id="1" name=""/>
+        <p:cNvGrpSpPr/>
+        <p:nvPr/>
+      </p:nvGrpSpPr>
+      <p:grpSpPr/>
+      <p:sp>
+        <p:nvSpPr>
+          <p:cNvPr id="2" name="TextBox 1"/>
           <p:cNvSpPr txBox="1"/>
           <p:nvPr/>
         </p:nvSpPr>
         <p:spPr>
           <a:xfrm>
-            <a:off x="548640" y="502920"/>
-            <a:ext cx="11094415" cy="777240"/>
+            <a:off x="9814255" y="6473952"/>
+            <a:ext cx="1828800" cy="320040"/>
+          </a:xfrm>
+          <a:prstGeom prst="rect">
+            <a:avLst/>
+          </a:prstGeom>
+          <a:noFill/>
+        </p:spPr>
+        <p:txBody>
+          <a:bodyPr wrap="none" lIns="0" rIns="0" tIns="0" bIns="0">
+            <a:spAutoFit/>
+          </a:bodyPr>
+          <a:lstStyle/>
+          <a:p>
+            <a:pPr algn="r"/>
+            <a:fld id="{276CA925-E974-43C4-ADC9-A552D4341278}" type="slidenum">
+              <a:rPr lang="en-US" sz="1600" b="1" dirty="0">
+                <a:solidFill>
+                  <a:srgbClr val="B08D57"/>
+                </a:solidFill>
+                <a:latin typeface="Arial"/>
+              </a:rPr>
+              <a:t>1</a:t>
+            </a:fld>
+            <a:r>
+              <a:rPr sz="1600" b="1">
+                <a:solidFill>
+                  <a:srgbClr val="B08D57"/>
+                </a:solidFill>
+                <a:latin typeface="Arial"/>
+              </a:rPr>
+              <a:t> / 13</a:t>
+            </a:r>
+          </a:p>
+        </p:txBody>
+      </p:sp>
+      <p:sp>
+        <p:nvSpPr>
+          <p:cNvPr id="3" name="TextBox 2"/>
+          <p:cNvSpPr txBox="1"/>
+          <p:nvPr/>
+        </p:nvSpPr>
+        <p:spPr>
+          <a:xfrm>
+            <a:off x="548640" y="137160"/>
+            <a:ext cx="2743200" cy="274320"/>
           </a:xfrm>
           <a:prstGeom prst="rect">
             <a:avLst/>
@@ -6889,20 +5858,125 @@
           <a:p>
             <a:pPr algn="l"/>
             <a:r>
+              <a:rPr sz="1600" b="1" i="0" spc="60">
+                <a:solidFill>
+                  <a:srgbClr val="B08D57"/>
+                </a:solidFill>
+                <a:latin typeface="Arial"/>
+              </a:rPr>
+              <a:t>33 INF DIV</a:t>
+            </a:r>
+          </a:p>
+        </p:txBody>
+      </p:sp>
+      <p:sp>
+        <p:nvSpPr>
+          <p:cNvPr id="4" name="TextBox 3"/>
+          <p:cNvSpPr txBox="1"/>
+          <p:nvPr/>
+        </p:nvSpPr>
+        <p:spPr>
+          <a:xfrm>
+            <a:off x="7528255" y="137160"/>
+            <a:ext cx="4114800" cy="274320"/>
+          </a:xfrm>
+          <a:prstGeom prst="rect">
+            <a:avLst/>
+          </a:prstGeom>
+          <a:noFill/>
+        </p:spPr>
+        <p:txBody>
+          <a:bodyPr wrap="square" anchor="t" lIns="0" rIns="0" tIns="0" bIns="0">
+            <a:spAutoFit/>
+          </a:bodyPr>
+          <a:lstStyle/>
+          <a:p>
+            <a:pPr algn="r"/>
+            <a:r>
+              <a:rPr sz="1600" b="0" i="0" spc="40">
+                <a:solidFill>
+                  <a:srgbClr val="B08D57"/>
+                </a:solidFill>
+                <a:latin typeface="Arial"/>
+              </a:rPr>
+              <a:t>EX DURJOY GHATI (CAX)-19</a:t>
+            </a:r>
+          </a:p>
+        </p:txBody>
+      </p:sp>
+      <p:sp>
+        <p:nvSpPr>
+          <p:cNvPr id="5" name="TextBox 4"/>
+          <p:cNvSpPr txBox="1"/>
+          <p:nvPr/>
+        </p:nvSpPr>
+        <p:spPr>
+          <a:xfrm>
+            <a:off x="548640" y="6473952"/>
+            <a:ext cx="5486400" cy="320040"/>
+          </a:xfrm>
+          <a:prstGeom prst="rect">
+            <a:avLst/>
+          </a:prstGeom>
+          <a:noFill/>
+        </p:spPr>
+        <p:txBody>
+          <a:bodyPr wrap="square" anchor="t" lIns="0" rIns="0" tIns="0" bIns="0">
+            <a:spAutoFit/>
+          </a:bodyPr>
+          <a:lstStyle/>
+          <a:p>
+            <a:pPr algn="l"/>
+            <a:r>
+              <a:rPr sz="1600" b="0" i="1">
+                <a:solidFill>
+                  <a:srgbClr val="B08D57"/>
+                </a:solidFill>
+                <a:latin typeface="Arial"/>
+              </a:rPr>
+              <a:t>OFFICIAL / FOR BRIEFING USE ONLY</a:t>
+            </a:r>
+          </a:p>
+        </p:txBody>
+      </p:sp>
+      <p:sp>
+        <p:nvSpPr>
+          <p:cNvPr id="6" name="TextBox 5"/>
+          <p:cNvSpPr txBox="1"/>
+          <p:nvPr/>
+        </p:nvSpPr>
+        <p:spPr>
+          <a:xfrm>
+            <a:off x="548640" y="502920"/>
+            <a:ext cx="11094415" cy="777240"/>
+          </a:xfrm>
+          <a:prstGeom prst="rect">
+            <a:avLst/>
+          </a:prstGeom>
+          <a:noFill/>
+        </p:spPr>
+        <p:txBody>
+          <a:bodyPr wrap="square" anchor="t" lIns="0" rIns="0" tIns="0" bIns="0">
+            <a:spAutoFit/>
+          </a:bodyPr>
+          <a:lstStyle/>
+          <a:p>
+            <a:pPr algn="l"/>
+            <a:r>
               <a:rPr sz="4200" b="1" i="0" spc="150">
                 <a:solidFill>
                   <a:srgbClr val="1B1F23"/>
                 </a:solidFill>
                 <a:latin typeface="Arial"/>
               </a:rPr>
-              <a:t>AIM &amp; OBJECTIVES</a:t>
+              <a:t>AGENDA</a:t>
             </a:r>
           </a:p>
         </p:txBody>
       </p:sp>
       <p:cxnSp>
         <p:nvCxnSpPr>
-          <p:cNvPr id="8" name="Connector 7"/>
+          <p:cNvPr id="7" name="Connector 6"/>
           <p:cNvCxnSpPr/>
           <p:nvPr/>
         </p:nvCxnSpPr>
@@ -6937,14 +6011,504 @@
       </p:cxnSp>
       <p:sp>
         <p:nvSpPr>
+          <p:cNvPr id="8" name="TextBox 7"/>
+          <p:cNvSpPr txBox="1"/>
+          <p:nvPr/>
+        </p:nvSpPr>
+        <p:spPr>
+          <a:xfrm>
+            <a:off x="548640" y="1783080"/>
+            <a:ext cx="822960" cy="658368"/>
+          </a:xfrm>
+          <a:prstGeom prst="rect">
+            <a:avLst/>
+          </a:prstGeom>
+          <a:noFill/>
+        </p:spPr>
+        <p:txBody>
+          <a:bodyPr wrap="square" anchor="ctr" lIns="0" rIns="0" tIns="0" bIns="0">
+            <a:spAutoFit/>
+          </a:bodyPr>
+          <a:lstStyle/>
+          <a:p>
+            <a:pPr algn="l"/>
+            <a:r>
+              <a:rPr sz="2600" b="1" i="0">
+                <a:solidFill>
+                  <a:srgbClr val="4B5320"/>
+                </a:solidFill>
+                <a:latin typeface="Arial"/>
+              </a:rPr>
+              <a:t>1.</a:t>
+            </a:r>
+          </a:p>
+        </p:txBody>
+      </p:sp>
+      <p:sp>
+        <p:nvSpPr>
           <p:cNvPr id="9" name="TextBox 8"/>
           <p:cNvSpPr txBox="1"/>
           <p:nvPr/>
         </p:nvSpPr>
         <p:spPr>
           <a:xfrm>
-            <a:off x="548640" y="1600200"/>
-            <a:ext cx="11094415" cy="457200"/>
+            <a:off x="1371600" y="1783080"/>
+            <a:ext cx="10271455" cy="658368"/>
+          </a:xfrm>
+          <a:prstGeom prst="rect">
+            <a:avLst/>
+          </a:prstGeom>
+          <a:noFill/>
+        </p:spPr>
+        <p:txBody>
+          <a:bodyPr wrap="square" anchor="ctr" lIns="0" rIns="0" tIns="0" bIns="0">
+            <a:spAutoFit/>
+          </a:bodyPr>
+          <a:lstStyle/>
+          <a:p>
+            <a:pPr algn="l"/>
+            <a:r>
+              <a:rPr sz="2600" b="0" i="0">
+                <a:solidFill>
+                  <a:srgbClr val="1B1F23"/>
+                </a:solidFill>
+                <a:latin typeface="Arial"/>
+              </a:rPr>
+              <a:t>Aim &amp; Objectives</a:t>
+            </a:r>
+          </a:p>
+        </p:txBody>
+      </p:sp>
+      <p:sp>
+        <p:nvSpPr>
+          <p:cNvPr id="10" name="TextBox 9"/>
+          <p:cNvSpPr txBox="1"/>
+          <p:nvPr/>
+        </p:nvSpPr>
+        <p:spPr>
+          <a:xfrm>
+            <a:off x="548640" y="2441448"/>
+            <a:ext cx="822960" cy="658368"/>
+          </a:xfrm>
+          <a:prstGeom prst="rect">
+            <a:avLst/>
+          </a:prstGeom>
+          <a:noFill/>
+        </p:spPr>
+        <p:txBody>
+          <a:bodyPr wrap="square" anchor="ctr" lIns="0" rIns="0" tIns="0" bIns="0">
+            <a:spAutoFit/>
+          </a:bodyPr>
+          <a:lstStyle/>
+          <a:p>
+            <a:pPr algn="l"/>
+            <a:r>
+              <a:rPr sz="2600" b="1" i="0">
+                <a:solidFill>
+                  <a:srgbClr val="4B5320"/>
+                </a:solidFill>
+                <a:latin typeface="Arial"/>
+              </a:rPr>
+              <a:t>2.</a:t>
+            </a:r>
+          </a:p>
+        </p:txBody>
+      </p:sp>
+      <p:sp>
+        <p:nvSpPr>
+          <p:cNvPr id="11" name="TextBox 10"/>
+          <p:cNvSpPr txBox="1"/>
+          <p:nvPr/>
+        </p:nvSpPr>
+        <p:spPr>
+          <a:xfrm>
+            <a:off x="1371600" y="2441448"/>
+            <a:ext cx="10271455" cy="658368"/>
+          </a:xfrm>
+          <a:prstGeom prst="rect">
+            <a:avLst/>
+          </a:prstGeom>
+          <a:noFill/>
+        </p:spPr>
+        <p:txBody>
+          <a:bodyPr wrap="square" anchor="ctr" lIns="0" rIns="0" tIns="0" bIns="0">
+            <a:spAutoFit/>
+          </a:bodyPr>
+          <a:lstStyle/>
+          <a:p>
+            <a:pPr algn="l"/>
+            <a:r>
+              <a:rPr sz="2600" b="0" i="0">
+                <a:solidFill>
+                  <a:srgbClr val="1B1F23"/>
+                </a:solidFill>
+                <a:latin typeface="Arial"/>
+              </a:rPr>
+              <a:t>Exercise Framework</a:t>
+            </a:r>
+          </a:p>
+        </p:txBody>
+      </p:sp>
+      <p:sp>
+        <p:nvSpPr>
+          <p:cNvPr id="12" name="TextBox 11"/>
+          <p:cNvSpPr txBox="1"/>
+          <p:nvPr/>
+        </p:nvSpPr>
+        <p:spPr>
+          <a:xfrm>
+            <a:off x="548640" y="3099816"/>
+            <a:ext cx="822960" cy="658368"/>
+          </a:xfrm>
+          <a:prstGeom prst="rect">
+            <a:avLst/>
+          </a:prstGeom>
+          <a:noFill/>
+        </p:spPr>
+        <p:txBody>
+          <a:bodyPr wrap="square" anchor="ctr" lIns="0" rIns="0" tIns="0" bIns="0">
+            <a:spAutoFit/>
+          </a:bodyPr>
+          <a:lstStyle/>
+          <a:p>
+            <a:pPr algn="l"/>
+            <a:r>
+              <a:rPr sz="2600" b="1" i="0">
+                <a:solidFill>
+                  <a:srgbClr val="4B5320"/>
+                </a:solidFill>
+                <a:latin typeface="Arial"/>
+              </a:rPr>
+              <a:t>3.</a:t>
+            </a:r>
+          </a:p>
+        </p:txBody>
+      </p:sp>
+      <p:sp>
+        <p:nvSpPr>
+          <p:cNvPr id="13" name="TextBox 12"/>
+          <p:cNvSpPr txBox="1"/>
+          <p:nvPr/>
+        </p:nvSpPr>
+        <p:spPr>
+          <a:xfrm>
+            <a:off x="1371600" y="3099816"/>
+            <a:ext cx="10271455" cy="658368"/>
+          </a:xfrm>
+          <a:prstGeom prst="rect">
+            <a:avLst/>
+          </a:prstGeom>
+          <a:noFill/>
+        </p:spPr>
+        <p:txBody>
+          <a:bodyPr wrap="square" anchor="ctr" lIns="0" rIns="0" tIns="0" bIns="0">
+            <a:spAutoFit/>
+          </a:bodyPr>
+          <a:lstStyle/>
+          <a:p>
+            <a:pPr algn="l"/>
+            <a:r>
+              <a:rPr sz="2600" b="0" i="0">
+                <a:solidFill>
+                  <a:srgbClr val="1B1F23"/>
+                </a:solidFill>
+                <a:latin typeface="Arial"/>
+              </a:rPr>
+              <a:t>Lessons Matrix — Overview</a:t>
+            </a:r>
+          </a:p>
+        </p:txBody>
+      </p:sp>
+      <p:sp>
+        <p:nvSpPr>
+          <p:cNvPr id="14" name="TextBox 13"/>
+          <p:cNvSpPr txBox="1"/>
+          <p:nvPr/>
+        </p:nvSpPr>
+        <p:spPr>
+          <a:xfrm>
+            <a:off x="548640" y="3758184"/>
+            <a:ext cx="822960" cy="658368"/>
+          </a:xfrm>
+          <a:prstGeom prst="rect">
+            <a:avLst/>
+          </a:prstGeom>
+          <a:noFill/>
+        </p:spPr>
+        <p:txBody>
+          <a:bodyPr wrap="square" anchor="ctr" lIns="0" rIns="0" tIns="0" bIns="0">
+            <a:spAutoFit/>
+          </a:bodyPr>
+          <a:lstStyle/>
+          <a:p>
+            <a:pPr algn="l"/>
+            <a:r>
+              <a:rPr sz="2600" b="1" i="0">
+                <a:solidFill>
+                  <a:srgbClr val="4B5320"/>
+                </a:solidFill>
+                <a:latin typeface="Arial"/>
+              </a:rPr>
+              <a:t>4.</a:t>
+            </a:r>
+          </a:p>
+        </p:txBody>
+      </p:sp>
+      <p:sp>
+        <p:nvSpPr>
+          <p:cNvPr id="15" name="TextBox 14"/>
+          <p:cNvSpPr txBox="1"/>
+          <p:nvPr/>
+        </p:nvSpPr>
+        <p:spPr>
+          <a:xfrm>
+            <a:off x="1371600" y="3758184"/>
+            <a:ext cx="10271455" cy="658368"/>
+          </a:xfrm>
+          <a:prstGeom prst="rect">
+            <a:avLst/>
+          </a:prstGeom>
+          <a:noFill/>
+        </p:spPr>
+        <p:txBody>
+          <a:bodyPr wrap="square" anchor="ctr" lIns="0" rIns="0" tIns="0" bIns="0">
+            <a:spAutoFit/>
+          </a:bodyPr>
+          <a:lstStyle/>
+          <a:p>
+            <a:pPr algn="l"/>
+            <a:r>
+              <a:rPr sz="2600" b="0" i="0">
+                <a:solidFill>
+                  <a:srgbClr val="1B1F23"/>
+                </a:solidFill>
+                <a:latin typeface="Arial"/>
+              </a:rPr>
+              <a:t>Attainment Process by Phase</a:t>
+            </a:r>
+          </a:p>
+        </p:txBody>
+      </p:sp>
+      <p:sp>
+        <p:nvSpPr>
+          <p:cNvPr id="16" name="TextBox 15"/>
+          <p:cNvSpPr txBox="1"/>
+          <p:nvPr/>
+        </p:nvSpPr>
+        <p:spPr>
+          <a:xfrm>
+            <a:off x="548640" y="4416552"/>
+            <a:ext cx="822960" cy="658368"/>
+          </a:xfrm>
+          <a:prstGeom prst="rect">
+            <a:avLst/>
+          </a:prstGeom>
+          <a:noFill/>
+        </p:spPr>
+        <p:txBody>
+          <a:bodyPr wrap="square" anchor="ctr" lIns="0" rIns="0" tIns="0" bIns="0">
+            <a:spAutoFit/>
+          </a:bodyPr>
+          <a:lstStyle/>
+          <a:p>
+            <a:pPr algn="l"/>
+            <a:r>
+              <a:rPr sz="2600" b="1" i="0">
+                <a:solidFill>
+                  <a:srgbClr val="4B5320"/>
+                </a:solidFill>
+                <a:latin typeface="Arial"/>
+              </a:rPr>
+              <a:t>5.</a:t>
+            </a:r>
+          </a:p>
+        </p:txBody>
+      </p:sp>
+      <p:sp>
+        <p:nvSpPr>
+          <p:cNvPr id="17" name="TextBox 16"/>
+          <p:cNvSpPr txBox="1"/>
+          <p:nvPr/>
+        </p:nvSpPr>
+        <p:spPr>
+          <a:xfrm>
+            <a:off x="1371600" y="4416552"/>
+            <a:ext cx="10271455" cy="658368"/>
+          </a:xfrm>
+          <a:prstGeom prst="rect">
+            <a:avLst/>
+          </a:prstGeom>
+          <a:noFill/>
+        </p:spPr>
+        <p:txBody>
+          <a:bodyPr wrap="square" anchor="ctr" lIns="0" rIns="0" tIns="0" bIns="0">
+            <a:spAutoFit/>
+          </a:bodyPr>
+          <a:lstStyle/>
+          <a:p>
+            <a:pPr algn="l"/>
+            <a:r>
+              <a:rPr sz="2600" b="0" i="0">
+                <a:solidFill>
+                  <a:srgbClr val="1B1F23"/>
+                </a:solidFill>
+                <a:latin typeface="Arial"/>
+              </a:rPr>
+              <a:t>Key Takeaways</a:t>
+            </a:r>
+          </a:p>
+        </p:txBody>
+      </p:sp>
+      <p:sp>
+        <p:nvSpPr>
+          <p:cNvPr id="18" name="TextBox 17"/>
+          <p:cNvSpPr txBox="1"/>
+          <p:nvPr/>
+        </p:nvSpPr>
+        <p:spPr>
+          <a:xfrm>
+            <a:off x="548640" y="5074920"/>
+            <a:ext cx="822960" cy="658368"/>
+          </a:xfrm>
+          <a:prstGeom prst="rect">
+            <a:avLst/>
+          </a:prstGeom>
+          <a:noFill/>
+        </p:spPr>
+        <p:txBody>
+          <a:bodyPr wrap="square" anchor="ctr" lIns="0" rIns="0" tIns="0" bIns="0">
+            <a:spAutoFit/>
+          </a:bodyPr>
+          <a:lstStyle/>
+          <a:p>
+            <a:pPr algn="l"/>
+            <a:r>
+              <a:rPr sz="2600" b="1" i="0">
+                <a:solidFill>
+                  <a:srgbClr val="4B5320"/>
+                </a:solidFill>
+                <a:latin typeface="Arial"/>
+              </a:rPr>
+              <a:t>6.</a:t>
+            </a:r>
+          </a:p>
+        </p:txBody>
+      </p:sp>
+      <p:sp>
+        <p:nvSpPr>
+          <p:cNvPr id="19" name="TextBox 18"/>
+          <p:cNvSpPr txBox="1"/>
+          <p:nvPr/>
+        </p:nvSpPr>
+        <p:spPr>
+          <a:xfrm>
+            <a:off x="1371600" y="5074920"/>
+            <a:ext cx="10271455" cy="658368"/>
+          </a:xfrm>
+          <a:prstGeom prst="rect">
+            <a:avLst/>
+          </a:prstGeom>
+          <a:noFill/>
+        </p:spPr>
+        <p:txBody>
+          <a:bodyPr wrap="square" anchor="ctr" lIns="0" rIns="0" tIns="0" bIns="0">
+            <a:spAutoFit/>
+          </a:bodyPr>
+          <a:lstStyle/>
+          <a:p>
+            <a:pPr algn="l"/>
+            <a:r>
+              <a:rPr sz="2600" b="0" i="0">
+                <a:solidFill>
+                  <a:srgbClr val="1B1F23"/>
+                </a:solidFill>
+                <a:latin typeface="Arial"/>
+              </a:rPr>
+              <a:t>Recommendations</a:t>
+            </a:r>
+          </a:p>
+        </p:txBody>
+      </p:sp>
+    </p:spTree>
+  </p:cSld>
+  <p:clrMapOvr>
+    <a:masterClrMapping/>
+  </p:clrMapOvr>
+</p:sld>
+</file>
+
+<file path=ppt/slides/slide3.xml><?xml version="1.0" encoding="utf-8"?>
+<p:sld xmlns:a="http://schemas.openxmlformats.org/drawingml/2006/main" xmlns:p="http://schemas.openxmlformats.org/presentationml/2006/main" xmlns:r="http://schemas.openxmlformats.org/officeDocument/2006/relationships">
+  <p:cSld>
+    <p:bg>
+      <p:bgPr>
+        <a:solidFill>
+          <a:srgbClr val="F4F2EC"/>
+        </a:solidFill>
+        <a:effectLst/>
+      </p:bgPr>
+    </p:bg>
+    <p:spTree>
+      <p:nvGrpSpPr>
+        <p:cNvPr id="1" name=""/>
+        <p:cNvGrpSpPr/>
+        <p:nvPr/>
+      </p:nvGrpSpPr>
+      <p:grpSpPr/>
+      <p:sp>
+        <p:nvSpPr>
+          <p:cNvPr id="2" name="TextBox 1"/>
+          <p:cNvSpPr txBox="1"/>
+          <p:nvPr/>
+        </p:nvSpPr>
+        <p:spPr>
+          <a:xfrm>
+            <a:off x="9814255" y="6473952"/>
+            <a:ext cx="1828800" cy="320040"/>
+          </a:xfrm>
+          <a:prstGeom prst="rect">
+            <a:avLst/>
+          </a:prstGeom>
+          <a:noFill/>
+        </p:spPr>
+        <p:txBody>
+          <a:bodyPr wrap="none" lIns="0" rIns="0" tIns="0" bIns="0">
+            <a:spAutoFit/>
+          </a:bodyPr>
+          <a:lstStyle/>
+          <a:p>
+            <a:pPr algn="r"/>
+            <a:fld id="{2CDC5C2A-624B-4DCE-8CB0-F99B07E1EA3D}" type="slidenum">
+              <a:rPr lang="en-US" sz="1600" b="1" dirty="0">
+                <a:solidFill>
+                  <a:srgbClr val="B08D57"/>
+                </a:solidFill>
+                <a:latin typeface="Arial"/>
+              </a:rPr>
+              <a:t>1</a:t>
+            </a:fld>
+            <a:r>
+              <a:rPr sz="1600" b="1">
+                <a:solidFill>
+                  <a:srgbClr val="B08D57"/>
+                </a:solidFill>
+                <a:latin typeface="Arial"/>
+              </a:rPr>
+              <a:t> / 13</a:t>
+            </a:r>
+          </a:p>
+        </p:txBody>
+      </p:sp>
+      <p:sp>
+        <p:nvSpPr>
+          <p:cNvPr id="3" name="TextBox 2"/>
+          <p:cNvSpPr txBox="1"/>
+          <p:nvPr/>
+        </p:nvSpPr>
+        <p:spPr>
+          <a:xfrm>
+            <a:off x="548640" y="137160"/>
+            <a:ext cx="2743200" cy="274320"/>
           </a:xfrm>
           <a:prstGeom prst="rect">
             <a:avLst/>
@@ -6959,27 +6523,27 @@
           <a:p>
             <a:pPr algn="l"/>
             <a:r>
-              <a:rPr sz="2800" b="1" i="0">
-                <a:solidFill>
-                  <a:srgbClr val="4B5320"/>
-                </a:solidFill>
-                <a:latin typeface="Arial"/>
-              </a:rPr>
-              <a:t>AIM</a:t>
-            </a:r>
-          </a:p>
-        </p:txBody>
-      </p:sp>
-      <p:sp>
-        <p:nvSpPr>
-          <p:cNvPr id="10" name="TextBox 9"/>
+              <a:rPr sz="1600" b="1" i="0" spc="60">
+                <a:solidFill>
+                  <a:srgbClr val="B08D57"/>
+                </a:solidFill>
+                <a:latin typeface="Arial"/>
+              </a:rPr>
+              <a:t>33 INF DIV</a:t>
+            </a:r>
+          </a:p>
+        </p:txBody>
+      </p:sp>
+      <p:sp>
+        <p:nvSpPr>
+          <p:cNvPr id="4" name="TextBox 3"/>
           <p:cNvSpPr txBox="1"/>
           <p:nvPr/>
         </p:nvSpPr>
         <p:spPr>
           <a:xfrm>
-            <a:off x="548640" y="2103120"/>
-            <a:ext cx="11094415" cy="822960"/>
+            <a:off x="7528255" y="137160"/>
+            <a:ext cx="4114800" cy="274320"/>
           </a:xfrm>
           <a:prstGeom prst="rect">
             <a:avLst/>
@@ -6992,40 +6556,106 @@
           </a:bodyPr>
           <a:lstStyle/>
           <a:p>
-            <a:pPr algn="l">
-              <a:lnSpc>
-                <a:spcPct val="120000"/>
-              </a:lnSpc>
-            </a:pPr>
-            <a:r>
-              <a:rPr sz="2400" b="0" i="0">
+            <a:pPr algn="r"/>
+            <a:r>
+              <a:rPr sz="1600" b="0" i="0" spc="40">
+                <a:solidFill>
+                  <a:srgbClr val="B08D57"/>
+                </a:solidFill>
+                <a:latin typeface="Arial"/>
+              </a:rPr>
+              <a:t>EX DURJOY GHATI (CAX)-19</a:t>
+            </a:r>
+          </a:p>
+        </p:txBody>
+      </p:sp>
+      <p:sp>
+        <p:nvSpPr>
+          <p:cNvPr id="5" name="TextBox 4"/>
+          <p:cNvSpPr txBox="1"/>
+          <p:nvPr/>
+        </p:nvSpPr>
+        <p:spPr>
+          <a:xfrm>
+            <a:off x="548640" y="6473952"/>
+            <a:ext cx="5486400" cy="320040"/>
+          </a:xfrm>
+          <a:prstGeom prst="rect">
+            <a:avLst/>
+          </a:prstGeom>
+          <a:noFill/>
+        </p:spPr>
+        <p:txBody>
+          <a:bodyPr wrap="square" anchor="t" lIns="0" rIns="0" tIns="0" bIns="0">
+            <a:spAutoFit/>
+          </a:bodyPr>
+          <a:lstStyle/>
+          <a:p>
+            <a:pPr algn="l"/>
+            <a:r>
+              <a:rPr sz="1600" b="0" i="1">
+                <a:solidFill>
+                  <a:srgbClr val="B08D57"/>
+                </a:solidFill>
+                <a:latin typeface="Arial"/>
+              </a:rPr>
+              <a:t>OFFICIAL / FOR BRIEFING USE ONLY</a:t>
+            </a:r>
+          </a:p>
+        </p:txBody>
+      </p:sp>
+      <p:sp>
+        <p:nvSpPr>
+          <p:cNvPr id="6" name="TextBox 5"/>
+          <p:cNvSpPr txBox="1"/>
+          <p:nvPr/>
+        </p:nvSpPr>
+        <p:spPr>
+          <a:xfrm>
+            <a:off x="548640" y="502920"/>
+            <a:ext cx="11094415" cy="777240"/>
+          </a:xfrm>
+          <a:prstGeom prst="rect">
+            <a:avLst/>
+          </a:prstGeom>
+          <a:noFill/>
+        </p:spPr>
+        <p:txBody>
+          <a:bodyPr wrap="square" anchor="t" lIns="0" rIns="0" tIns="0" bIns="0">
+            <a:spAutoFit/>
+          </a:bodyPr>
+          <a:lstStyle/>
+          <a:p>
+            <a:pPr algn="l"/>
+            <a:r>
+              <a:rPr sz="4200" b="1" i="0" spc="150">
                 <a:solidFill>
                   <a:srgbClr val="1B1F23"/>
                 </a:solidFill>
                 <a:latin typeface="Arial"/>
               </a:rPr>
-              <a:t>To validate the Division's operational and logistics plans through a simultaneous offensive-defensive command post exercise astride the IB.</a:t>
+              <a:t>AIM &amp; OBJECTIVES</a:t>
             </a:r>
           </a:p>
         </p:txBody>
       </p:sp>
       <p:cxnSp>
         <p:nvCxnSpPr>
-          <p:cNvPr id="11" name="Connector 10"/>
+          <p:cNvPr id="7" name="Connector 6"/>
           <p:cNvCxnSpPr/>
           <p:nvPr/>
         </p:nvCxnSpPr>
         <p:spPr>
           <a:xfrm>
-            <a:off x="548640" y="3063240"/>
+            <a:off x="548640" y="1298448"/>
             <a:ext cx="11094415" cy="0"/>
           </a:xfrm>
           <a:prstGeom prst="line">
             <a:avLst/>
           </a:prstGeom>
-          <a:ln w="12700">
+          <a:ln w="19050">
             <a:solidFill>
-              <a:srgbClr val="4B5320"/>
+              <a:srgbClr val="B08D57"/>
             </a:solidFill>
           </a:ln>
         </p:spPr>
@@ -7046,13 +6676,13 @@
       </p:cxnSp>
       <p:sp>
         <p:nvSpPr>
-          <p:cNvPr id="12" name="TextBox 11"/>
+          <p:cNvPr id="8" name="TextBox 7"/>
           <p:cNvSpPr txBox="1"/>
           <p:nvPr/>
         </p:nvSpPr>
         <p:spPr>
           <a:xfrm>
-            <a:off x="548640" y="3246120"/>
+            <a:off x="548640" y="1600200"/>
             <a:ext cx="11094415" cy="457200"/>
           </a:xfrm>
           <a:prstGeom prst="rect">
@@ -7074,21 +6704,21 @@
                 </a:solidFill>
                 <a:latin typeface="Arial"/>
               </a:rPr>
-              <a:t>OBJECTIVES</a:t>
-            </a:r>
-          </a:p>
-        </p:txBody>
-      </p:sp>
-      <p:sp>
-        <p:nvSpPr>
-          <p:cNvPr id="13" name="TextBox 12"/>
+              <a:t>AIM</a:t>
+            </a:r>
+          </a:p>
+        </p:txBody>
+      </p:sp>
+      <p:sp>
+        <p:nvSpPr>
+          <p:cNvPr id="9" name="TextBox 8"/>
           <p:cNvSpPr txBox="1"/>
           <p:nvPr/>
         </p:nvSpPr>
         <p:spPr>
           <a:xfrm>
-            <a:off x="548640" y="3794760"/>
-            <a:ext cx="548640" cy="566928"/>
+            <a:off x="548640" y="2103120"/>
+            <a:ext cx="11094415" cy="822960"/>
           </a:xfrm>
           <a:prstGeom prst="rect">
             <a:avLst/>
@@ -7101,44 +6731,9 @@
           </a:bodyPr>
           <a:lstStyle/>
           <a:p>
-            <a:pPr algn="l"/>
-            <a:r>
-              <a:rPr sz="2400" b="1" i="0">
-                <a:solidFill>
-                  <a:srgbClr val="4B5320"/>
-                </a:solidFill>
-                <a:latin typeface="Arial"/>
-              </a:rPr>
-              <a:t>1.</a:t>
-            </a:r>
-          </a:p>
-        </p:txBody>
-      </p:sp>
-      <p:sp>
-        <p:nvSpPr>
-          <p:cNvPr id="14" name="TextBox 13"/>
-          <p:cNvSpPr txBox="1"/>
-          <p:nvPr/>
-        </p:nvSpPr>
-        <p:spPr>
-          <a:xfrm>
-            <a:off x="1097280" y="3794760"/>
-            <a:ext cx="10545775" cy="566928"/>
-          </a:xfrm>
-          <a:prstGeom prst="rect">
-            <a:avLst/>
-          </a:prstGeom>
-          <a:noFill/>
-        </p:spPr>
-        <p:txBody>
-          <a:bodyPr wrap="square" anchor="t" lIns="0" rIns="0" tIns="0" bIns="0">
-            <a:spAutoFit/>
-          </a:bodyPr>
-          <a:lstStyle/>
-          <a:p>
             <a:pPr algn="l">
               <a:lnSpc>
-                <a:spcPct val="115000"/>
+                <a:spcPct val="120000"/>
               </a:lnSpc>
             </a:pPr>
             <a:r>
@@ -7148,496 +6743,28 @@
                 </a:solidFill>
                 <a:latin typeface="Arial"/>
               </a:rPr>
-              <a:t>Validate the Division Operations Plan iaw Planning Directive 1/2025.</a:t>
-            </a:r>
-          </a:p>
-        </p:txBody>
-      </p:sp>
-      <p:sp>
-        <p:nvSpPr>
-          <p:cNvPr id="15" name="TextBox 14"/>
-          <p:cNvSpPr txBox="1"/>
-          <p:nvPr/>
-        </p:nvSpPr>
-        <p:spPr>
-          <a:xfrm>
-            <a:off x="548640" y="4361688"/>
-            <a:ext cx="548640" cy="566928"/>
-          </a:xfrm>
-          <a:prstGeom prst="rect">
-            <a:avLst/>
-          </a:prstGeom>
-          <a:noFill/>
-        </p:spPr>
-        <p:txBody>
-          <a:bodyPr wrap="square" anchor="t" lIns="0" rIns="0" tIns="0" bIns="0">
-            <a:spAutoFit/>
-          </a:bodyPr>
-          <a:lstStyle/>
-          <a:p>
-            <a:pPr algn="l"/>
-            <a:r>
-              <a:rPr sz="2400" b="1" i="0">
-                <a:solidFill>
-                  <a:srgbClr val="4B5320"/>
-                </a:solidFill>
-                <a:latin typeface="Arial"/>
-              </a:rPr>
-              <a:t>2.</a:t>
-            </a:r>
-          </a:p>
-        </p:txBody>
-      </p:sp>
-      <p:sp>
-        <p:nvSpPr>
-          <p:cNvPr id="16" name="TextBox 15"/>
-          <p:cNvSpPr txBox="1"/>
-          <p:nvPr/>
-        </p:nvSpPr>
-        <p:spPr>
-          <a:xfrm>
-            <a:off x="1097280" y="4361688"/>
-            <a:ext cx="10545775" cy="566928"/>
-          </a:xfrm>
-          <a:prstGeom prst="rect">
-            <a:avLst/>
-          </a:prstGeom>
-          <a:noFill/>
-        </p:spPr>
-        <p:txBody>
-          <a:bodyPr wrap="square" anchor="t" lIns="0" rIns="0" tIns="0" bIns="0">
-            <a:spAutoFit/>
-          </a:bodyPr>
-          <a:lstStyle/>
-          <a:p>
-            <a:pPr algn="l">
-              <a:lnSpc>
-                <a:spcPct val="115000"/>
-              </a:lnSpc>
-            </a:pPr>
-            <a:r>
-              <a:rPr sz="2400" b="0" i="0">
-                <a:solidFill>
-                  <a:srgbClr val="1B1F23"/>
-                </a:solidFill>
-                <a:latin typeface="Arial"/>
-              </a:rPr>
-              <a:t>Validate offensive feasibility across the IB by a bde gp and capture area of tac advantage.</a:t>
-            </a:r>
-          </a:p>
-        </p:txBody>
-      </p:sp>
-      <p:sp>
-        <p:nvSpPr>
-          <p:cNvPr id="17" name="TextBox 16"/>
-          <p:cNvSpPr txBox="1"/>
-          <p:nvPr/>
-        </p:nvSpPr>
-        <p:spPr>
-          <a:xfrm>
-            <a:off x="548640" y="4928616"/>
-            <a:ext cx="548640" cy="566928"/>
-          </a:xfrm>
-          <a:prstGeom prst="rect">
-            <a:avLst/>
-          </a:prstGeom>
-          <a:noFill/>
-        </p:spPr>
-        <p:txBody>
-          <a:bodyPr wrap="square" anchor="t" lIns="0" rIns="0" tIns="0" bIns="0">
-            <a:spAutoFit/>
-          </a:bodyPr>
-          <a:lstStyle/>
-          <a:p>
-            <a:pPr algn="l"/>
-            <a:r>
-              <a:rPr sz="2400" b="1" i="0">
-                <a:solidFill>
-                  <a:srgbClr val="4B5320"/>
-                </a:solidFill>
-                <a:latin typeface="Arial"/>
-              </a:rPr>
-              <a:t>3.</a:t>
-            </a:r>
-          </a:p>
-        </p:txBody>
-      </p:sp>
-      <p:sp>
-        <p:nvSpPr>
-          <p:cNvPr id="18" name="TextBox 17"/>
-          <p:cNvSpPr txBox="1"/>
-          <p:nvPr/>
-        </p:nvSpPr>
-        <p:spPr>
-          <a:xfrm>
-            <a:off x="1097280" y="4928616"/>
-            <a:ext cx="10545775" cy="566928"/>
-          </a:xfrm>
-          <a:prstGeom prst="rect">
-            <a:avLst/>
-          </a:prstGeom>
-          <a:noFill/>
-        </p:spPr>
-        <p:txBody>
-          <a:bodyPr wrap="square" anchor="t" lIns="0" rIns="0" tIns="0" bIns="0">
-            <a:spAutoFit/>
-          </a:bodyPr>
-          <a:lstStyle/>
-          <a:p>
-            <a:pPr algn="l">
-              <a:lnSpc>
-                <a:spcPct val="115000"/>
-              </a:lnSpc>
-            </a:pPr>
-            <a:r>
-              <a:rPr sz="2400" b="0" i="0">
-                <a:solidFill>
-                  <a:srgbClr val="1B1F23"/>
-                </a:solidFill>
-                <a:latin typeface="Arial"/>
-              </a:rPr>
-              <a:t>Assess the viability of the log plan to support the Ops Plan.</a:t>
-            </a:r>
-          </a:p>
-        </p:txBody>
-      </p:sp>
-      <p:sp>
-        <p:nvSpPr>
-          <p:cNvPr id="19" name="TextBox 18"/>
-          <p:cNvSpPr txBox="1"/>
-          <p:nvPr/>
-        </p:nvSpPr>
-        <p:spPr>
-          <a:xfrm>
-            <a:off x="548640" y="5495544"/>
-            <a:ext cx="548640" cy="566928"/>
-          </a:xfrm>
-          <a:prstGeom prst="rect">
-            <a:avLst/>
-          </a:prstGeom>
-          <a:noFill/>
-        </p:spPr>
-        <p:txBody>
-          <a:bodyPr wrap="square" anchor="t" lIns="0" rIns="0" tIns="0" bIns="0">
-            <a:spAutoFit/>
-          </a:bodyPr>
-          <a:lstStyle/>
-          <a:p>
-            <a:pPr algn="l"/>
-            <a:r>
-              <a:rPr sz="2400" b="1" i="0">
-                <a:solidFill>
-                  <a:srgbClr val="4B5320"/>
-                </a:solidFill>
-                <a:latin typeface="Arial"/>
-              </a:rPr>
-              <a:t>4.</a:t>
-            </a:r>
-          </a:p>
-        </p:txBody>
-      </p:sp>
-      <p:sp>
-        <p:nvSpPr>
-          <p:cNvPr id="20" name="TextBox 19"/>
-          <p:cNvSpPr txBox="1"/>
-          <p:nvPr/>
-        </p:nvSpPr>
-        <p:spPr>
-          <a:xfrm>
-            <a:off x="1097280" y="5495544"/>
-            <a:ext cx="10545775" cy="566928"/>
-          </a:xfrm>
-          <a:prstGeom prst="rect">
-            <a:avLst/>
-          </a:prstGeom>
-          <a:noFill/>
-        </p:spPr>
-        <p:txBody>
-          <a:bodyPr wrap="square" anchor="t" lIns="0" rIns="0" tIns="0" bIns="0">
-            <a:spAutoFit/>
-          </a:bodyPr>
-          <a:lstStyle/>
-          <a:p>
-            <a:pPr algn="l">
-              <a:lnSpc>
-                <a:spcPct val="115000"/>
-              </a:lnSpc>
-            </a:pPr>
-            <a:r>
-              <a:rPr sz="2400" b="0" i="0">
-                <a:solidFill>
-                  <a:srgbClr val="1B1F23"/>
-                </a:solidFill>
-                <a:latin typeface="Arial"/>
-              </a:rPr>
-              <a:t>Examine the effectiveness of employing UWF/volunteers within the div AOP.</a:t>
-            </a:r>
-          </a:p>
-        </p:txBody>
-      </p:sp>
-    </p:spTree>
-  </p:cSld>
-  <p:clrMapOvr>
-    <a:masterClrMapping/>
-  </p:clrMapOvr>
-</p:sld>
-</file>
-
-<file path=ppt/slides/slide4.xml><?xml version="1.0" encoding="utf-8"?>
-<p:sld xmlns:a="http://schemas.openxmlformats.org/drawingml/2006/main" xmlns:p="http://schemas.openxmlformats.org/presentationml/2006/main" xmlns:r="http://schemas.openxmlformats.org/officeDocument/2006/relationships">
-  <p:cSld>
-    <p:spTree>
-      <p:nvGrpSpPr>
-        <p:cNvPr id="1" name=""/>
-        <p:cNvGrpSpPr/>
-        <p:nvPr/>
-      </p:nvGrpSpPr>
-      <p:grpSpPr/>
-      <p:sp>
-        <p:nvSpPr>
-          <p:cNvPr id="2" name="Rectangle 1"/>
-          <p:cNvSpPr/>
-          <p:nvPr/>
-        </p:nvSpPr>
-        <p:spPr>
-          <a:xfrm>
-            <a:off x="0" y="0"/>
-            <a:ext cx="12191695" cy="6858000"/>
-          </a:xfrm>
-          <a:prstGeom prst="rect">
-            <a:avLst/>
-          </a:prstGeom>
-          <a:solidFill>
-            <a:srgbClr val="F4F2EC"/>
-          </a:solidFill>
-          <a:ln>
-            <a:noFill/>
-          </a:ln>
-          <a:effectLst/>
-        </p:spPr>
-        <p:style>
-          <a:lnRef idx="1">
-            <a:schemeClr val="accent1"/>
-          </a:lnRef>
-          <a:fillRef idx="3">
-            <a:schemeClr val="accent1"/>
-          </a:fillRef>
-          <a:effectRef idx="2">
-            <a:schemeClr val="accent1"/>
-          </a:effectRef>
-          <a:fontRef idx="minor">
-            <a:schemeClr val="lt1"/>
-          </a:fontRef>
-        </p:style>
-        <p:txBody>
-          <a:bodyPr rtlCol="0" anchor="ctr"/>
-          <a:lstStyle/>
-          <a:p>
-            <a:pPr algn="ctr"/>
-          </a:p>
-        </p:txBody>
-      </p:sp>
-      <p:sp>
-        <p:nvSpPr>
-          <p:cNvPr id="3" name="TextBox 2"/>
-          <p:cNvSpPr txBox="1"/>
-          <p:nvPr/>
-        </p:nvSpPr>
-        <p:spPr>
-          <a:xfrm>
-            <a:off x="9814255" y="6473952"/>
-            <a:ext cx="1828800" cy="320040"/>
-          </a:xfrm>
-          <a:prstGeom prst="rect">
-            <a:avLst/>
-          </a:prstGeom>
-          <a:noFill/>
-        </p:spPr>
-        <p:txBody>
-          <a:bodyPr wrap="none" lIns="0" rIns="0" tIns="0" bIns="0">
-            <a:spAutoFit/>
-          </a:bodyPr>
-          <a:lstStyle/>
-          <a:p>
-            <a:pPr algn="r"/>
-            <a:fld id="{48FFF5A1-DDA6-460F-8F45-A1C37A6932C2}" type="slidenum">
-              <a:rPr lang="en-US" sz="1600" b="1">
-                <a:solidFill>
-                  <a:srgbClr val="B08D57"/>
-                </a:solidFill>
-                <a:latin typeface="Arial"/>
-              </a:rPr>
-              <a:t>1</a:t>
-            </a:fld>
-            <a:r>
-              <a:rPr sz="1600" b="1">
-                <a:solidFill>
-                  <a:srgbClr val="B08D57"/>
-                </a:solidFill>
-                <a:latin typeface="Arial"/>
-              </a:rPr>
-              <a:t> / 13</a:t>
-            </a:r>
-          </a:p>
-        </p:txBody>
-      </p:sp>
-      <p:sp>
-        <p:nvSpPr>
-          <p:cNvPr id="4" name="TextBox 3"/>
-          <p:cNvSpPr txBox="1"/>
-          <p:nvPr/>
-        </p:nvSpPr>
-        <p:spPr>
-          <a:xfrm>
-            <a:off x="548640" y="137160"/>
-            <a:ext cx="2743200" cy="274320"/>
-          </a:xfrm>
-          <a:prstGeom prst="rect">
-            <a:avLst/>
-          </a:prstGeom>
-          <a:noFill/>
-        </p:spPr>
-        <p:txBody>
-          <a:bodyPr wrap="square" anchor="t" lIns="0" rIns="0" tIns="0" bIns="0">
-            <a:spAutoFit/>
-          </a:bodyPr>
-          <a:lstStyle/>
-          <a:p>
-            <a:pPr algn="l"/>
-            <a:r>
-              <a:rPr sz="1600" b="1" i="0" spc="60">
-                <a:solidFill>
-                  <a:srgbClr val="B08D57"/>
-                </a:solidFill>
-                <a:latin typeface="Arial"/>
-              </a:rPr>
-              <a:t>33 INF DIV</a:t>
-            </a:r>
-          </a:p>
-        </p:txBody>
-      </p:sp>
-      <p:sp>
-        <p:nvSpPr>
-          <p:cNvPr id="5" name="TextBox 4"/>
-          <p:cNvSpPr txBox="1"/>
-          <p:nvPr/>
-        </p:nvSpPr>
-        <p:spPr>
-          <a:xfrm>
-            <a:off x="7528255" y="137160"/>
-            <a:ext cx="4114800" cy="274320"/>
-          </a:xfrm>
-          <a:prstGeom prst="rect">
-            <a:avLst/>
-          </a:prstGeom>
-          <a:noFill/>
-        </p:spPr>
-        <p:txBody>
-          <a:bodyPr wrap="square" anchor="t" lIns="0" rIns="0" tIns="0" bIns="0">
-            <a:spAutoFit/>
-          </a:bodyPr>
-          <a:lstStyle/>
-          <a:p>
-            <a:pPr algn="r"/>
-            <a:r>
-              <a:rPr sz="1600" b="0" i="0" spc="40">
-                <a:solidFill>
-                  <a:srgbClr val="B08D57"/>
-                </a:solidFill>
-                <a:latin typeface="Arial"/>
-              </a:rPr>
-              <a:t>EX DURJOY GHATI (CAX)-19</a:t>
-            </a:r>
-          </a:p>
-        </p:txBody>
-      </p:sp>
-      <p:sp>
-        <p:nvSpPr>
-          <p:cNvPr id="6" name="TextBox 5"/>
-          <p:cNvSpPr txBox="1"/>
-          <p:nvPr/>
-        </p:nvSpPr>
-        <p:spPr>
-          <a:xfrm>
-            <a:off x="548640" y="6473952"/>
-            <a:ext cx="5486400" cy="320040"/>
-          </a:xfrm>
-          <a:prstGeom prst="rect">
-            <a:avLst/>
-          </a:prstGeom>
-          <a:noFill/>
-        </p:spPr>
-        <p:txBody>
-          <a:bodyPr wrap="square" anchor="t" lIns="0" rIns="0" tIns="0" bIns="0">
-            <a:spAutoFit/>
-          </a:bodyPr>
-          <a:lstStyle/>
-          <a:p>
-            <a:pPr algn="l"/>
-            <a:r>
-              <a:rPr sz="1600" b="0" i="1">
-                <a:solidFill>
-                  <a:srgbClr val="B08D57"/>
-                </a:solidFill>
-                <a:latin typeface="Arial"/>
-              </a:rPr>
-              <a:t>OFFICIAL / FOR BRIEFING USE ONLY</a:t>
-            </a:r>
-          </a:p>
-        </p:txBody>
-      </p:sp>
-      <p:sp>
-        <p:nvSpPr>
-          <p:cNvPr id="7" name="TextBox 6"/>
-          <p:cNvSpPr txBox="1"/>
-          <p:nvPr/>
-        </p:nvSpPr>
-        <p:spPr>
-          <a:xfrm>
-            <a:off x="548640" y="502920"/>
-            <a:ext cx="11094415" cy="777240"/>
-          </a:xfrm>
-          <a:prstGeom prst="rect">
-            <a:avLst/>
-          </a:prstGeom>
-          <a:noFill/>
-        </p:spPr>
-        <p:txBody>
-          <a:bodyPr wrap="square" anchor="t" lIns="0" rIns="0" tIns="0" bIns="0">
-            <a:spAutoFit/>
-          </a:bodyPr>
-          <a:lstStyle/>
-          <a:p>
-            <a:pPr algn="l"/>
-            <a:r>
-              <a:rPr sz="4200" b="1" i="0" spc="150">
-                <a:solidFill>
-                  <a:srgbClr val="1B1F23"/>
-                </a:solidFill>
-                <a:latin typeface="Arial"/>
-              </a:rPr>
-              <a:t>EXERCISE FRAMEWORK</a:t>
+              <a:t>To validate the Division’s operational and logistics plans through a simultaneous offensive-defensive command post exercise astride the IB.</a:t>
             </a:r>
           </a:p>
         </p:txBody>
       </p:sp>
       <p:cxnSp>
         <p:nvCxnSpPr>
-          <p:cNvPr id="8" name="Connector 7"/>
+          <p:cNvPr id="10" name="Connector 9"/>
           <p:cNvCxnSpPr/>
           <p:nvPr/>
         </p:nvCxnSpPr>
         <p:spPr>
           <a:xfrm>
-            <a:off x="548640" y="1298448"/>
+            <a:off x="548640" y="3063240"/>
             <a:ext cx="11094415" cy="0"/>
           </a:xfrm>
           <a:prstGeom prst="line">
             <a:avLst/>
           </a:prstGeom>
-          <a:ln w="19050">
+          <a:ln w="12700">
             <a:solidFill>
-              <a:srgbClr val="B08D57"/>
+              <a:srgbClr val="4B5320"/>
             </a:solidFill>
           </a:ln>
         </p:spPr>
@@ -7658,14 +6785,14 @@
       </p:cxnSp>
       <p:sp>
         <p:nvSpPr>
-          <p:cNvPr id="9" name="TextBox 8"/>
+          <p:cNvPr id="11" name="TextBox 10"/>
           <p:cNvSpPr txBox="1"/>
           <p:nvPr/>
         </p:nvSpPr>
         <p:spPr>
           <a:xfrm>
-            <a:off x="548640" y="1920240"/>
-            <a:ext cx="2362123" cy="640080"/>
+            <a:off x="548640" y="3246120"/>
+            <a:ext cx="11094415" cy="457200"/>
           </a:xfrm>
           <a:prstGeom prst="rect">
             <a:avLst/>
@@ -7680,27 +6807,27 @@
           <a:p>
             <a:pPr algn="l"/>
             <a:r>
-              <a:rPr sz="2600" b="1" i="0">
+              <a:rPr sz="2800" b="1" i="0">
                 <a:solidFill>
                   <a:srgbClr val="4B5320"/>
                 </a:solidFill>
                 <a:latin typeface="Arial"/>
               </a:rPr>
-              <a:t>PREP STAGE</a:t>
-            </a:r>
-          </a:p>
-        </p:txBody>
-      </p:sp>
-      <p:sp>
-        <p:nvSpPr>
-          <p:cNvPr id="10" name="TextBox 9"/>
+              <a:t>OBJECTIVES</a:t>
+            </a:r>
+          </a:p>
+        </p:txBody>
+      </p:sp>
+      <p:sp>
+        <p:nvSpPr>
+          <p:cNvPr id="12" name="TextBox 11"/>
           <p:cNvSpPr txBox="1"/>
           <p:nvPr/>
         </p:nvSpPr>
         <p:spPr>
           <a:xfrm>
-            <a:off x="548640" y="2697480"/>
-            <a:ext cx="2362123" cy="2286000"/>
+            <a:off x="548640" y="3794760"/>
+            <a:ext cx="548640" cy="566928"/>
           </a:xfrm>
           <a:prstGeom prst="rect">
             <a:avLst/>
@@ -7713,38 +6840,505 @@
           </a:bodyPr>
           <a:lstStyle/>
           <a:p>
+            <a:pPr algn="l"/>
+            <a:r>
+              <a:rPr sz="2400" b="1" i="0">
+                <a:solidFill>
+                  <a:srgbClr val="4B5320"/>
+                </a:solidFill>
+                <a:latin typeface="Arial"/>
+              </a:rPr>
+              <a:t>1.</a:t>
+            </a:r>
+          </a:p>
+        </p:txBody>
+      </p:sp>
+      <p:sp>
+        <p:nvSpPr>
+          <p:cNvPr id="13" name="TextBox 12"/>
+          <p:cNvSpPr txBox="1"/>
+          <p:nvPr/>
+        </p:nvSpPr>
+        <p:spPr>
+          <a:xfrm>
+            <a:off x="1097280" y="3794760"/>
+            <a:ext cx="10545775" cy="566928"/>
+          </a:xfrm>
+          <a:prstGeom prst="rect">
+            <a:avLst/>
+          </a:prstGeom>
+          <a:noFill/>
+        </p:spPr>
+        <p:txBody>
+          <a:bodyPr wrap="square" anchor="t" lIns="0" rIns="0" tIns="0" bIns="0">
+            <a:spAutoFit/>
+          </a:bodyPr>
+          <a:lstStyle/>
+          <a:p>
             <a:pPr algn="l">
               <a:lnSpc>
-                <a:spcPct val="120000"/>
+                <a:spcPct val="115000"/>
               </a:lnSpc>
             </a:pPr>
             <a:r>
-              <a:rPr sz="2200" b="0" i="0">
+              <a:rPr sz="2400" b="0" i="0">
                 <a:solidFill>
                   <a:srgbClr val="1B1F23"/>
                 </a:solidFill>
                 <a:latin typeface="Arial"/>
               </a:rPr>
-              <a:t>IPB, Ops Plan formulation, FUP / IB crossing site and Blocking Posn selection.</a:t>
+              <a:t>Validate the Division Operations Plan iaw Planning Directive 1/2025.</a:t>
+            </a:r>
+          </a:p>
+        </p:txBody>
+      </p:sp>
+      <p:sp>
+        <p:nvSpPr>
+          <p:cNvPr id="14" name="TextBox 13"/>
+          <p:cNvSpPr txBox="1"/>
+          <p:nvPr/>
+        </p:nvSpPr>
+        <p:spPr>
+          <a:xfrm>
+            <a:off x="548640" y="4361688"/>
+            <a:ext cx="548640" cy="566928"/>
+          </a:xfrm>
+          <a:prstGeom prst="rect">
+            <a:avLst/>
+          </a:prstGeom>
+          <a:noFill/>
+        </p:spPr>
+        <p:txBody>
+          <a:bodyPr wrap="square" anchor="t" lIns="0" rIns="0" tIns="0" bIns="0">
+            <a:spAutoFit/>
+          </a:bodyPr>
+          <a:lstStyle/>
+          <a:p>
+            <a:pPr algn="l"/>
+            <a:r>
+              <a:rPr sz="2400" b="1" i="0">
+                <a:solidFill>
+                  <a:srgbClr val="4B5320"/>
+                </a:solidFill>
+                <a:latin typeface="Arial"/>
+              </a:rPr>
+              <a:t>2.</a:t>
+            </a:r>
+          </a:p>
+        </p:txBody>
+      </p:sp>
+      <p:sp>
+        <p:nvSpPr>
+          <p:cNvPr id="15" name="TextBox 14"/>
+          <p:cNvSpPr txBox="1"/>
+          <p:nvPr/>
+        </p:nvSpPr>
+        <p:spPr>
+          <a:xfrm>
+            <a:off x="1097280" y="4361688"/>
+            <a:ext cx="10545775" cy="566928"/>
+          </a:xfrm>
+          <a:prstGeom prst="rect">
+            <a:avLst/>
+          </a:prstGeom>
+          <a:noFill/>
+        </p:spPr>
+        <p:txBody>
+          <a:bodyPr wrap="square" anchor="t" lIns="0" rIns="0" tIns="0" bIns="0">
+            <a:spAutoFit/>
+          </a:bodyPr>
+          <a:lstStyle/>
+          <a:p>
+            <a:pPr algn="l">
+              <a:lnSpc>
+                <a:spcPct val="115000"/>
+              </a:lnSpc>
+            </a:pPr>
+            <a:r>
+              <a:rPr sz="2400" b="0" i="0">
+                <a:solidFill>
+                  <a:srgbClr val="1B1F23"/>
+                </a:solidFill>
+                <a:latin typeface="Arial"/>
+              </a:rPr>
+              <a:t>Validate offensive feasibility across the IB by a bde gp and capture area of tac advantage.</a:t>
+            </a:r>
+          </a:p>
+        </p:txBody>
+      </p:sp>
+      <p:sp>
+        <p:nvSpPr>
+          <p:cNvPr id="16" name="TextBox 15"/>
+          <p:cNvSpPr txBox="1"/>
+          <p:nvPr/>
+        </p:nvSpPr>
+        <p:spPr>
+          <a:xfrm>
+            <a:off x="548640" y="4928616"/>
+            <a:ext cx="548640" cy="566928"/>
+          </a:xfrm>
+          <a:prstGeom prst="rect">
+            <a:avLst/>
+          </a:prstGeom>
+          <a:noFill/>
+        </p:spPr>
+        <p:txBody>
+          <a:bodyPr wrap="square" anchor="t" lIns="0" rIns="0" tIns="0" bIns="0">
+            <a:spAutoFit/>
+          </a:bodyPr>
+          <a:lstStyle/>
+          <a:p>
+            <a:pPr algn="l"/>
+            <a:r>
+              <a:rPr sz="2400" b="1" i="0">
+                <a:solidFill>
+                  <a:srgbClr val="4B5320"/>
+                </a:solidFill>
+                <a:latin typeface="Arial"/>
+              </a:rPr>
+              <a:t>3.</a:t>
+            </a:r>
+          </a:p>
+        </p:txBody>
+      </p:sp>
+      <p:sp>
+        <p:nvSpPr>
+          <p:cNvPr id="17" name="TextBox 16"/>
+          <p:cNvSpPr txBox="1"/>
+          <p:nvPr/>
+        </p:nvSpPr>
+        <p:spPr>
+          <a:xfrm>
+            <a:off x="1097280" y="4928616"/>
+            <a:ext cx="10545775" cy="566928"/>
+          </a:xfrm>
+          <a:prstGeom prst="rect">
+            <a:avLst/>
+          </a:prstGeom>
+          <a:noFill/>
+        </p:spPr>
+        <p:txBody>
+          <a:bodyPr wrap="square" anchor="t" lIns="0" rIns="0" tIns="0" bIns="0">
+            <a:spAutoFit/>
+          </a:bodyPr>
+          <a:lstStyle/>
+          <a:p>
+            <a:pPr algn="l">
+              <a:lnSpc>
+                <a:spcPct val="115000"/>
+              </a:lnSpc>
+            </a:pPr>
+            <a:r>
+              <a:rPr sz="2400" b="0" i="0">
+                <a:solidFill>
+                  <a:srgbClr val="1B1F23"/>
+                </a:solidFill>
+                <a:latin typeface="Arial"/>
+              </a:rPr>
+              <a:t>Assess the viability of the log plan to support the Ops Plan.</a:t>
+            </a:r>
+          </a:p>
+        </p:txBody>
+      </p:sp>
+      <p:sp>
+        <p:nvSpPr>
+          <p:cNvPr id="18" name="TextBox 17"/>
+          <p:cNvSpPr txBox="1"/>
+          <p:nvPr/>
+        </p:nvSpPr>
+        <p:spPr>
+          <a:xfrm>
+            <a:off x="548640" y="5495544"/>
+            <a:ext cx="548640" cy="566928"/>
+          </a:xfrm>
+          <a:prstGeom prst="rect">
+            <a:avLst/>
+          </a:prstGeom>
+          <a:noFill/>
+        </p:spPr>
+        <p:txBody>
+          <a:bodyPr wrap="square" anchor="t" lIns="0" rIns="0" tIns="0" bIns="0">
+            <a:spAutoFit/>
+          </a:bodyPr>
+          <a:lstStyle/>
+          <a:p>
+            <a:pPr algn="l"/>
+            <a:r>
+              <a:rPr sz="2400" b="1" i="0">
+                <a:solidFill>
+                  <a:srgbClr val="4B5320"/>
+                </a:solidFill>
+                <a:latin typeface="Arial"/>
+              </a:rPr>
+              <a:t>4.</a:t>
+            </a:r>
+          </a:p>
+        </p:txBody>
+      </p:sp>
+      <p:sp>
+        <p:nvSpPr>
+          <p:cNvPr id="19" name="TextBox 18"/>
+          <p:cNvSpPr txBox="1"/>
+          <p:nvPr/>
+        </p:nvSpPr>
+        <p:spPr>
+          <a:xfrm>
+            <a:off x="1097280" y="5495544"/>
+            <a:ext cx="10545775" cy="566928"/>
+          </a:xfrm>
+          <a:prstGeom prst="rect">
+            <a:avLst/>
+          </a:prstGeom>
+          <a:noFill/>
+        </p:spPr>
+        <p:txBody>
+          <a:bodyPr wrap="square" anchor="t" lIns="0" rIns="0" tIns="0" bIns="0">
+            <a:spAutoFit/>
+          </a:bodyPr>
+          <a:lstStyle/>
+          <a:p>
+            <a:pPr algn="l">
+              <a:lnSpc>
+                <a:spcPct val="115000"/>
+              </a:lnSpc>
+            </a:pPr>
+            <a:r>
+              <a:rPr sz="2400" b="0" i="0">
+                <a:solidFill>
+                  <a:srgbClr val="1B1F23"/>
+                </a:solidFill>
+                <a:latin typeface="Arial"/>
+              </a:rPr>
+              <a:t>Examine the effectiveness of employing UWF/volunteers within the div AOP.</a:t>
+            </a:r>
+          </a:p>
+        </p:txBody>
+      </p:sp>
+    </p:spTree>
+  </p:cSld>
+  <p:clrMapOvr>
+    <a:masterClrMapping/>
+  </p:clrMapOvr>
+</p:sld>
+</file>
+
+<file path=ppt/slides/slide4.xml><?xml version="1.0" encoding="utf-8"?>
+<p:sld xmlns:a="http://schemas.openxmlformats.org/drawingml/2006/main" xmlns:p="http://schemas.openxmlformats.org/presentationml/2006/main" xmlns:r="http://schemas.openxmlformats.org/officeDocument/2006/relationships">
+  <p:cSld>
+    <p:bg>
+      <p:bgPr>
+        <a:solidFill>
+          <a:srgbClr val="F4F2EC"/>
+        </a:solidFill>
+        <a:effectLst/>
+      </p:bgPr>
+    </p:bg>
+    <p:spTree>
+      <p:nvGrpSpPr>
+        <p:cNvPr id="1" name=""/>
+        <p:cNvGrpSpPr/>
+        <p:nvPr/>
+      </p:nvGrpSpPr>
+      <p:grpSpPr/>
+      <p:sp>
+        <p:nvSpPr>
+          <p:cNvPr id="2" name="TextBox 1"/>
+          <p:cNvSpPr txBox="1"/>
+          <p:nvPr/>
+        </p:nvSpPr>
+        <p:spPr>
+          <a:xfrm>
+            <a:off x="9814255" y="6473952"/>
+            <a:ext cx="1828800" cy="320040"/>
+          </a:xfrm>
+          <a:prstGeom prst="rect">
+            <a:avLst/>
+          </a:prstGeom>
+          <a:noFill/>
+        </p:spPr>
+        <p:txBody>
+          <a:bodyPr wrap="none" lIns="0" rIns="0" tIns="0" bIns="0">
+            <a:spAutoFit/>
+          </a:bodyPr>
+          <a:lstStyle/>
+          <a:p>
+            <a:pPr algn="r"/>
+            <a:fld id="{418507B8-7D97-4F92-A94C-55AF3EFDD894}" type="slidenum">
+              <a:rPr lang="en-US" sz="1600" b="1" dirty="0">
+                <a:solidFill>
+                  <a:srgbClr val="B08D57"/>
+                </a:solidFill>
+                <a:latin typeface="Arial"/>
+              </a:rPr>
+              <a:t>1</a:t>
+            </a:fld>
+            <a:r>
+              <a:rPr sz="1600" b="1">
+                <a:solidFill>
+                  <a:srgbClr val="B08D57"/>
+                </a:solidFill>
+                <a:latin typeface="Arial"/>
+              </a:rPr>
+              <a:t> / 13</a:t>
+            </a:r>
+          </a:p>
+        </p:txBody>
+      </p:sp>
+      <p:sp>
+        <p:nvSpPr>
+          <p:cNvPr id="3" name="TextBox 2"/>
+          <p:cNvSpPr txBox="1"/>
+          <p:nvPr/>
+        </p:nvSpPr>
+        <p:spPr>
+          <a:xfrm>
+            <a:off x="548640" y="137160"/>
+            <a:ext cx="2743200" cy="274320"/>
+          </a:xfrm>
+          <a:prstGeom prst="rect">
+            <a:avLst/>
+          </a:prstGeom>
+          <a:noFill/>
+        </p:spPr>
+        <p:txBody>
+          <a:bodyPr wrap="square" anchor="t" lIns="0" rIns="0" tIns="0" bIns="0">
+            <a:spAutoFit/>
+          </a:bodyPr>
+          <a:lstStyle/>
+          <a:p>
+            <a:pPr algn="l"/>
+            <a:r>
+              <a:rPr sz="1600" b="1" i="0" spc="60">
+                <a:solidFill>
+                  <a:srgbClr val="B08D57"/>
+                </a:solidFill>
+                <a:latin typeface="Arial"/>
+              </a:rPr>
+              <a:t>33 INF DIV</a:t>
+            </a:r>
+          </a:p>
+        </p:txBody>
+      </p:sp>
+      <p:sp>
+        <p:nvSpPr>
+          <p:cNvPr id="4" name="TextBox 3"/>
+          <p:cNvSpPr txBox="1"/>
+          <p:nvPr/>
+        </p:nvSpPr>
+        <p:spPr>
+          <a:xfrm>
+            <a:off x="7528255" y="137160"/>
+            <a:ext cx="4114800" cy="274320"/>
+          </a:xfrm>
+          <a:prstGeom prst="rect">
+            <a:avLst/>
+          </a:prstGeom>
+          <a:noFill/>
+        </p:spPr>
+        <p:txBody>
+          <a:bodyPr wrap="square" anchor="t" lIns="0" rIns="0" tIns="0" bIns="0">
+            <a:spAutoFit/>
+          </a:bodyPr>
+          <a:lstStyle/>
+          <a:p>
+            <a:pPr algn="r"/>
+            <a:r>
+              <a:rPr sz="1600" b="0" i="0" spc="40">
+                <a:solidFill>
+                  <a:srgbClr val="B08D57"/>
+                </a:solidFill>
+                <a:latin typeface="Arial"/>
+              </a:rPr>
+              <a:t>EX DURJOY GHATI (CAX)-19</a:t>
+            </a:r>
+          </a:p>
+        </p:txBody>
+      </p:sp>
+      <p:sp>
+        <p:nvSpPr>
+          <p:cNvPr id="5" name="TextBox 4"/>
+          <p:cNvSpPr txBox="1"/>
+          <p:nvPr/>
+        </p:nvSpPr>
+        <p:spPr>
+          <a:xfrm>
+            <a:off x="548640" y="6473952"/>
+            <a:ext cx="5486400" cy="320040"/>
+          </a:xfrm>
+          <a:prstGeom prst="rect">
+            <a:avLst/>
+          </a:prstGeom>
+          <a:noFill/>
+        </p:spPr>
+        <p:txBody>
+          <a:bodyPr wrap="square" anchor="t" lIns="0" rIns="0" tIns="0" bIns="0">
+            <a:spAutoFit/>
+          </a:bodyPr>
+          <a:lstStyle/>
+          <a:p>
+            <a:pPr algn="l"/>
+            <a:r>
+              <a:rPr sz="1600" b="0" i="1">
+                <a:solidFill>
+                  <a:srgbClr val="B08D57"/>
+                </a:solidFill>
+                <a:latin typeface="Arial"/>
+              </a:rPr>
+              <a:t>OFFICIAL / FOR BRIEFING USE ONLY</a:t>
+            </a:r>
+          </a:p>
+        </p:txBody>
+      </p:sp>
+      <p:sp>
+        <p:nvSpPr>
+          <p:cNvPr id="6" name="TextBox 5"/>
+          <p:cNvSpPr txBox="1"/>
+          <p:nvPr/>
+        </p:nvSpPr>
+        <p:spPr>
+          <a:xfrm>
+            <a:off x="548640" y="502920"/>
+            <a:ext cx="11094415" cy="777240"/>
+          </a:xfrm>
+          <a:prstGeom prst="rect">
+            <a:avLst/>
+          </a:prstGeom>
+          <a:noFill/>
+        </p:spPr>
+        <p:txBody>
+          <a:bodyPr wrap="square" anchor="t" lIns="0" rIns="0" tIns="0" bIns="0">
+            <a:spAutoFit/>
+          </a:bodyPr>
+          <a:lstStyle/>
+          <a:p>
+            <a:pPr algn="l"/>
+            <a:r>
+              <a:rPr sz="4200" b="1" i="0" spc="150">
+                <a:solidFill>
+                  <a:srgbClr val="1B1F23"/>
+                </a:solidFill>
+                <a:latin typeface="Arial"/>
+              </a:rPr>
+              <a:t>EXERCISE FRAMEWORK</a:t>
             </a:r>
           </a:p>
         </p:txBody>
       </p:sp>
       <p:cxnSp>
         <p:nvCxnSpPr>
-          <p:cNvPr id="11" name="Connector 10"/>
+          <p:cNvPr id="7" name="Connector 6"/>
           <p:cNvCxnSpPr/>
           <p:nvPr/>
         </p:nvCxnSpPr>
         <p:spPr>
           <a:xfrm>
-            <a:off x="3322243.75" y="1920240"/>
-            <a:ext cx="0.0" cy="3291840"/>
+            <a:off x="548640" y="1298448"/>
+            <a:ext cx="11094415" cy="0"/>
           </a:xfrm>
           <a:prstGeom prst="line">
             <a:avLst/>
           </a:prstGeom>
-          <a:ln w="12700">
+          <a:ln w="19050">
             <a:solidFill>
               <a:srgbClr val="B08D57"/>
             </a:solidFill>
@@ -7767,13 +7361,13 @@
       </p:cxnSp>
       <p:sp>
         <p:nvSpPr>
-          <p:cNvPr id="12" name="TextBox 11"/>
+          <p:cNvPr id="8" name="TextBox 7"/>
           <p:cNvSpPr txBox="1"/>
           <p:nvPr/>
         </p:nvSpPr>
         <p:spPr>
           <a:xfrm>
-            <a:off x="3550843" y="1920240"/>
+            <a:off x="548640" y="1920240"/>
             <a:ext cx="2362123" cy="640080"/>
           </a:xfrm>
           <a:prstGeom prst="rect">
@@ -7795,20 +7389,20 @@
                 </a:solidFill>
                 <a:latin typeface="Arial"/>
               </a:rPr>
-              <a:t>PS-1</a:t>
-            </a:r>
-          </a:p>
-        </p:txBody>
-      </p:sp>
-      <p:sp>
-        <p:nvSpPr>
-          <p:cNvPr id="13" name="TextBox 12"/>
+              <a:t>PREP STAGE</a:t>
+            </a:r>
+          </a:p>
+        </p:txBody>
+      </p:sp>
+      <p:sp>
+        <p:nvSpPr>
+          <p:cNvPr id="9" name="TextBox 8"/>
           <p:cNvSpPr txBox="1"/>
           <p:nvPr/>
         </p:nvSpPr>
         <p:spPr>
           <a:xfrm>
-            <a:off x="3550843" y="2697480"/>
+            <a:off x="548640" y="2697480"/>
             <a:ext cx="2362123" cy="2286000"/>
           </a:xfrm>
           <a:prstGeom prst="rect">
@@ -7834,21 +7428,21 @@
                 </a:solidFill>
                 <a:latin typeface="Arial"/>
               </a:rPr>
-              <a:t>Offensive launch across the IB (North) with concurrent defensive organisation (South).</a:t>
+              <a:t>IPB, Ops Plan formulation, FUP / IB crossing site and Blocking Posn selection.</a:t>
             </a:r>
           </a:p>
         </p:txBody>
       </p:sp>
       <p:cxnSp>
         <p:nvCxnSpPr>
-          <p:cNvPr id="14" name="Connector 13"/>
+          <p:cNvPr id="10" name="Connector 9"/>
           <p:cNvCxnSpPr/>
           <p:nvPr/>
         </p:nvCxnSpPr>
         <p:spPr>
           <a:xfrm>
-            <a:off x="6095847.5" y="1920240"/>
-            <a:ext cx="0.0" cy="3291840"/>
+            <a:off x="3322243" y="1920240"/>
+            <a:ext cx="0" cy="3291840"/>
           </a:xfrm>
           <a:prstGeom prst="line">
             <a:avLst/>
@@ -7876,13 +7470,13 @@
       </p:cxnSp>
       <p:sp>
         <p:nvSpPr>
-          <p:cNvPr id="15" name="TextBox 14"/>
+          <p:cNvPr id="11" name="TextBox 10"/>
           <p:cNvSpPr txBox="1"/>
           <p:nvPr/>
         </p:nvSpPr>
         <p:spPr>
           <a:xfrm>
-            <a:off x="6324447" y="1920240"/>
+            <a:off x="3550843" y="1920240"/>
             <a:ext cx="2362123" cy="640080"/>
           </a:xfrm>
           <a:prstGeom prst="rect">
@@ -7904,20 +7498,20 @@
                 </a:solidFill>
                 <a:latin typeface="Arial"/>
               </a:rPr>
-              <a:t>PS-2</a:t>
-            </a:r>
-          </a:p>
-        </p:txBody>
-      </p:sp>
-      <p:sp>
-        <p:nvSpPr>
-          <p:cNvPr id="16" name="TextBox 15"/>
+              <a:t>PS-1</a:t>
+            </a:r>
+          </a:p>
+        </p:txBody>
+      </p:sp>
+      <p:sp>
+        <p:nvSpPr>
+          <p:cNvPr id="12" name="TextBox 11"/>
           <p:cNvSpPr txBox="1"/>
           <p:nvPr/>
         </p:nvSpPr>
         <p:spPr>
           <a:xfrm>
-            <a:off x="6324447" y="2697480"/>
+            <a:off x="3550843" y="2697480"/>
             <a:ext cx="2362123" cy="2286000"/>
           </a:xfrm>
           <a:prstGeom prst="rect">
@@ -7943,21 +7537,21 @@
                 </a:solidFill>
                 <a:latin typeface="Arial"/>
               </a:rPr>
-              <a:t>Advance and capture in the North; brigade-resourced attack in the South.</a:t>
+              <a:t>Offensive launch across the IB (North) with concurrent defensive organisation (South).</a:t>
             </a:r>
           </a:p>
         </p:txBody>
       </p:sp>
       <p:cxnSp>
         <p:nvCxnSpPr>
-          <p:cNvPr id="17" name="Connector 16"/>
+          <p:cNvPr id="13" name="Connector 12"/>
           <p:cNvCxnSpPr/>
           <p:nvPr/>
         </p:nvCxnSpPr>
         <p:spPr>
           <a:xfrm>
-            <a:off x="8869451.25" y="1920240"/>
-            <a:ext cx="0.0" cy="3291840"/>
+            <a:off x="6095846" y="1920240"/>
+            <a:ext cx="0" cy="3291840"/>
           </a:xfrm>
           <a:prstGeom prst="line">
             <a:avLst/>
@@ -7985,13 +7579,13 @@
       </p:cxnSp>
       <p:sp>
         <p:nvSpPr>
-          <p:cNvPr id="18" name="TextBox 17"/>
+          <p:cNvPr id="14" name="TextBox 13"/>
           <p:cNvSpPr txBox="1"/>
           <p:nvPr/>
         </p:nvSpPr>
         <p:spPr>
           <a:xfrm>
-            <a:off x="9098051" y="1920240"/>
+            <a:off x="6324446" y="1920240"/>
             <a:ext cx="2362123" cy="640080"/>
           </a:xfrm>
           <a:prstGeom prst="rect">
@@ -8013,6 +7607,115 @@
                 </a:solidFill>
                 <a:latin typeface="Arial"/>
               </a:rPr>
+              <a:t>PS-2</a:t>
+            </a:r>
+          </a:p>
+        </p:txBody>
+      </p:sp>
+      <p:sp>
+        <p:nvSpPr>
+          <p:cNvPr id="15" name="TextBox 14"/>
+          <p:cNvSpPr txBox="1"/>
+          <p:nvPr/>
+        </p:nvSpPr>
+        <p:spPr>
+          <a:xfrm>
+            <a:off x="6324446" y="2697480"/>
+            <a:ext cx="2362123" cy="2286000"/>
+          </a:xfrm>
+          <a:prstGeom prst="rect">
+            <a:avLst/>
+          </a:prstGeom>
+          <a:noFill/>
+        </p:spPr>
+        <p:txBody>
+          <a:bodyPr wrap="square" anchor="t" lIns="0" rIns="0" tIns="0" bIns="0">
+            <a:spAutoFit/>
+          </a:bodyPr>
+          <a:lstStyle/>
+          <a:p>
+            <a:pPr algn="l">
+              <a:lnSpc>
+                <a:spcPct val="120000"/>
+              </a:lnSpc>
+            </a:pPr>
+            <a:r>
+              <a:rPr sz="2200" b="0" i="0">
+                <a:solidFill>
+                  <a:srgbClr val="1B1F23"/>
+                </a:solidFill>
+                <a:latin typeface="Arial"/>
+              </a:rPr>
+              <a:t>Advance and capture in the North; brigade-resourced attack in the South.</a:t>
+            </a:r>
+          </a:p>
+        </p:txBody>
+      </p:sp>
+      <p:cxnSp>
+        <p:nvCxnSpPr>
+          <p:cNvPr id="16" name="Connector 15"/>
+          <p:cNvCxnSpPr/>
+          <p:nvPr/>
+        </p:nvCxnSpPr>
+        <p:spPr>
+          <a:xfrm>
+            <a:off x="8869449" y="1920240"/>
+            <a:ext cx="0" cy="3291840"/>
+          </a:xfrm>
+          <a:prstGeom prst="line">
+            <a:avLst/>
+          </a:prstGeom>
+          <a:ln w="12700">
+            <a:solidFill>
+              <a:srgbClr val="B08D57"/>
+            </a:solidFill>
+          </a:ln>
+        </p:spPr>
+        <p:style>
+          <a:lnRef idx="2">
+            <a:schemeClr val="accent1"/>
+          </a:lnRef>
+          <a:fillRef idx="0">
+            <a:schemeClr val="accent1"/>
+          </a:fillRef>
+          <a:effectRef idx="1">
+            <a:schemeClr val="accent1"/>
+          </a:effectRef>
+          <a:fontRef idx="minor">
+            <a:schemeClr val="tx1"/>
+          </a:fontRef>
+        </p:style>
+      </p:cxnSp>
+      <p:sp>
+        <p:nvSpPr>
+          <p:cNvPr id="17" name="TextBox 16"/>
+          <p:cNvSpPr txBox="1"/>
+          <p:nvPr/>
+        </p:nvSpPr>
+        <p:spPr>
+          <a:xfrm>
+            <a:off x="9098049" y="1920240"/>
+            <a:ext cx="2362123" cy="640080"/>
+          </a:xfrm>
+          <a:prstGeom prst="rect">
+            <a:avLst/>
+          </a:prstGeom>
+          <a:noFill/>
+        </p:spPr>
+        <p:txBody>
+          <a:bodyPr wrap="square" anchor="t" lIns="0" rIns="0" tIns="0" bIns="0">
+            <a:spAutoFit/>
+          </a:bodyPr>
+          <a:lstStyle/>
+          <a:p>
+            <a:pPr algn="l"/>
+            <a:r>
+              <a:rPr sz="2600" b="1" i="0">
+                <a:solidFill>
+                  <a:srgbClr val="4B5320"/>
+                </a:solidFill>
+                <a:latin typeface="Arial"/>
+              </a:rPr>
               <a:t>PS-3 / PS-4</a:t>
             </a:r>
           </a:p>
@@ -8020,13 +7723,13 @@
       </p:sp>
       <p:sp>
         <p:nvSpPr>
-          <p:cNvPr id="19" name="TextBox 18"/>
+          <p:cNvPr id="18" name="TextBox 17"/>
           <p:cNvSpPr txBox="1"/>
           <p:nvPr/>
         </p:nvSpPr>
         <p:spPr>
           <a:xfrm>
-            <a:off x="9098051" y="2697480"/>
+            <a:off x="9098049" y="2697480"/>
             <a:ext cx="2362123" cy="2286000"/>
           </a:xfrm>
           <a:prstGeom prst="rect">
@@ -8068,6 +7771,14 @@
 <file path=ppt/slides/slide5.xml><?xml version="1.0" encoding="utf-8"?>
 <p:sld xmlns:a="http://schemas.openxmlformats.org/drawingml/2006/main" xmlns:p="http://schemas.openxmlformats.org/presentationml/2006/main" xmlns:r="http://schemas.openxmlformats.org/officeDocument/2006/relationships">
   <p:cSld>
+    <p:bg>
+      <p:bgPr>
+        <a:solidFill>
+          <a:srgbClr val="F4F2EC"/>
+        </a:solidFill>
+        <a:effectLst/>
+      </p:bgPr>
+    </p:bg>
     <p:spTree>
       <p:nvGrpSpPr>
         <p:cNvPr id="1" name=""/>
@@ -8077,51 +7788,7 @@
       <p:grpSpPr/>
       <p:sp>
         <p:nvSpPr>
-          <p:cNvPr id="2" name="Rectangle 1"/>
-          <p:cNvSpPr/>
-          <p:nvPr/>
-        </p:nvSpPr>
-        <p:spPr>
-          <a:xfrm>
-            <a:off x="0" y="0"/>
-            <a:ext cx="12191695" cy="6858000"/>
-          </a:xfrm>
-          <a:prstGeom prst="rect">
-            <a:avLst/>
-          </a:prstGeom>
-          <a:solidFill>
-            <a:srgbClr val="F4F2EC"/>
-          </a:solidFill>
-          <a:ln>
-            <a:noFill/>
-          </a:ln>
-          <a:effectLst/>
-        </p:spPr>
-        <p:style>
-          <a:lnRef idx="1">
-            <a:schemeClr val="accent1"/>
-          </a:lnRef>
-          <a:fillRef idx="3">
-            <a:schemeClr val="accent1"/>
-          </a:fillRef>
-          <a:effectRef idx="2">
-            <a:schemeClr val="accent1"/>
-          </a:effectRef>
-          <a:fontRef idx="minor">
-            <a:schemeClr val="lt1"/>
-          </a:fontRef>
-        </p:style>
-        <p:txBody>
-          <a:bodyPr rtlCol="0" anchor="ctr"/>
-          <a:lstStyle/>
-          <a:p>
-            <a:pPr algn="ctr"/>
-          </a:p>
-        </p:txBody>
-      </p:sp>
-      <p:sp>
-        <p:nvSpPr>
-          <p:cNvPr id="3" name="TextBox 2"/>
+          <p:cNvPr id="2" name="TextBox 1"/>
           <p:cNvSpPr txBox="1"/>
           <p:nvPr/>
         </p:nvSpPr>
@@ -8142,8 +7809,8 @@
           <a:lstStyle/>
           <a:p>
             <a:pPr algn="r"/>
-            <a:fld id="{F2C5A1DF-6716-493D-A664-90BC0A331AE6}" type="slidenum">
-              <a:rPr lang="en-US" sz="1600" b="1">
+            <a:fld id="{CB1BB15B-E8F7-40E8-96A6-96E62CF51C27}" type="slidenum">
+              <a:rPr lang="en-US" sz="1600" b="1" dirty="0">
                 <a:solidFill>
                   <a:srgbClr val="B08D57"/>
                 </a:solidFill>
@@ -8165,7 +7832,7 @@
       </p:sp>
       <p:sp>
         <p:nvSpPr>
-          <p:cNvPr id="4" name="TextBox 3"/>
+          <p:cNvPr id="3" name="TextBox 2"/>
           <p:cNvSpPr txBox="1"/>
           <p:nvPr/>
         </p:nvSpPr>
@@ -8200,7 +7867,7 @@
       </p:sp>
       <p:sp>
         <p:nvSpPr>
-          <p:cNvPr id="5" name="TextBox 4"/>
+          <p:cNvPr id="4" name="TextBox 3"/>
           <p:cNvSpPr txBox="1"/>
           <p:nvPr/>
         </p:nvSpPr>
@@ -8235,7 +7902,7 @@
       </p:sp>
       <p:sp>
         <p:nvSpPr>
-          <p:cNvPr id="6" name="TextBox 5"/>
+          <p:cNvPr id="5" name="TextBox 4"/>
           <p:cNvSpPr txBox="1"/>
           <p:nvPr/>
         </p:nvSpPr>
@@ -8270,7 +7937,7 @@
       </p:sp>
       <p:sp>
         <p:nvSpPr>
-          <p:cNvPr id="7" name="TextBox 6"/>
+          <p:cNvPr id="6" name="TextBox 5"/>
           <p:cNvSpPr txBox="1"/>
           <p:nvPr/>
         </p:nvSpPr>
@@ -8305,7 +7972,7 @@
       </p:sp>
       <p:cxnSp>
         <p:nvCxnSpPr>
-          <p:cNvPr id="8" name="Connector 7"/>
+          <p:cNvPr id="7" name="Connector 6"/>
           <p:cNvCxnSpPr/>
           <p:nvPr/>
         </p:nvCxnSpPr>
@@ -8340,7 +8007,7 @@
       </p:cxnSp>
       <p:graphicFrame>
         <p:nvGraphicFramePr>
-          <p:cNvPr id="9" name="Table 8"/>
+          <p:cNvPr id="8" name="Table 7"/>
           <p:cNvGraphicFramePr>
             <a:graphicFrameLocks noGrp="1"/>
           </p:cNvGraphicFramePr>
@@ -8354,7 +8021,7 @@
           <a:graphicData uri="http://schemas.openxmlformats.org/drawingml/2006/table">
             <a:tbl>
               <a:tblPr firstRow="0" bandRow="0">
-                <a:tableStyleId>{5940675A-B579-460E-94D1-54222C63F5DA}</a:tableStyleId>
+                <a:tableStyleId>{2D5ABB26-0587-4C30-8999-92F81FD0307C}</a:tableStyleId>
               </a:tblPr>
               <a:tblGrid>
                 <a:gridCol w="1097280"/>
@@ -8368,7 +8035,7 @@
                     <a:p>
                       <a:pPr algn="ctr">
                         <a:lnSpc>
-                          <a:spcPct val="115000"/>
+                          <a:spcPct val="110000"/>
                         </a:lnSpc>
                       </a:pPr>
                       <a:r>
@@ -8382,7 +8049,7 @@
                       </a:r>
                     </a:p>
                   </a:txBody>
-                  <a:tcPr anchor="ctr" marL="109728" marR="109728" marT="54864" marB="54864">
+                  <a:tcPr anchor="ctr" marL="109728" marR="109728" marT="45720" marB="45720">
                     <a:lnB w="9525" cap="flat" cmpd="sng" algn="ctr">
                       <a:solidFill>
                         <a:srgbClr val="4B5320"/>
@@ -8415,7 +8082,7 @@
                     <a:p>
                       <a:pPr algn="ctr">
                         <a:lnSpc>
-                          <a:spcPct val="115000"/>
+                          <a:spcPct val="110000"/>
                         </a:lnSpc>
                       </a:pPr>
                       <a:r>
@@ -8429,7 +8096,7 @@
                       </a:r>
                     </a:p>
                   </a:txBody>
-                  <a:tcPr anchor="ctr" marL="109728" marR="109728" marT="54864" marB="54864">
+                  <a:tcPr anchor="ctr" marL="109728" marR="109728" marT="45720" marB="45720">
                     <a:lnB w="9525" cap="flat" cmpd="sng" algn="ctr">
                       <a:solidFill>
                         <a:srgbClr val="4B5320"/>
@@ -8464,7 +8131,7 @@
                     <a:p>
                       <a:pPr algn="ctr">
                         <a:lnSpc>
-                          <a:spcPct val="115000"/>
+                          <a:spcPct val="110000"/>
                         </a:lnSpc>
                       </a:pPr>
                       <a:r>
@@ -8478,7 +8145,7 @@
                       </a:r>
                     </a:p>
                   </a:txBody>
-                  <a:tcPr anchor="ctr" marL="109728" marR="109728" marT="54864" marB="54864">
+                  <a:tcPr anchor="ctr" marL="109728" marR="109728" marT="45720" marB="45720">
                     <a:lnB w="9525" cap="flat" cmpd="sng" algn="ctr">
                       <a:solidFill>
                         <a:srgbClr val="4B5320"/>
@@ -8511,7 +8178,7 @@
                     <a:p>
                       <a:pPr algn="l">
                         <a:lnSpc>
-                          <a:spcPct val="115000"/>
+                          <a:spcPct val="110000"/>
                         </a:lnSpc>
                       </a:pPr>
                       <a:r>
@@ -8525,7 +8192,7 @@
                       </a:r>
                     </a:p>
                   </a:txBody>
-                  <a:tcPr anchor="ctr" marL="109728" marR="109728" marT="54864" marB="54864">
+                  <a:tcPr anchor="ctr" marL="109728" marR="109728" marT="45720" marB="45720">
                     <a:lnB w="9525" cap="flat" cmpd="sng" algn="ctr">
                       <a:solidFill>
                         <a:srgbClr val="4B5320"/>
@@ -8560,7 +8227,7 @@
                     <a:p>
                       <a:pPr algn="ctr">
                         <a:lnSpc>
-                          <a:spcPct val="115000"/>
+                          <a:spcPct val="110000"/>
                         </a:lnSpc>
                       </a:pPr>
                       <a:r>
@@ -8574,7 +8241,7 @@
                       </a:r>
                     </a:p>
                   </a:txBody>
-                  <a:tcPr anchor="ctr" marL="109728" marR="109728" marT="54864" marB="54864">
+                  <a:tcPr anchor="ctr" marL="109728" marR="109728" marT="45720" marB="45720">
                     <a:lnB w="9525" cap="flat" cmpd="sng" algn="ctr">
                       <a:solidFill>
                         <a:srgbClr val="4B5320"/>
@@ -8607,7 +8274,7 @@
                     <a:p>
                       <a:pPr algn="l">
                         <a:lnSpc>
-                          <a:spcPct val="115000"/>
+                          <a:spcPct val="110000"/>
                         </a:lnSpc>
                       </a:pPr>
                       <a:r>
@@ -8621,7 +8288,7 @@
                       </a:r>
                     </a:p>
                   </a:txBody>
-                  <a:tcPr anchor="ctr" marL="109728" marR="109728" marT="54864" marB="54864">
+                  <a:tcPr anchor="ctr" marL="109728" marR="109728" marT="45720" marB="45720">
                     <a:lnB w="9525" cap="flat" cmpd="sng" algn="ctr">
                       <a:solidFill>
                         <a:srgbClr val="4B5320"/>
@@ -8656,7 +8323,7 @@
                     <a:p>
                       <a:pPr algn="ctr">
                         <a:lnSpc>
-                          <a:spcPct val="115000"/>
+                          <a:spcPct val="110000"/>
                         </a:lnSpc>
                       </a:pPr>
                       <a:r>
@@ -8670,7 +8337,7 @@
                       </a:r>
                     </a:p>
                   </a:txBody>
-                  <a:tcPr anchor="ctr" marL="109728" marR="109728" marT="54864" marB="54864">
+                  <a:tcPr anchor="ctr" marL="109728" marR="109728" marT="45720" marB="45720">
                     <a:lnB w="9525" cap="flat" cmpd="sng" algn="ctr">
                       <a:solidFill>
                         <a:srgbClr val="4B5320"/>
@@ -8703,7 +8370,7 @@
                     <a:p>
                       <a:pPr algn="l">
                         <a:lnSpc>
-                          <a:spcPct val="115000"/>
+                          <a:spcPct val="110000"/>
                         </a:lnSpc>
                       </a:pPr>
                       <a:r>
@@ -8717,7 +8384,7 @@
                       </a:r>
                     </a:p>
                   </a:txBody>
-                  <a:tcPr anchor="ctr" marL="109728" marR="109728" marT="54864" marB="54864">
+                  <a:tcPr anchor="ctr" marL="109728" marR="109728" marT="45720" marB="45720">
                     <a:lnB w="9525" cap="flat" cmpd="sng" algn="ctr">
                       <a:solidFill>
                         <a:srgbClr val="4B5320"/>
@@ -8752,7 +8419,7 @@
                     <a:p>
                       <a:pPr algn="ctr">
                         <a:lnSpc>
-                          <a:spcPct val="115000"/>
+                          <a:spcPct val="110000"/>
                         </a:lnSpc>
                       </a:pPr>
                       <a:r>
@@ -8766,7 +8433,7 @@
                       </a:r>
                     </a:p>
                   </a:txBody>
-                  <a:tcPr anchor="ctr" marL="109728" marR="109728" marT="54864" marB="54864">
+                  <a:tcPr anchor="ctr" marL="109728" marR="109728" marT="45720" marB="45720">
                     <a:lnB w="9525" cap="flat" cmpd="sng" algn="ctr">
                       <a:solidFill>
                         <a:srgbClr val="4B5320"/>
@@ -8799,7 +8466,7 @@
                     <a:p>
                       <a:pPr algn="l">
                         <a:lnSpc>
-                          <a:spcPct val="115000"/>
+                          <a:spcPct val="110000"/>
                         </a:lnSpc>
                       </a:pPr>
                       <a:r>
@@ -8813,7 +8480,7 @@
                       </a:r>
                     </a:p>
                   </a:txBody>
-                  <a:tcPr anchor="ctr" marL="109728" marR="109728" marT="54864" marB="54864">
+                  <a:tcPr anchor="ctr" marL="109728" marR="109728" marT="45720" marB="45720">
                     <a:lnB w="9525" cap="flat" cmpd="sng" algn="ctr">
                       <a:solidFill>
                         <a:srgbClr val="4B5320"/>
@@ -8848,7 +8515,7 @@
                     <a:p>
                       <a:pPr algn="ctr">
                         <a:lnSpc>
-                          <a:spcPct val="115000"/>
+                          <a:spcPct val="110000"/>
                         </a:lnSpc>
                       </a:pPr>
                       <a:r>
@@ -8862,7 +8529,7 @@
                       </a:r>
                     </a:p>
                   </a:txBody>
-                  <a:tcPr anchor="ctr" marL="109728" marR="109728" marT="54864" marB="54864">
+                  <a:tcPr anchor="ctr" marL="109728" marR="109728" marT="45720" marB="45720">
                     <a:lnB w="9525" cap="flat" cmpd="sng" algn="ctr">
                       <a:solidFill>
                         <a:srgbClr val="4B5320"/>
@@ -8895,7 +8562,7 @@
                     <a:p>
                       <a:pPr algn="l">
                         <a:lnSpc>
-                          <a:spcPct val="115000"/>
+                          <a:spcPct val="110000"/>
                         </a:lnSpc>
                       </a:pPr>
                       <a:r>
@@ -8909,7 +8576,7 @@
                       </a:r>
                     </a:p>
                   </a:txBody>
-                  <a:tcPr anchor="ctr" marL="109728" marR="109728" marT="54864" marB="54864">
+                  <a:tcPr anchor="ctr" marL="109728" marR="109728" marT="45720" marB="45720">
                     <a:lnB w="9525" cap="flat" cmpd="sng" algn="ctr">
                       <a:solidFill>
                         <a:srgbClr val="4B5320"/>
@@ -8942,7 +8609,7 @@
       </p:graphicFrame>
       <p:sp>
         <p:nvSpPr>
-          <p:cNvPr id="10" name="TextBox 9"/>
+          <p:cNvPr id="9" name="TextBox 8"/>
           <p:cNvSpPr txBox="1"/>
           <p:nvPr/>
         </p:nvSpPr>
@@ -8986,6 +8653,14 @@
 <file path=ppt/slides/slide6.xml><?xml version="1.0" encoding="utf-8"?>
 <p:sld xmlns:a="http://schemas.openxmlformats.org/drawingml/2006/main" xmlns:p="http://schemas.openxmlformats.org/presentationml/2006/main" xmlns:r="http://schemas.openxmlformats.org/officeDocument/2006/relationships">
   <p:cSld>
+    <p:bg>
+      <p:bgPr>
+        <a:solidFill>
+          <a:srgbClr val="F4F2EC"/>
+        </a:solidFill>
+        <a:effectLst/>
+      </p:bgPr>
+    </p:bg>
     <p:spTree>
       <p:nvGrpSpPr>
         <p:cNvPr id="1" name=""/>
@@ -8995,51 +8670,7 @@
       <p:grpSpPr/>
       <p:sp>
         <p:nvSpPr>
-          <p:cNvPr id="2" name="Rectangle 1"/>
-          <p:cNvSpPr/>
-          <p:nvPr/>
-        </p:nvSpPr>
-        <p:spPr>
-          <a:xfrm>
-            <a:off x="0" y="0"/>
-            <a:ext cx="12191695" cy="6858000"/>
-          </a:xfrm>
-          <a:prstGeom prst="rect">
-            <a:avLst/>
-          </a:prstGeom>
-          <a:solidFill>
-            <a:srgbClr val="F4F2EC"/>
-          </a:solidFill>
-          <a:ln>
-            <a:noFill/>
-          </a:ln>
-          <a:effectLst/>
-        </p:spPr>
-        <p:style>
-          <a:lnRef idx="1">
-            <a:schemeClr val="accent1"/>
-          </a:lnRef>
-          <a:fillRef idx="3">
-            <a:schemeClr val="accent1"/>
-          </a:fillRef>
-          <a:effectRef idx="2">
-            <a:schemeClr val="accent1"/>
-          </a:effectRef>
-          <a:fontRef idx="minor">
-            <a:schemeClr val="lt1"/>
-          </a:fontRef>
-        </p:style>
-        <p:txBody>
-          <a:bodyPr rtlCol="0" anchor="ctr"/>
-          <a:lstStyle/>
-          <a:p>
-            <a:pPr algn="ctr"/>
-          </a:p>
-        </p:txBody>
-      </p:sp>
-      <p:sp>
-        <p:nvSpPr>
-          <p:cNvPr id="3" name="TextBox 2"/>
+          <p:cNvPr id="2" name="TextBox 1"/>
           <p:cNvSpPr txBox="1"/>
           <p:nvPr/>
         </p:nvSpPr>
@@ -9060,8 +8691,8 @@
           <a:lstStyle/>
           <a:p>
             <a:pPr algn="r"/>
-            <a:fld id="{050BA6EB-BF15-4A74-A2FB-7075DB97B26A}" type="slidenum">
-              <a:rPr lang="en-US" sz="1600" b="1">
+            <a:fld id="{42F6E2C0-2033-4F69-9137-417BBFE0FBF6}" type="slidenum">
+              <a:rPr lang="en-US" sz="1600" b="1" dirty="0">
                 <a:solidFill>
                   <a:srgbClr val="B08D57"/>
                 </a:solidFill>
@@ -9083,7 +8714,7 @@
       </p:sp>
       <p:sp>
         <p:nvSpPr>
-          <p:cNvPr id="4" name="TextBox 3"/>
+          <p:cNvPr id="3" name="TextBox 2"/>
           <p:cNvSpPr txBox="1"/>
           <p:nvPr/>
         </p:nvSpPr>
@@ -9118,7 +8749,7 @@
       </p:sp>
       <p:sp>
         <p:nvSpPr>
-          <p:cNvPr id="5" name="TextBox 4"/>
+          <p:cNvPr id="4" name="TextBox 3"/>
           <p:cNvSpPr txBox="1"/>
           <p:nvPr/>
         </p:nvSpPr>
@@ -9153,7 +8784,7 @@
       </p:sp>
       <p:sp>
         <p:nvSpPr>
-          <p:cNvPr id="6" name="TextBox 5"/>
+          <p:cNvPr id="5" name="TextBox 4"/>
           <p:cNvSpPr txBox="1"/>
           <p:nvPr/>
         </p:nvSpPr>
@@ -9188,7 +8819,7 @@
       </p:sp>
       <p:sp>
         <p:nvSpPr>
-          <p:cNvPr id="7" name="TextBox 6"/>
+          <p:cNvPr id="6" name="TextBox 5"/>
           <p:cNvSpPr txBox="1"/>
           <p:nvPr/>
         </p:nvSpPr>
@@ -9216,14 +8847,14 @@
                 </a:solidFill>
                 <a:latin typeface="Arial"/>
               </a:rPr>
-              <a:t>LESSON 1 — PLANNING, COORDINATION &amp; EXECUTION OF OFFN-DEF OPS</a:t>
+              <a:t>LESSON 1 — PLANNING, COORD &amp; EXECUTION OF OFFN-DEF OPS</a:t>
             </a:r>
           </a:p>
         </p:txBody>
       </p:sp>
       <p:cxnSp>
         <p:nvCxnSpPr>
-          <p:cNvPr id="8" name="Connector 7"/>
+          <p:cNvPr id="7" name="Connector 6"/>
           <p:cNvCxnSpPr/>
           <p:nvPr/>
         </p:nvCxnSpPr>
@@ -9258,14 +8889,14 @@
       </p:cxnSp>
       <p:sp>
         <p:nvSpPr>
-          <p:cNvPr id="9" name="TextBox 8"/>
+          <p:cNvPr id="8" name="TextBox 7"/>
           <p:cNvSpPr txBox="1"/>
           <p:nvPr/>
         </p:nvSpPr>
         <p:spPr>
           <a:xfrm>
-            <a:off x="548640" y="1481328"/>
-            <a:ext cx="11094415" cy="411480"/>
+            <a:off x="548640" y="1417320"/>
+            <a:ext cx="11094415" cy="365760"/>
           </a:xfrm>
           <a:prstGeom prst="rect">
             <a:avLst/>
@@ -9293,27 +8924,27 @@
       </p:sp>
       <p:graphicFrame>
         <p:nvGraphicFramePr>
-          <p:cNvPr id="10" name="Table 9"/>
+          <p:cNvPr id="9" name="Table 8"/>
           <p:cNvGraphicFramePr>
             <a:graphicFrameLocks noGrp="1"/>
           </p:cNvGraphicFramePr>
           <p:nvPr/>
         </p:nvGraphicFramePr>
         <p:xfrm>
-          <a:off x="548640" y="1965960"/>
-          <a:ext cx="11094415" cy="3794760"/>
+          <a:off x="548640" y="1874519"/>
+          <a:ext cx="11094415" cy="3931920"/>
         </p:xfrm>
         <a:graphic>
           <a:graphicData uri="http://schemas.openxmlformats.org/drawingml/2006/table">
             <a:tbl>
               <a:tblPr firstRow="0" bandRow="0">
-                <a:tableStyleId>{5940675A-B579-460E-94D1-54222C63F5DA}</a:tableStyleId>
+                <a:tableStyleId>{2D5ABB26-0587-4C30-8999-92F81FD0307C}</a:tableStyleId>
               </a:tblPr>
               <a:tblGrid>
-                <a:gridCol w="1463040"/>
-                <a:gridCol w="9631375"/>
+                <a:gridCol w="1371600"/>
+                <a:gridCol w="9722815"/>
               </a:tblGrid>
-              <a:tr h="457200">
+              <a:tr h="411480">
                 <a:tc>
                   <a:txBody>
                     <a:bodyPr wrap="square"/>
@@ -9321,11 +8952,11 @@
                     <a:p>
                       <a:pPr algn="ctr">
                         <a:lnSpc>
-                          <a:spcPct val="115000"/>
+                          <a:spcPct val="110000"/>
                         </a:lnSpc>
                       </a:pPr>
                       <a:r>
-                        <a:rPr sz="2200" b="1">
+                        <a:rPr sz="2000" b="1">
                           <a:solidFill>
                             <a:srgbClr val="F4F2EC"/>
                           </a:solidFill>
@@ -9335,7 +8966,7 @@
                       </a:r>
                     </a:p>
                   </a:txBody>
-                  <a:tcPr anchor="ctr" marL="109728" marR="109728" marT="54864" marB="54864">
+                  <a:tcPr anchor="ctr" marL="109728" marR="109728" marT="45720" marB="45720">
                     <a:lnB w="9525" cap="flat" cmpd="sng" algn="ctr">
                       <a:solidFill>
                         <a:srgbClr val="4B5320"/>
@@ -9368,11 +8999,11 @@
                     <a:p>
                       <a:pPr algn="ctr">
                         <a:lnSpc>
-                          <a:spcPct val="115000"/>
+                          <a:spcPct val="110000"/>
                         </a:lnSpc>
                       </a:pPr>
                       <a:r>
-                        <a:rPr sz="2200" b="1">
+                        <a:rPr sz="2000" b="1">
                           <a:solidFill>
                             <a:srgbClr val="F4F2EC"/>
                           </a:solidFill>
@@ -9382,7 +9013,7 @@
                       </a:r>
                     </a:p>
                   </a:txBody>
-                  <a:tcPr anchor="ctr" marL="109728" marR="109728" marT="54864" marB="54864">
+                  <a:tcPr anchor="ctr" marL="109728" marR="109728" marT="45720" marB="45720">
                     <a:lnB w="9525" cap="flat" cmpd="sng" algn="ctr">
                       <a:solidFill>
                         <a:srgbClr val="4B5320"/>
@@ -9409,7 +9040,7 @@
                   </a:tcPr>
                 </a:tc>
               </a:tr>
-              <a:tr h="667512">
+              <a:tr h="704088">
                 <a:tc>
                   <a:txBody>
                     <a:bodyPr wrap="square"/>
@@ -9417,11 +9048,11 @@
                     <a:p>
                       <a:pPr algn="ctr">
                         <a:lnSpc>
-                          <a:spcPct val="115000"/>
+                          <a:spcPct val="110000"/>
                         </a:lnSpc>
                       </a:pPr>
                       <a:r>
-                        <a:rPr sz="2200" b="1">
+                        <a:rPr sz="2000" b="1">
                           <a:solidFill>
                             <a:srgbClr val="4B5320"/>
                           </a:solidFill>
@@ -9431,7 +9062,7 @@
                       </a:r>
                     </a:p>
                   </a:txBody>
-                  <a:tcPr anchor="ctr" marL="109728" marR="109728" marT="54864" marB="54864">
+                  <a:tcPr anchor="ctr" marL="109728" marR="109728" marT="45720" marB="45720">
                     <a:lnB w="9525" cap="flat" cmpd="sng" algn="ctr">
                       <a:solidFill>
                         <a:srgbClr val="4B5320"/>
@@ -9464,7 +9095,7 @@
                     <a:p>
                       <a:pPr algn="l">
                         <a:lnSpc>
-                          <a:spcPct val="115000"/>
+                          <a:spcPct val="110000"/>
                         </a:lnSpc>
                       </a:pPr>
                       <a:r>
@@ -9474,13 +9105,13 @@
                           </a:solidFill>
                           <a:latin typeface="Arial"/>
                         </a:rPr>
-                        <a:t>1. IPB/DDMP identifies AAs and en disposn (RL 11 TSR–115 Maratha).</a:t>
+                        <a:t>IPB/DDMP identifies AAs and en disposn (RL 11 TSR–115 Maratha).</a:t>
                       </a:r>
                     </a:p>
                     <a:p>
                       <a:pPr algn="l">
                         <a:lnSpc>
-                          <a:spcPct val="115000"/>
+                          <a:spcPct val="110000"/>
                         </a:lnSpc>
                       </a:pPr>
                       <a:r>
@@ -9490,13 +9121,13 @@
                           </a:solidFill>
                           <a:latin typeface="Arial"/>
                         </a:rPr>
-                        <a:t>2. Ops Plan for simultaneous offn (201 Bde) and def (144 Bde).</a:t>
+                        <a:t>Ops Plan for simultaneous offn (201 Bde) and def (144 Bde).</a:t>
                       </a:r>
                     </a:p>
                     <a:p>
                       <a:pPr algn="l">
                         <a:lnSpc>
-                          <a:spcPct val="115000"/>
+                          <a:spcPct val="110000"/>
                         </a:lnSpc>
                       </a:pPr>
                       <a:r>
@@ -9506,11 +9137,11 @@
                           </a:solidFill>
                           <a:latin typeface="Arial"/>
                         </a:rPr>
-                        <a:t>3. FUP, IB Xing site and Blocking Posn selected.</a:t>
+                        <a:t>FUP, IB Xing site and Blocking Posn selected.</a:t>
                       </a:r>
                     </a:p>
                   </a:txBody>
-                  <a:tcPr anchor="ctr" marL="109728" marR="109728" marT="54864" marB="54864">
+                  <a:tcPr anchor="ctr" marL="109728" marR="109728" marT="45720" marB="45720">
                     <a:lnB w="9525" cap="flat" cmpd="sng" algn="ctr">
                       <a:solidFill>
                         <a:srgbClr val="4B5320"/>
@@ -9537,7 +9168,7 @@
                   </a:tcPr>
                 </a:tc>
               </a:tr>
-              <a:tr h="667512">
+              <a:tr h="704088">
                 <a:tc>
                   <a:txBody>
                     <a:bodyPr wrap="square"/>
@@ -9545,11 +9176,11 @@
                     <a:p>
                       <a:pPr algn="ctr">
                         <a:lnSpc>
-                          <a:spcPct val="115000"/>
+                          <a:spcPct val="110000"/>
                         </a:lnSpc>
                       </a:pPr>
                       <a:r>
-                        <a:rPr sz="2200" b="1">
+                        <a:rPr sz="2000" b="1">
                           <a:solidFill>
                             <a:srgbClr val="4B5320"/>
                           </a:solidFill>
@@ -9559,7 +9190,7 @@
                       </a:r>
                     </a:p>
                   </a:txBody>
-                  <a:tcPr anchor="ctr" marL="109728" marR="109728" marT="54864" marB="54864">
+                  <a:tcPr anchor="ctr" marL="109728" marR="109728" marT="45720" marB="45720">
                     <a:lnB w="9525" cap="flat" cmpd="sng" algn="ctr">
                       <a:solidFill>
                         <a:srgbClr val="4B5320"/>
@@ -9592,7 +9223,7 @@
                     <a:p>
                       <a:pPr algn="l">
                         <a:lnSpc>
-                          <a:spcPct val="115000"/>
+                          <a:spcPct val="110000"/>
                         </a:lnSpc>
                       </a:pPr>
                       <a:r>
@@ -9602,13 +9233,13 @@
                           </a:solidFill>
                           <a:latin typeface="Arial"/>
                         </a:rPr>
-                        <a:t>1. 201 Bde launches offn X IB at KASBA.</a:t>
+                        <a:t>201 Bde launches offn X IB at KASBA.</a:t>
                       </a:r>
                     </a:p>
                     <a:p>
                       <a:pPr algn="l">
                         <a:lnSpc>
-                          <a:spcPct val="115000"/>
+                          <a:spcPct val="110000"/>
                         </a:lnSpc>
                       </a:pPr>
                       <a:r>
@@ -9618,13 +9249,13 @@
                           </a:solidFill>
                           <a:latin typeface="Arial"/>
                         </a:rPr>
-                        <a:t>2. 144 Bde orgs def/Blocking Posn vs RL 8 Dogra Regt.</a:t>
+                        <a:t>144 Bde orgs def / Blocking Posn vs RL 8 Dogra Regt.</a:t>
                       </a:r>
                     </a:p>
                     <a:p>
                       <a:pPr algn="l">
                         <a:lnSpc>
-                          <a:spcPct val="115000"/>
+                          <a:spcPct val="110000"/>
                         </a:lnSpc>
                       </a:pPr>
                       <a:r>
@@ -9634,11 +9265,11 @@
                           </a:solidFill>
                           <a:latin typeface="Arial"/>
                         </a:rPr>
-                        <a:t>3. Div HQ coord both sectors via common op pic.</a:t>
+                        <a:t>Div HQ coord both sectors via common op pic.</a:t>
                       </a:r>
                     </a:p>
                   </a:txBody>
-                  <a:tcPr anchor="ctr" marL="109728" marR="109728" marT="54864" marB="54864">
+                  <a:tcPr anchor="ctr" marL="109728" marR="109728" marT="45720" marB="45720">
                     <a:lnB w="9525" cap="flat" cmpd="sng" algn="ctr">
                       <a:solidFill>
                         <a:srgbClr val="4B5320"/>
@@ -9665,7 +9296,7 @@
                   </a:tcPr>
                 </a:tc>
               </a:tr>
-              <a:tr h="667512">
+              <a:tr h="704088">
                 <a:tc>
                   <a:txBody>
                     <a:bodyPr wrap="square"/>
@@ -9673,11 +9304,11 @@
                     <a:p>
                       <a:pPr algn="ctr">
                         <a:lnSpc>
-                          <a:spcPct val="115000"/>
+                          <a:spcPct val="110000"/>
                         </a:lnSpc>
                       </a:pPr>
                       <a:r>
-                        <a:rPr sz="2200" b="1">
+                        <a:rPr sz="2000" b="1">
                           <a:solidFill>
                             <a:srgbClr val="4B5320"/>
                           </a:solidFill>
@@ -9687,7 +9318,7 @@
                       </a:r>
                     </a:p>
                   </a:txBody>
-                  <a:tcPr anchor="ctr" marL="109728" marR="109728" marT="54864" marB="54864">
+                  <a:tcPr anchor="ctr" marL="109728" marR="109728" marT="45720" marB="45720">
                     <a:lnB w="9525" cap="flat" cmpd="sng" algn="ctr">
                       <a:solidFill>
                         <a:srgbClr val="4B5320"/>
@@ -9720,7 +9351,7 @@
                     <a:p>
                       <a:pPr algn="l">
                         <a:lnSpc>
-                          <a:spcPct val="115000"/>
+                          <a:spcPct val="110000"/>
                         </a:lnSpc>
                       </a:pPr>
                       <a:r>
@@ -9730,13 +9361,13 @@
                           </a:solidFill>
                           <a:latin typeface="Arial"/>
                         </a:rPr>
-                        <a:t>1. Adv resumes; BISHALGARH captured (North).</a:t>
+                        <a:t>Adv resumes; BISHALGARH captured (North).</a:t>
                       </a:r>
                     </a:p>
                     <a:p>
                       <a:pPr algn="l">
                         <a:lnSpc>
-                          <a:spcPct val="115000"/>
+                          <a:spcPct val="110000"/>
                         </a:lnSpc>
                       </a:pPr>
                       <a:r>
@@ -9746,13 +9377,13 @@
                           </a:solidFill>
                           <a:latin typeface="Arial"/>
                         </a:rPr>
-                        <a:t>2. Bde-resourced attk on RL Blocking Posn (South).</a:t>
+                        <a:t>Bde-resourced attk on RL Blocking Posn (South).</a:t>
                       </a:r>
                     </a:p>
                     <a:p>
                       <a:pPr algn="l">
                         <a:lnSpc>
-                          <a:spcPct val="115000"/>
+                          <a:spcPct val="110000"/>
                         </a:lnSpc>
                       </a:pPr>
                       <a:r>
@@ -9762,11 +9393,11 @@
                           </a:solidFill>
                           <a:latin typeface="Arial"/>
                         </a:rPr>
-                        <a:t>3. Div HQ realloc arty/engr resource across bdes.</a:t>
+                        <a:t>Div HQ realloc arty/engr resource across bdes.</a:t>
                       </a:r>
                     </a:p>
                   </a:txBody>
-                  <a:tcPr anchor="ctr" marL="109728" marR="109728" marT="54864" marB="54864">
+                  <a:tcPr anchor="ctr" marL="109728" marR="109728" marT="45720" marB="45720">
                     <a:lnB w="9525" cap="flat" cmpd="sng" algn="ctr">
                       <a:solidFill>
                         <a:srgbClr val="4B5320"/>
@@ -9793,7 +9424,7 @@
                   </a:tcPr>
                 </a:tc>
               </a:tr>
-              <a:tr h="667512">
+              <a:tr h="704088">
                 <a:tc>
                   <a:txBody>
                     <a:bodyPr wrap="square"/>
@@ -9801,11 +9432,11 @@
                     <a:p>
                       <a:pPr algn="ctr">
                         <a:lnSpc>
-                          <a:spcPct val="115000"/>
+                          <a:spcPct val="110000"/>
                         </a:lnSpc>
                       </a:pPr>
                       <a:r>
-                        <a:rPr sz="2200" b="1">
+                        <a:rPr sz="2000" b="1">
                           <a:solidFill>
                             <a:srgbClr val="4B5320"/>
                           </a:solidFill>
@@ -9815,7 +9446,7 @@
                       </a:r>
                     </a:p>
                   </a:txBody>
-                  <a:tcPr anchor="ctr" marL="109728" marR="109728" marT="54864" marB="54864">
+                  <a:tcPr anchor="ctr" marL="109728" marR="109728" marT="45720" marB="45720">
                     <a:lnB w="9525" cap="flat" cmpd="sng" algn="ctr">
                       <a:solidFill>
                         <a:srgbClr val="4B5320"/>
@@ -9848,7 +9479,7 @@
                     <a:p>
                       <a:pPr algn="l">
                         <a:lnSpc>
-                          <a:spcPct val="115000"/>
+                          <a:spcPct val="110000"/>
                         </a:lnSpc>
                       </a:pPr>
                       <a:r>
@@ -9858,13 +9489,13 @@
                           </a:solidFill>
                           <a:latin typeface="Arial"/>
                         </a:rPr>
-                        <a:t>1. BISHALGARH def vs RL quick attk (North).</a:t>
+                        <a:t>BISHALGARH def vs RL quick attk (North).</a:t>
                       </a:r>
                     </a:p>
                     <a:p>
                       <a:pPr algn="l">
                         <a:lnSpc>
-                          <a:spcPct val="115000"/>
+                          <a:spcPct val="110000"/>
                         </a:lnSpc>
                       </a:pPr>
                       <a:r>
@@ -9874,13 +9505,13 @@
                           </a:solidFill>
                           <a:latin typeface="Arial"/>
                         </a:rPr>
-                        <a:t>2. Div-resourced attk on Blocking Posn with fire/engr sp (South).</a:t>
+                        <a:t>Div-resourced attk on Blocking Posn with fire/engr sp.</a:t>
                       </a:r>
                     </a:p>
                     <a:p>
                       <a:pPr algn="l">
                         <a:lnSpc>
-                          <a:spcPct val="115000"/>
+                          <a:spcPct val="110000"/>
                         </a:lnSpc>
                       </a:pPr>
                       <a:r>
@@ -9890,11 +9521,11 @@
                           </a:solidFill>
                           <a:latin typeface="Arial"/>
                         </a:rPr>
-                        <a:t>3. Simultaneous offn-def coord at div lvl.</a:t>
+                        <a:t>Simultaneous offn-def coord at div lvl.</a:t>
                       </a:r>
                     </a:p>
                   </a:txBody>
-                  <a:tcPr anchor="ctr" marL="109728" marR="109728" marT="54864" marB="54864">
+                  <a:tcPr anchor="ctr" marL="109728" marR="109728" marT="45720" marB="45720">
                     <a:lnB w="9525" cap="flat" cmpd="sng" algn="ctr">
                       <a:solidFill>
                         <a:srgbClr val="4B5320"/>
@@ -9921,7 +9552,7 @@
                   </a:tcPr>
                 </a:tc>
               </a:tr>
-              <a:tr h="667512">
+              <a:tr h="704088">
                 <a:tc>
                   <a:txBody>
                     <a:bodyPr wrap="square"/>
@@ -9929,11 +9560,11 @@
                     <a:p>
                       <a:pPr algn="ctr">
                         <a:lnSpc>
-                          <a:spcPct val="115000"/>
+                          <a:spcPct val="110000"/>
                         </a:lnSpc>
                       </a:pPr>
                       <a:r>
-                        <a:rPr sz="2200" b="1">
+                        <a:rPr sz="2000" b="1">
                           <a:solidFill>
                             <a:srgbClr val="4B5320"/>
                           </a:solidFill>
@@ -9943,7 +9574,7 @@
                       </a:r>
                     </a:p>
                   </a:txBody>
-                  <a:tcPr anchor="ctr" marL="109728" marR="109728" marT="54864" marB="54864">
+                  <a:tcPr anchor="ctr" marL="109728" marR="109728" marT="45720" marB="45720">
                     <a:lnB w="9525" cap="flat" cmpd="sng" algn="ctr">
                       <a:solidFill>
                         <a:srgbClr val="4B5320"/>
@@ -9976,7 +9607,7 @@
                     <a:p>
                       <a:pPr algn="l">
                         <a:lnSpc>
-                          <a:spcPct val="115000"/>
+                          <a:spcPct val="110000"/>
                         </a:lnSpc>
                       </a:pPr>
                       <a:r>
@@ -9986,13 +9617,13 @@
                           </a:solidFill>
                           <a:latin typeface="Arial"/>
                         </a:rPr>
-                        <a:t>1. BISHALGARH def vs RL deliberate attk.</a:t>
+                        <a:t>BISHALGARH def vs RL deliberate attk.</a:t>
                       </a:r>
                     </a:p>
                     <a:p>
                       <a:pPr algn="l">
                         <a:lnSpc>
-                          <a:spcPct val="115000"/>
+                          <a:spcPct val="110000"/>
                         </a:lnSpc>
                       </a:pPr>
                       <a:r>
@@ -10002,13 +9633,13 @@
                           </a:solidFill>
                           <a:latin typeface="Arial"/>
                         </a:rPr>
-                        <a:t>2. Bde/Div Res coord to restore Bn C Pen.</a:t>
+                        <a:t>Bde/Div Res coord to restore Bn C Pen.</a:t>
                       </a:r>
                     </a:p>
                     <a:p>
                       <a:pPr algn="l">
                         <a:lnSpc>
-                          <a:spcPct val="115000"/>
+                          <a:spcPct val="110000"/>
                         </a:lnSpc>
                       </a:pPr>
                       <a:r>
@@ -10018,11 +9649,11 @@
                           </a:solidFill>
                           <a:latin typeface="Arial"/>
                         </a:rPr>
-                        <a:t>3. Decision: cont def or wdr to depth posn.</a:t>
+                        <a:t>Decision: cont def or wdr to depth posn.</a:t>
                       </a:r>
                     </a:p>
                   </a:txBody>
-                  <a:tcPr anchor="ctr" marL="109728" marR="109728" marT="54864" marB="54864">
+                  <a:tcPr anchor="ctr" marL="109728" marR="109728" marT="45720" marB="45720">
                     <a:lnB w="9525" cap="flat" cmpd="sng" algn="ctr">
                       <a:solidFill>
                         <a:srgbClr val="4B5320"/>
@@ -10055,13 +9686,13 @@
       </p:graphicFrame>
       <p:sp>
         <p:nvSpPr>
-          <p:cNvPr id="11" name="TextBox 10"/>
+          <p:cNvPr id="10" name="TextBox 9"/>
           <p:cNvSpPr txBox="1"/>
           <p:nvPr/>
         </p:nvSpPr>
         <p:spPr>
           <a:xfrm>
-            <a:off x="548640" y="6080760"/>
+            <a:off x="548640" y="6035040"/>
             <a:ext cx="11094415" cy="320040"/>
           </a:xfrm>
           <a:prstGeom prst="rect">
@@ -10099,6 +9730,14 @@
 <file path=ppt/slides/slide7.xml><?xml version="1.0" encoding="utf-8"?>
 <p:sld xmlns:a="http://schemas.openxmlformats.org/drawingml/2006/main" xmlns:p="http://schemas.openxmlformats.org/presentationml/2006/main" xmlns:r="http://schemas.openxmlformats.org/officeDocument/2006/relationships">
   <p:cSld>
+    <p:bg>
+      <p:bgPr>
+        <a:solidFill>
+          <a:srgbClr val="F4F2EC"/>
+        </a:solidFill>
+        <a:effectLst/>
+      </p:bgPr>
+    </p:bg>
     <p:spTree>
       <p:nvGrpSpPr>
         <p:cNvPr id="1" name=""/>
@@ -10108,51 +9747,7 @@
       <p:grpSpPr/>
       <p:sp>
         <p:nvSpPr>
-          <p:cNvPr id="2" name="Rectangle 1"/>
-          <p:cNvSpPr/>
-          <p:nvPr/>
-        </p:nvSpPr>
-        <p:spPr>
-          <a:xfrm>
-            <a:off x="0" y="0"/>
-            <a:ext cx="12191695" cy="6858000"/>
-          </a:xfrm>
-          <a:prstGeom prst="rect">
-            <a:avLst/>
-          </a:prstGeom>
-          <a:solidFill>
-            <a:srgbClr val="F4F2EC"/>
-          </a:solidFill>
-          <a:ln>
-            <a:noFill/>
-          </a:ln>
-          <a:effectLst/>
-        </p:spPr>
-        <p:style>
-          <a:lnRef idx="1">
-            <a:schemeClr val="accent1"/>
-          </a:lnRef>
-          <a:fillRef idx="3">
-            <a:schemeClr val="accent1"/>
-          </a:fillRef>
-          <a:effectRef idx="2">
-            <a:schemeClr val="accent1"/>
-          </a:effectRef>
-          <a:fontRef idx="minor">
-            <a:schemeClr val="lt1"/>
-          </a:fontRef>
-        </p:style>
-        <p:txBody>
-          <a:bodyPr rtlCol="0" anchor="ctr"/>
-          <a:lstStyle/>
-          <a:p>
-            <a:pPr algn="ctr"/>
-          </a:p>
-        </p:txBody>
-      </p:sp>
-      <p:sp>
-        <p:nvSpPr>
-          <p:cNvPr id="3" name="TextBox 2"/>
+          <p:cNvPr id="2" name="TextBox 1"/>
           <p:cNvSpPr txBox="1"/>
           <p:nvPr/>
         </p:nvSpPr>
@@ -10173,8 +9768,8 @@
           <a:lstStyle/>
           <a:p>
             <a:pPr algn="r"/>
-            <a:fld id="{774E519C-974F-46E6-B843-E63C3C86468A}" type="slidenum">
-              <a:rPr lang="en-US" sz="1600" b="1">
+            <a:fld id="{D2636858-A15A-47D5-B564-A89386D35776}" type="slidenum">
+              <a:rPr lang="en-US" sz="1600" b="1" dirty="0">
                 <a:solidFill>
                   <a:srgbClr val="B08D57"/>
                 </a:solidFill>
@@ -10196,7 +9791,7 @@
       </p:sp>
       <p:sp>
         <p:nvSpPr>
-          <p:cNvPr id="4" name="TextBox 3"/>
+          <p:cNvPr id="3" name="TextBox 2"/>
           <p:cNvSpPr txBox="1"/>
           <p:nvPr/>
         </p:nvSpPr>
@@ -10231,7 +9826,7 @@
       </p:sp>
       <p:sp>
         <p:nvSpPr>
-          <p:cNvPr id="5" name="TextBox 4"/>
+          <p:cNvPr id="4" name="TextBox 3"/>
           <p:cNvSpPr txBox="1"/>
           <p:nvPr/>
         </p:nvSpPr>
@@ -10266,7 +9861,7 @@
       </p:sp>
       <p:sp>
         <p:nvSpPr>
-          <p:cNvPr id="6" name="TextBox 5"/>
+          <p:cNvPr id="5" name="TextBox 4"/>
           <p:cNvSpPr txBox="1"/>
           <p:nvPr/>
         </p:nvSpPr>
@@ -10301,7 +9896,7 @@
       </p:sp>
       <p:sp>
         <p:nvSpPr>
-          <p:cNvPr id="7" name="TextBox 6"/>
+          <p:cNvPr id="6" name="TextBox 5"/>
           <p:cNvSpPr txBox="1"/>
           <p:nvPr/>
         </p:nvSpPr>
@@ -10336,7 +9931,7 @@
       </p:sp>
       <p:cxnSp>
         <p:nvCxnSpPr>
-          <p:cNvPr id="8" name="Connector 7"/>
+          <p:cNvPr id="7" name="Connector 6"/>
           <p:cNvCxnSpPr/>
           <p:nvPr/>
         </p:nvCxnSpPr>
@@ -10371,14 +9966,14 @@
       </p:cxnSp>
       <p:sp>
         <p:nvSpPr>
-          <p:cNvPr id="9" name="TextBox 8"/>
+          <p:cNvPr id="8" name="TextBox 7"/>
           <p:cNvSpPr txBox="1"/>
           <p:nvPr/>
         </p:nvSpPr>
         <p:spPr>
           <a:xfrm>
-            <a:off x="548640" y="1481328"/>
-            <a:ext cx="11094415" cy="411480"/>
+            <a:off x="548640" y="1417320"/>
+            <a:ext cx="11094415" cy="365760"/>
           </a:xfrm>
           <a:prstGeom prst="rect">
             <a:avLst/>
@@ -10406,27 +10001,27 @@
       </p:sp>
       <p:graphicFrame>
         <p:nvGraphicFramePr>
-          <p:cNvPr id="10" name="Table 9"/>
+          <p:cNvPr id="9" name="Table 8"/>
           <p:cNvGraphicFramePr>
             <a:graphicFrameLocks noGrp="1"/>
           </p:cNvGraphicFramePr>
           <p:nvPr/>
         </p:nvGraphicFramePr>
         <p:xfrm>
-          <a:off x="548640" y="1965960"/>
-          <a:ext cx="11094415" cy="3794760"/>
+          <a:off x="548640" y="1874519"/>
+          <a:ext cx="11094415" cy="3931920"/>
         </p:xfrm>
         <a:graphic>
           <a:graphicData uri="http://schemas.openxmlformats.org/drawingml/2006/table">
             <a:tbl>
               <a:tblPr firstRow="0" bandRow="0">
-                <a:tableStyleId>{5940675A-B579-460E-94D1-54222C63F5DA}</a:tableStyleId>
+                <a:tableStyleId>{2D5ABB26-0587-4C30-8999-92F81FD0307C}</a:tableStyleId>
               </a:tblPr>
               <a:tblGrid>
-                <a:gridCol w="1463040"/>
-                <a:gridCol w="9631375"/>
+                <a:gridCol w="1371600"/>
+                <a:gridCol w="9722815"/>
               </a:tblGrid>
-              <a:tr h="457200">
+              <a:tr h="411480">
                 <a:tc>
                   <a:txBody>
                     <a:bodyPr wrap="square"/>
@@ -10434,11 +10029,11 @@
                     <a:p>
                       <a:pPr algn="ctr">
                         <a:lnSpc>
-                          <a:spcPct val="115000"/>
+                          <a:spcPct val="110000"/>
                         </a:lnSpc>
                       </a:pPr>
                       <a:r>
-                        <a:rPr sz="2200" b="1">
+                        <a:rPr sz="2000" b="1">
                           <a:solidFill>
                             <a:srgbClr val="F4F2EC"/>
                           </a:solidFill>
@@ -10448,7 +10043,7 @@
                       </a:r>
                     </a:p>
                   </a:txBody>
-                  <a:tcPr anchor="ctr" marL="109728" marR="109728" marT="54864" marB="54864">
+                  <a:tcPr anchor="ctr" marL="109728" marR="109728" marT="45720" marB="45720">
                     <a:lnB w="9525" cap="flat" cmpd="sng" algn="ctr">
                       <a:solidFill>
                         <a:srgbClr val="4B5320"/>
@@ -10481,11 +10076,11 @@
                     <a:p>
                       <a:pPr algn="ctr">
                         <a:lnSpc>
-                          <a:spcPct val="115000"/>
+                          <a:spcPct val="110000"/>
                         </a:lnSpc>
                       </a:pPr>
                       <a:r>
-                        <a:rPr sz="2200" b="1">
+                        <a:rPr sz="2000" b="1">
                           <a:solidFill>
                             <a:srgbClr val="F4F2EC"/>
                           </a:solidFill>
@@ -10495,7 +10090,7 @@
                       </a:r>
                     </a:p>
                   </a:txBody>
-                  <a:tcPr anchor="ctr" marL="109728" marR="109728" marT="54864" marB="54864">
+                  <a:tcPr anchor="ctr" marL="109728" marR="109728" marT="45720" marB="45720">
                     <a:lnB w="9525" cap="flat" cmpd="sng" algn="ctr">
                       <a:solidFill>
                         <a:srgbClr val="4B5320"/>
@@ -10522,7 +10117,7 @@
                   </a:tcPr>
                 </a:tc>
               </a:tr>
-              <a:tr h="667512">
+              <a:tr h="704088">
                 <a:tc>
                   <a:txBody>
                     <a:bodyPr wrap="square"/>
@@ -10530,11 +10125,11 @@
                     <a:p>
                       <a:pPr algn="ctr">
                         <a:lnSpc>
-                          <a:spcPct val="115000"/>
+                          <a:spcPct val="110000"/>
                         </a:lnSpc>
                       </a:pPr>
                       <a:r>
-                        <a:rPr sz="2200" b="1">
+                        <a:rPr sz="2000" b="1">
                           <a:solidFill>
                             <a:srgbClr val="4B5320"/>
                           </a:solidFill>
@@ -10544,7 +10139,7 @@
                       </a:r>
                     </a:p>
                   </a:txBody>
-                  <a:tcPr anchor="ctr" marL="109728" marR="109728" marT="54864" marB="54864">
+                  <a:tcPr anchor="ctr" marL="109728" marR="109728" marT="45720" marB="45720">
                     <a:lnB w="9525" cap="flat" cmpd="sng" algn="ctr">
                       <a:solidFill>
                         <a:srgbClr val="4B5320"/>
@@ -10577,7 +10172,7 @@
                     <a:p>
                       <a:pPr algn="l">
                         <a:lnSpc>
-                          <a:spcPct val="115000"/>
+                          <a:spcPct val="110000"/>
                         </a:lnSpc>
                       </a:pPr>
                       <a:r>
@@ -10587,13 +10182,13 @@
                           </a:solidFill>
                           <a:latin typeface="Arial"/>
                         </a:rPr>
-                        <a:t>1. Comd Decision Points formulated for each phase.</a:t>
+                        <a:t>Comd Decision Points formulated for each phase.</a:t>
                       </a:r>
                     </a:p>
                     <a:p>
                       <a:pPr algn="l">
                         <a:lnSpc>
-                          <a:spcPct val="115000"/>
+                          <a:spcPct val="110000"/>
                         </a:lnSpc>
                       </a:pPr>
                       <a:r>
@@ -10603,11 +10198,11 @@
                           </a:solidFill>
                           <a:latin typeface="Arial"/>
                         </a:rPr>
-                        <a:t>2. Bde/Div Res des; decision auth delegated.</a:t>
+                        <a:t>Bde/Div Res des; decision auth delegated.</a:t>
                       </a:r>
                     </a:p>
                   </a:txBody>
-                  <a:tcPr anchor="ctr" marL="109728" marR="109728" marT="54864" marB="54864">
+                  <a:tcPr anchor="ctr" marL="109728" marR="109728" marT="45720" marB="45720">
                     <a:lnB w="9525" cap="flat" cmpd="sng" algn="ctr">
                       <a:solidFill>
                         <a:srgbClr val="4B5320"/>
@@ -10634,7 +10229,7 @@
                   </a:tcPr>
                 </a:tc>
               </a:tr>
-              <a:tr h="667512">
+              <a:tr h="704088">
                 <a:tc>
                   <a:txBody>
                     <a:bodyPr wrap="square"/>
@@ -10642,11 +10237,11 @@
                     <a:p>
                       <a:pPr algn="ctr">
                         <a:lnSpc>
-                          <a:spcPct val="115000"/>
+                          <a:spcPct val="110000"/>
                         </a:lnSpc>
                       </a:pPr>
                       <a:r>
-                        <a:rPr sz="2200" b="1">
+                        <a:rPr sz="2000" b="1">
                           <a:solidFill>
                             <a:srgbClr val="4B5320"/>
                           </a:solidFill>
@@ -10656,7 +10251,7 @@
                       </a:r>
                     </a:p>
                   </a:txBody>
-                  <a:tcPr anchor="ctr" marL="109728" marR="109728" marT="54864" marB="54864">
+                  <a:tcPr anchor="ctr" marL="109728" marR="109728" marT="45720" marB="45720">
                     <a:lnB w="9525" cap="flat" cmpd="sng" algn="ctr">
                       <a:solidFill>
                         <a:srgbClr val="4B5320"/>
@@ -10689,7 +10284,7 @@
                     <a:p>
                       <a:pPr algn="l">
                         <a:lnSpc>
-                          <a:spcPct val="115000"/>
+                          <a:spcPct val="110000"/>
                         </a:lnSpc>
                       </a:pPr>
                       <a:r>
@@ -10699,13 +10294,13 @@
                           </a:solidFill>
                           <a:latin typeface="Arial"/>
                         </a:rPr>
-                        <a:t>1. Bde decision on emp of Bde Res (15 BIR) at KAMALASAGAR.</a:t>
+                        <a:t>Bde decision on emp of Bde Res (15 BIR) at KAMALASAGAR.</a:t>
                       </a:r>
                     </a:p>
                     <a:p>
                       <a:pPr algn="l">
                         <a:lnSpc>
-                          <a:spcPct val="115000"/>
+                          <a:spcPct val="110000"/>
                         </a:lnSpc>
                       </a:pPr>
                       <a:r>
@@ -10715,13 +10310,13 @@
                           </a:solidFill>
                           <a:latin typeface="Arial"/>
                         </a:rPr>
-                        <a:t>2. Div HQ realloc arty resource bet bdes.</a:t>
+                        <a:t>Div HQ realloc arty resource bet bdes.</a:t>
                       </a:r>
                     </a:p>
                     <a:p>
                       <a:pPr algn="l">
                         <a:lnSpc>
-                          <a:spcPct val="115000"/>
+                          <a:spcPct val="110000"/>
                         </a:lnSpc>
                       </a:pPr>
                       <a:r>
@@ -10731,11 +10326,11 @@
                           </a:solidFill>
                           <a:latin typeface="Arial"/>
                         </a:rPr>
-                        <a:t>3. Div HQ review of inter-bde boundary.</a:t>
+                        <a:t>Div HQ review of inter-bde boundary.</a:t>
                       </a:r>
                     </a:p>
                   </a:txBody>
-                  <a:tcPr anchor="ctr" marL="109728" marR="109728" marT="54864" marB="54864">
+                  <a:tcPr anchor="ctr" marL="109728" marR="109728" marT="45720" marB="45720">
                     <a:lnB w="9525" cap="flat" cmpd="sng" algn="ctr">
                       <a:solidFill>
                         <a:srgbClr val="4B5320"/>
@@ -10762,7 +10357,7 @@
                   </a:tcPr>
                 </a:tc>
               </a:tr>
-              <a:tr h="667512">
+              <a:tr h="704088">
                 <a:tc>
                   <a:txBody>
                     <a:bodyPr wrap="square"/>
@@ -10770,11 +10365,11 @@
                     <a:p>
                       <a:pPr algn="ctr">
                         <a:lnSpc>
-                          <a:spcPct val="115000"/>
+                          <a:spcPct val="110000"/>
                         </a:lnSpc>
                       </a:pPr>
                       <a:r>
-                        <a:rPr sz="2200" b="1">
+                        <a:rPr sz="2000" b="1">
                           <a:solidFill>
                             <a:srgbClr val="4B5320"/>
                           </a:solidFill>
@@ -10784,7 +10379,7 @@
                       </a:r>
                     </a:p>
                   </a:txBody>
-                  <a:tcPr anchor="ctr" marL="109728" marR="109728" marT="54864" marB="54864">
+                  <a:tcPr anchor="ctr" marL="109728" marR="109728" marT="45720" marB="45720">
                     <a:lnB w="9525" cap="flat" cmpd="sng" algn="ctr">
                       <a:solidFill>
                         <a:srgbClr val="4B5320"/>
@@ -10817,7 +10412,7 @@
                     <a:p>
                       <a:pPr algn="l">
                         <a:lnSpc>
-                          <a:spcPct val="115000"/>
+                          <a:spcPct val="110000"/>
                         </a:lnSpc>
                       </a:pPr>
                       <a:r>
@@ -10827,13 +10422,13 @@
                           </a:solidFill>
                           <a:latin typeface="Arial"/>
                         </a:rPr>
-                        <a:t>1. Bde decision on stalled adv/emp of Bde Res.</a:t>
+                        <a:t>Bde decision on stalled adv / emp of Bde Res.</a:t>
                       </a:r>
                     </a:p>
                     <a:p>
                       <a:pPr algn="l">
                         <a:lnSpc>
-                          <a:spcPct val="115000"/>
+                          <a:spcPct val="110000"/>
                         </a:lnSpc>
                       </a:pPr>
                       <a:r>
@@ -10843,13 +10438,13 @@
                           </a:solidFill>
                           <a:latin typeface="Arial"/>
                         </a:rPr>
-                        <a:t>2. Div HQ realloc engr resource (North).</a:t>
+                        <a:t>Div HQ realloc engr resource (North).</a:t>
                       </a:r>
                     </a:p>
                     <a:p>
                       <a:pPr algn="l">
                         <a:lnSpc>
-                          <a:spcPct val="115000"/>
+                          <a:spcPct val="110000"/>
                         </a:lnSpc>
                       </a:pPr>
                       <a:r>
@@ -10859,11 +10454,11 @@
                           </a:solidFill>
                           <a:latin typeface="Arial"/>
                         </a:rPr>
-                        <a:t>3. Div HQ decision on emp of Div arty resource (South).</a:t>
+                        <a:t>Div HQ decision on emp of Div arty resource (South).</a:t>
                       </a:r>
                     </a:p>
                   </a:txBody>
-                  <a:tcPr anchor="ctr" marL="109728" marR="109728" marT="54864" marB="54864">
+                  <a:tcPr anchor="ctr" marL="109728" marR="109728" marT="45720" marB="45720">
                     <a:lnB w="9525" cap="flat" cmpd="sng" algn="ctr">
                       <a:solidFill>
                         <a:srgbClr val="4B5320"/>
@@ -10890,7 +10485,7 @@
                   </a:tcPr>
                 </a:tc>
               </a:tr>
-              <a:tr h="667512">
+              <a:tr h="704088">
                 <a:tc>
                   <a:txBody>
                     <a:bodyPr wrap="square"/>
@@ -10898,11 +10493,11 @@
                     <a:p>
                       <a:pPr algn="ctr">
                         <a:lnSpc>
-                          <a:spcPct val="115000"/>
+                          <a:spcPct val="110000"/>
                         </a:lnSpc>
                       </a:pPr>
                       <a:r>
-                        <a:rPr sz="2200" b="1">
+                        <a:rPr sz="2000" b="1">
                           <a:solidFill>
                             <a:srgbClr val="4B5320"/>
                           </a:solidFill>
@@ -10912,7 +10507,7 @@
                       </a:r>
                     </a:p>
                   </a:txBody>
-                  <a:tcPr anchor="ctr" marL="109728" marR="109728" marT="54864" marB="54864">
+                  <a:tcPr anchor="ctr" marL="109728" marR="109728" marT="45720" marB="45720">
                     <a:lnB w="9525" cap="flat" cmpd="sng" algn="ctr">
                       <a:solidFill>
                         <a:srgbClr val="4B5320"/>
@@ -10945,7 +10540,7 @@
                     <a:p>
                       <a:pPr algn="l">
                         <a:lnSpc>
-                          <a:spcPct val="115000"/>
+                          <a:spcPct val="110000"/>
                         </a:lnSpc>
                       </a:pPr>
                       <a:r>
@@ -10955,13 +10550,13 @@
                           </a:solidFill>
                           <a:latin typeface="Arial"/>
                         </a:rPr>
-                        <a:t>1. Bde decision under en quick attk (Bn C Pen pressured).</a:t>
+                        <a:t>Bde decision under en quick attk (Bn C Pen pressured).</a:t>
                       </a:r>
                     </a:p>
                     <a:p>
                       <a:pPr algn="l">
                         <a:lnSpc>
-                          <a:spcPct val="115000"/>
+                          <a:spcPct val="110000"/>
                         </a:lnSpc>
                       </a:pPr>
                       <a:r>
@@ -10971,13 +10566,13 @@
                           </a:solidFill>
                           <a:latin typeface="Arial"/>
                         </a:rPr>
-                        <a:t>2. Div HQ realloc Div arty resource.</a:t>
+                        <a:t>Div HQ realloc Div arty resource.</a:t>
                       </a:r>
                     </a:p>
                     <a:p>
                       <a:pPr algn="l">
                         <a:lnSpc>
-                          <a:spcPct val="115000"/>
+                          <a:spcPct val="110000"/>
                         </a:lnSpc>
                       </a:pPr>
                       <a:r>
@@ -10987,11 +10582,11 @@
                           </a:solidFill>
                           <a:latin typeface="Arial"/>
                         </a:rPr>
-                        <a:t>3. Div HQ review Div Res status for cross-reinforcement.</a:t>
+                        <a:t>Div HQ review Div Res status for cross-reinforcement.</a:t>
                       </a:r>
                     </a:p>
                   </a:txBody>
-                  <a:tcPr anchor="ctr" marL="109728" marR="109728" marT="54864" marB="54864">
+                  <a:tcPr anchor="ctr" marL="109728" marR="109728" marT="45720" marB="45720">
                     <a:lnB w="9525" cap="flat" cmpd="sng" algn="ctr">
                       <a:solidFill>
                         <a:srgbClr val="4B5320"/>
@@ -11018,7 +10613,7 @@
                   </a:tcPr>
                 </a:tc>
               </a:tr>
-              <a:tr h="667512">
+              <a:tr h="704088">
                 <a:tc>
                   <a:txBody>
                     <a:bodyPr wrap="square"/>
@@ -11026,11 +10621,11 @@
                     <a:p>
                       <a:pPr algn="ctr">
                         <a:lnSpc>
-                          <a:spcPct val="115000"/>
+                          <a:spcPct val="110000"/>
                         </a:lnSpc>
                       </a:pPr>
                       <a:r>
-                        <a:rPr sz="2200" b="1">
+                        <a:rPr sz="2000" b="1">
                           <a:solidFill>
                             <a:srgbClr val="4B5320"/>
                           </a:solidFill>
@@ -11040,7 +10635,7 @@
                       </a:r>
                     </a:p>
                   </a:txBody>
-                  <a:tcPr anchor="ctr" marL="109728" marR="109728" marT="54864" marB="54864">
+                  <a:tcPr anchor="ctr" marL="109728" marR="109728" marT="45720" marB="45720">
                     <a:lnB w="9525" cap="flat" cmpd="sng" algn="ctr">
                       <a:solidFill>
                         <a:srgbClr val="4B5320"/>
@@ -11073,7 +10668,7 @@
                     <a:p>
                       <a:pPr algn="l">
                         <a:lnSpc>
-                          <a:spcPct val="115000"/>
+                          <a:spcPct val="110000"/>
                         </a:lnSpc>
                       </a:pPr>
                       <a:r>
@@ -11083,13 +10678,13 @@
                           </a:solidFill>
                           <a:latin typeface="Arial"/>
                         </a:rPr>
-                        <a:t>1. Bde decision on emp of Bde Res (15 BIR).</a:t>
+                        <a:t>Bde decision on emp of Bde Res (15 BIR).</a:t>
                       </a:r>
                     </a:p>
                     <a:p>
                       <a:pPr algn="l">
                         <a:lnSpc>
-                          <a:spcPct val="115000"/>
+                          <a:spcPct val="110000"/>
                         </a:lnSpc>
                       </a:pPr>
                       <a:r>
@@ -11099,13 +10694,13 @@
                           </a:solidFill>
                           <a:latin typeface="Arial"/>
                         </a:rPr>
-                        <a:t>2. Div HQ climax decision: emp Div Res or wdr.</a:t>
+                        <a:t>Div HQ climax decision: emp Div Res or wdr.</a:t>
                       </a:r>
                     </a:p>
                     <a:p>
                       <a:pPr algn="l">
                         <a:lnSpc>
-                          <a:spcPct val="115000"/>
+                          <a:spcPct val="110000"/>
                         </a:lnSpc>
                       </a:pPr>
                       <a:r>
@@ -11115,11 +10710,11 @@
                           </a:solidFill>
                           <a:latin typeface="Arial"/>
                         </a:rPr>
-                        <a:t>3. Formal dir issued within doctrinal time frame.</a:t>
+                        <a:t>Formal dir issued within doctrinal time frame.</a:t>
                       </a:r>
                     </a:p>
                   </a:txBody>
-                  <a:tcPr anchor="ctr" marL="109728" marR="109728" marT="54864" marB="54864">
+                  <a:tcPr anchor="ctr" marL="109728" marR="109728" marT="45720" marB="45720">
                     <a:lnB w="9525" cap="flat" cmpd="sng" algn="ctr">
                       <a:solidFill>
                         <a:srgbClr val="4B5320"/>
@@ -11152,13 +10747,13 @@
       </p:graphicFrame>
       <p:sp>
         <p:nvSpPr>
-          <p:cNvPr id="11" name="TextBox 10"/>
+          <p:cNvPr id="10" name="TextBox 9"/>
           <p:cNvSpPr txBox="1"/>
           <p:nvPr/>
         </p:nvSpPr>
         <p:spPr>
           <a:xfrm>
-            <a:off x="548640" y="6080760"/>
+            <a:off x="548640" y="6035040"/>
             <a:ext cx="11094415" cy="320040"/>
           </a:xfrm>
           <a:prstGeom prst="rect">
@@ -11196,6 +10791,14 @@
 <file path=ppt/slides/slide8.xml><?xml version="1.0" encoding="utf-8"?>
 <p:sld xmlns:a="http://schemas.openxmlformats.org/drawingml/2006/main" xmlns:p="http://schemas.openxmlformats.org/presentationml/2006/main" xmlns:r="http://schemas.openxmlformats.org/officeDocument/2006/relationships">
   <p:cSld>
+    <p:bg>
+      <p:bgPr>
+        <a:solidFill>
+          <a:srgbClr val="F4F2EC"/>
+        </a:solidFill>
+        <a:effectLst/>
+      </p:bgPr>
+    </p:bg>
     <p:spTree>
       <p:nvGrpSpPr>
         <p:cNvPr id="1" name=""/>
@@ -11205,51 +10808,7 @@
       <p:grpSpPr/>
       <p:sp>
         <p:nvSpPr>
-          <p:cNvPr id="2" name="Rectangle 1"/>
-          <p:cNvSpPr/>
-          <p:nvPr/>
-        </p:nvSpPr>
-        <p:spPr>
-          <a:xfrm>
-            <a:off x="0" y="0"/>
-            <a:ext cx="12191695" cy="6858000"/>
-          </a:xfrm>
-          <a:prstGeom prst="rect">
-            <a:avLst/>
-          </a:prstGeom>
-          <a:solidFill>
-            <a:srgbClr val="F4F2EC"/>
-          </a:solidFill>
-          <a:ln>
-            <a:noFill/>
-          </a:ln>
-          <a:effectLst/>
-        </p:spPr>
-        <p:style>
-          <a:lnRef idx="1">
-            <a:schemeClr val="accent1"/>
-          </a:lnRef>
-          <a:fillRef idx="3">
-            <a:schemeClr val="accent1"/>
-          </a:fillRef>
-          <a:effectRef idx="2">
-            <a:schemeClr val="accent1"/>
-          </a:effectRef>
-          <a:fontRef idx="minor">
-            <a:schemeClr val="lt1"/>
-          </a:fontRef>
-        </p:style>
-        <p:txBody>
-          <a:bodyPr rtlCol="0" anchor="ctr"/>
-          <a:lstStyle/>
-          <a:p>
-            <a:pPr algn="ctr"/>
-          </a:p>
-        </p:txBody>
-      </p:sp>
-      <p:sp>
-        <p:nvSpPr>
-          <p:cNvPr id="3" name="TextBox 2"/>
+          <p:cNvPr id="2" name="TextBox 1"/>
           <p:cNvSpPr txBox="1"/>
           <p:nvPr/>
         </p:nvSpPr>
@@ -11270,8 +10829,8 @@
           <a:lstStyle/>
           <a:p>
             <a:pPr algn="r"/>
-            <a:fld id="{A79EAB84-5DF8-438C-A72F-1EBC91011EA1}" type="slidenum">
-              <a:rPr lang="en-US" sz="1600" b="1">
+            <a:fld id="{E62100B7-19E2-4004-8CD0-1288DE4099FF}" type="slidenum">
+              <a:rPr lang="en-US" sz="1600" b="1" dirty="0">
                 <a:solidFill>
                   <a:srgbClr val="B08D57"/>
                 </a:solidFill>
@@ -11293,7 +10852,7 @@
       </p:sp>
       <p:sp>
         <p:nvSpPr>
-          <p:cNvPr id="4" name="TextBox 3"/>
+          <p:cNvPr id="3" name="TextBox 2"/>
           <p:cNvSpPr txBox="1"/>
           <p:nvPr/>
         </p:nvSpPr>
@@ -11328,7 +10887,7 @@
       </p:sp>
       <p:sp>
         <p:nvSpPr>
-          <p:cNvPr id="5" name="TextBox 4"/>
+          <p:cNvPr id="4" name="TextBox 3"/>
           <p:cNvSpPr txBox="1"/>
           <p:nvPr/>
         </p:nvSpPr>
@@ -11363,7 +10922,7 @@
       </p:sp>
       <p:sp>
         <p:nvSpPr>
-          <p:cNvPr id="6" name="TextBox 5"/>
+          <p:cNvPr id="5" name="TextBox 4"/>
           <p:cNvSpPr txBox="1"/>
           <p:nvPr/>
         </p:nvSpPr>
@@ -11398,7 +10957,7 @@
       </p:sp>
       <p:sp>
         <p:nvSpPr>
-          <p:cNvPr id="7" name="TextBox 6"/>
+          <p:cNvPr id="6" name="TextBox 5"/>
           <p:cNvSpPr txBox="1"/>
           <p:nvPr/>
         </p:nvSpPr>
@@ -11433,7 +10992,7 @@
       </p:sp>
       <p:cxnSp>
         <p:nvCxnSpPr>
-          <p:cNvPr id="8" name="Connector 7"/>
+          <p:cNvPr id="7" name="Connector 6"/>
           <p:cNvCxnSpPr/>
           <p:nvPr/>
         </p:nvCxnSpPr>
@@ -11468,14 +11027,14 @@
       </p:cxnSp>
       <p:sp>
         <p:nvSpPr>
-          <p:cNvPr id="9" name="TextBox 8"/>
+          <p:cNvPr id="8" name="TextBox 7"/>
           <p:cNvSpPr txBox="1"/>
           <p:nvPr/>
         </p:nvSpPr>
         <p:spPr>
           <a:xfrm>
-            <a:off x="548640" y="1481328"/>
-            <a:ext cx="11094415" cy="411480"/>
+            <a:off x="548640" y="1417320"/>
+            <a:ext cx="11094415" cy="365760"/>
           </a:xfrm>
           <a:prstGeom prst="rect">
             <a:avLst/>
@@ -11503,27 +11062,27 @@
       </p:sp>
       <p:graphicFrame>
         <p:nvGraphicFramePr>
-          <p:cNvPr id="10" name="Table 9"/>
+          <p:cNvPr id="9" name="Table 8"/>
           <p:cNvGraphicFramePr>
             <a:graphicFrameLocks noGrp="1"/>
           </p:cNvGraphicFramePr>
           <p:nvPr/>
         </p:nvGraphicFramePr>
         <p:xfrm>
-          <a:off x="548640" y="1965960"/>
-          <a:ext cx="11094415" cy="3794760"/>
+          <a:off x="548640" y="1874519"/>
+          <a:ext cx="11094415" cy="3931920"/>
         </p:xfrm>
         <a:graphic>
           <a:graphicData uri="http://schemas.openxmlformats.org/drawingml/2006/table">
             <a:tbl>
               <a:tblPr firstRow="0" bandRow="0">
-                <a:tableStyleId>{5940675A-B579-460E-94D1-54222C63F5DA}</a:tableStyleId>
+                <a:tableStyleId>{2D5ABB26-0587-4C30-8999-92F81FD0307C}</a:tableStyleId>
               </a:tblPr>
               <a:tblGrid>
-                <a:gridCol w="1463040"/>
-                <a:gridCol w="9631375"/>
+                <a:gridCol w="1371600"/>
+                <a:gridCol w="9722815"/>
               </a:tblGrid>
-              <a:tr h="457200">
+              <a:tr h="411480">
                 <a:tc>
                   <a:txBody>
                     <a:bodyPr wrap="square"/>
@@ -11531,11 +11090,11 @@
                     <a:p>
                       <a:pPr algn="ctr">
                         <a:lnSpc>
-                          <a:spcPct val="115000"/>
+                          <a:spcPct val="110000"/>
                         </a:lnSpc>
                       </a:pPr>
                       <a:r>
-                        <a:rPr sz="2200" b="1">
+                        <a:rPr sz="2000" b="1">
                           <a:solidFill>
                             <a:srgbClr val="F4F2EC"/>
                           </a:solidFill>
@@ -11545,7 +11104,7 @@
                       </a:r>
                     </a:p>
                   </a:txBody>
-                  <a:tcPr anchor="ctr" marL="109728" marR="109728" marT="54864" marB="54864">
+                  <a:tcPr anchor="ctr" marL="109728" marR="109728" marT="45720" marB="45720">
                     <a:lnB w="9525" cap="flat" cmpd="sng" algn="ctr">
                       <a:solidFill>
                         <a:srgbClr val="4B5320"/>
@@ -11578,11 +11137,11 @@
                     <a:p>
                       <a:pPr algn="ctr">
                         <a:lnSpc>
-                          <a:spcPct val="115000"/>
+                          <a:spcPct val="110000"/>
                         </a:lnSpc>
                       </a:pPr>
                       <a:r>
-                        <a:rPr sz="2200" b="1">
+                        <a:rPr sz="2000" b="1">
                           <a:solidFill>
                             <a:srgbClr val="F4F2EC"/>
                           </a:solidFill>
@@ -11592,7 +11151,7 @@
                       </a:r>
                     </a:p>
                   </a:txBody>
-                  <a:tcPr anchor="ctr" marL="109728" marR="109728" marT="54864" marB="54864">
+                  <a:tcPr anchor="ctr" marL="109728" marR="109728" marT="45720" marB="45720">
                     <a:lnB w="9525" cap="flat" cmpd="sng" algn="ctr">
                       <a:solidFill>
                         <a:srgbClr val="4B5320"/>
@@ -11619,7 +11178,7 @@
                   </a:tcPr>
                 </a:tc>
               </a:tr>
-              <a:tr h="667512">
+              <a:tr h="704088">
                 <a:tc>
                   <a:txBody>
                     <a:bodyPr wrap="square"/>
@@ -11627,11 +11186,11 @@
                     <a:p>
                       <a:pPr algn="ctr">
                         <a:lnSpc>
-                          <a:spcPct val="115000"/>
+                          <a:spcPct val="110000"/>
                         </a:lnSpc>
                       </a:pPr>
                       <a:r>
-                        <a:rPr sz="2200" b="1">
+                        <a:rPr sz="2000" b="1">
                           <a:solidFill>
                             <a:srgbClr val="4B5320"/>
                           </a:solidFill>
@@ -11641,7 +11200,7 @@
                       </a:r>
                     </a:p>
                   </a:txBody>
-                  <a:tcPr anchor="ctr" marL="109728" marR="109728" marT="54864" marB="54864">
+                  <a:tcPr anchor="ctr" marL="109728" marR="109728" marT="45720" marB="45720">
                     <a:lnB w="9525" cap="flat" cmpd="sng" algn="ctr">
                       <a:solidFill>
                         <a:srgbClr val="4B5320"/>
@@ -11674,7 +11233,7 @@
                     <a:p>
                       <a:pPr algn="l">
                         <a:lnSpc>
-                          <a:spcPct val="115000"/>
+                          <a:spcPct val="110000"/>
                         </a:lnSpc>
                       </a:pPr>
                       <a:r>
@@ -11684,13 +11243,13 @@
                           </a:solidFill>
                           <a:latin typeface="Arial"/>
                         </a:rPr>
-                        <a:t>1. AdminO/Concept of Sp prepared.</a:t>
+                        <a:t>AdminO / Concept of Sp prepared.</a:t>
                       </a:r>
                     </a:p>
                     <a:p>
                       <a:pPr algn="l">
                         <a:lnSpc>
-                          <a:spcPct val="115000"/>
+                          <a:spcPct val="110000"/>
                         </a:lnSpc>
                       </a:pPr>
                       <a:r>
@@ -11700,11 +11259,11 @@
                           </a:solidFill>
                           <a:latin typeface="Arial"/>
                         </a:rPr>
-                        <a:t>2. DAA/BAA sel; G-est/ammo alloc iaw AHQ MO Dte.</a:t>
+                        <a:t>DAA/BAA sel; G-est/ammo alloc iaw AHQ MO Dte.</a:t>
                       </a:r>
                     </a:p>
                   </a:txBody>
-                  <a:tcPr anchor="ctr" marL="109728" marR="109728" marT="54864" marB="54864">
+                  <a:tcPr anchor="ctr" marL="109728" marR="109728" marT="45720" marB="45720">
                     <a:lnB w="9525" cap="flat" cmpd="sng" algn="ctr">
                       <a:solidFill>
                         <a:srgbClr val="4B5320"/>
@@ -11731,7 +11290,7 @@
                   </a:tcPr>
                 </a:tc>
               </a:tr>
-              <a:tr h="667512">
+              <a:tr h="704088">
                 <a:tc>
                   <a:txBody>
                     <a:bodyPr wrap="square"/>
@@ -11739,11 +11298,11 @@
                     <a:p>
                       <a:pPr algn="ctr">
                         <a:lnSpc>
-                          <a:spcPct val="115000"/>
+                          <a:spcPct val="110000"/>
                         </a:lnSpc>
                       </a:pPr>
                       <a:r>
-                        <a:rPr sz="2200" b="1">
+                        <a:rPr sz="2000" b="1">
                           <a:solidFill>
                             <a:srgbClr val="4B5320"/>
                           </a:solidFill>
@@ -11753,7 +11312,7 @@
                       </a:r>
                     </a:p>
                   </a:txBody>
-                  <a:tcPr anchor="ctr" marL="109728" marR="109728" marT="54864" marB="54864">
+                  <a:tcPr anchor="ctr" marL="109728" marR="109728" marT="45720" marB="45720">
                     <a:lnB w="9525" cap="flat" cmpd="sng" algn="ctr">
                       <a:solidFill>
                         <a:srgbClr val="4B5320"/>
@@ -11786,7 +11345,7 @@
                     <a:p>
                       <a:pPr algn="l">
                         <a:lnSpc>
-                          <a:spcPct val="115000"/>
+                          <a:spcPct val="110000"/>
                         </a:lnSpc>
                       </a:pPr>
                       <a:r>
@@ -11796,13 +11355,13 @@
                           </a:solidFill>
                           <a:latin typeface="Arial"/>
                         </a:rPr>
-                        <a:t>1. Ammo consumption vs G-est dmd (North).</a:t>
+                        <a:t>Ammo consumption vs G-est dmd (North).</a:t>
                       </a:r>
                     </a:p>
                     <a:p>
                       <a:pPr algn="l">
                         <a:lnSpc>
-                          <a:spcPct val="115000"/>
+                          <a:spcPct val="110000"/>
                         </a:lnSpc>
                       </a:pPr>
                       <a:r>
@@ -11812,13 +11371,13 @@
                           </a:solidFill>
                           <a:latin typeface="Arial"/>
                         </a:rPr>
-                        <a:t>2. CASEVAC and replen for arty/mor cas (both sectors).</a:t>
+                        <a:t>CASEVAC and replen for arty/mor cas (both sectors).</a:t>
                       </a:r>
                     </a:p>
                     <a:p>
                       <a:pPr algn="l">
                         <a:lnSpc>
-                          <a:spcPct val="115000"/>
+                          <a:spcPct val="110000"/>
                         </a:lnSpc>
                       </a:pPr>
                       <a:r>
@@ -11828,11 +11387,11 @@
                           </a:solidFill>
                           <a:latin typeface="Arial"/>
                         </a:rPr>
-                        <a:t>3. MSR CUMILLA-CHAUDDOGRAM interdiction and contg.</a:t>
+                        <a:t>MSR CUMILLA-CHAUDDOGRAM interdiction and contg.</a:t>
                       </a:r>
                     </a:p>
                   </a:txBody>
-                  <a:tcPr anchor="ctr" marL="109728" marR="109728" marT="54864" marB="54864">
+                  <a:tcPr anchor="ctr" marL="109728" marR="109728" marT="45720" marB="45720">
                     <a:lnB w="9525" cap="flat" cmpd="sng" algn="ctr">
                       <a:solidFill>
                         <a:srgbClr val="4B5320"/>
@@ -11859,7 +11418,7 @@
                   </a:tcPr>
                 </a:tc>
               </a:tr>
-              <a:tr h="667512">
+              <a:tr h="704088">
                 <a:tc>
                   <a:txBody>
                     <a:bodyPr wrap="square"/>
@@ -11867,11 +11426,11 @@
                     <a:p>
                       <a:pPr algn="ctr">
                         <a:lnSpc>
-                          <a:spcPct val="115000"/>
+                          <a:spcPct val="110000"/>
                         </a:lnSpc>
                       </a:pPr>
                       <a:r>
-                        <a:rPr sz="2200" b="1">
+                        <a:rPr sz="2000" b="1">
                           <a:solidFill>
                             <a:srgbClr val="4B5320"/>
                           </a:solidFill>
@@ -11881,7 +11440,7 @@
                       </a:r>
                     </a:p>
                   </a:txBody>
-                  <a:tcPr anchor="ctr" marL="109728" marR="109728" marT="54864" marB="54864">
+                  <a:tcPr anchor="ctr" marL="109728" marR="109728" marT="45720" marB="45720">
                     <a:lnB w="9525" cap="flat" cmpd="sng" algn="ctr">
                       <a:solidFill>
                         <a:srgbClr val="4B5320"/>
@@ -11914,7 +11473,7 @@
                     <a:p>
                       <a:pPr algn="l">
                         <a:lnSpc>
-                          <a:spcPct val="115000"/>
+                          <a:spcPct val="110000"/>
                         </a:lnSpc>
                       </a:pPr>
                       <a:r>
@@ -11924,13 +11483,13 @@
                           </a:solidFill>
                           <a:latin typeface="Arial"/>
                         </a:rPr>
-                        <a:t>1. DAA displaces fwd to sustain the adv.</a:t>
+                        <a:t>DAA displaces fwd to sustain the adv.</a:t>
                       </a:r>
                     </a:p>
                     <a:p>
                       <a:pPr algn="l">
                         <a:lnSpc>
-                          <a:spcPct val="115000"/>
+                          <a:spcPct val="110000"/>
                         </a:lnSpc>
                       </a:pPr>
                       <a:r>
@@ -11940,13 +11499,13 @@
                           </a:solidFill>
                           <a:latin typeface="Arial"/>
                         </a:rPr>
-                        <a:t>2. Ammo/fuel consumption vs G-est.</a:t>
+                        <a:t>Ammo/fuel consumption vs G-est.</a:t>
                       </a:r>
                     </a:p>
                     <a:p>
                       <a:pPr algn="l">
                         <a:lnSpc>
-                          <a:spcPct val="115000"/>
+                          <a:spcPct val="110000"/>
                         </a:lnSpc>
                       </a:pPr>
                       <a:r>
@@ -11956,11 +11515,11 @@
                           </a:solidFill>
                           <a:latin typeface="Arial"/>
                         </a:rPr>
-                        <a:t>3. Ammo carr lost to en air act.</a:t>
+                        <a:t>Ammo carr lost to en air act.</a:t>
                       </a:r>
                     </a:p>
                   </a:txBody>
-                  <a:tcPr anchor="ctr" marL="109728" marR="109728" marT="54864" marB="54864">
+                  <a:tcPr anchor="ctr" marL="109728" marR="109728" marT="45720" marB="45720">
                     <a:lnB w="9525" cap="flat" cmpd="sng" algn="ctr">
                       <a:solidFill>
                         <a:srgbClr val="4B5320"/>
@@ -11987,7 +11546,7 @@
                   </a:tcPr>
                 </a:tc>
               </a:tr>
-              <a:tr h="667512">
+              <a:tr h="704088">
                 <a:tc>
                   <a:txBody>
                     <a:bodyPr wrap="square"/>
@@ -11995,11 +11554,11 @@
                     <a:p>
                       <a:pPr algn="ctr">
                         <a:lnSpc>
-                          <a:spcPct val="115000"/>
+                          <a:spcPct val="110000"/>
                         </a:lnSpc>
                       </a:pPr>
                       <a:r>
-                        <a:rPr sz="2200" b="1">
+                        <a:rPr sz="2000" b="1">
                           <a:solidFill>
                             <a:srgbClr val="4B5320"/>
                           </a:solidFill>
@@ -12009,7 +11568,7 @@
                       </a:r>
                     </a:p>
                   </a:txBody>
-                  <a:tcPr anchor="ctr" marL="109728" marR="109728" marT="54864" marB="54864">
+                  <a:tcPr anchor="ctr" marL="109728" marR="109728" marT="45720" marB="45720">
                     <a:lnB w="9525" cap="flat" cmpd="sng" algn="ctr">
                       <a:solidFill>
                         <a:srgbClr val="4B5320"/>
@@ -12042,7 +11601,7 @@
                     <a:p>
                       <a:pPr algn="l">
                         <a:lnSpc>
-                          <a:spcPct val="115000"/>
+                          <a:spcPct val="110000"/>
                         </a:lnSpc>
                       </a:pPr>
                       <a:r>
@@ -12052,13 +11611,13 @@
                           </a:solidFill>
                           <a:latin typeface="Arial"/>
                         </a:rPr>
-                        <a:t>1. Med evac chain capacity assessed vs Div med resource dmd.</a:t>
+                        <a:t>Med evac chain capacity assessed vs Div med resource.</a:t>
                       </a:r>
                     </a:p>
                     <a:p>
                       <a:pPr algn="l">
                         <a:lnSpc>
-                          <a:spcPct val="115000"/>
+                          <a:spcPct val="110000"/>
                         </a:lnSpc>
                       </a:pPr>
                       <a:r>
@@ -12068,13 +11627,13 @@
                           </a:solidFill>
                           <a:latin typeface="Arial"/>
                         </a:rPr>
-                        <a:t>2. Ammo expenditure reaches critical state (South).</a:t>
+                        <a:t>Ammo expenditure reaches critical state (South).</a:t>
                       </a:r>
                     </a:p>
                     <a:p>
                       <a:pPr algn="l">
                         <a:lnSpc>
-                          <a:spcPct val="115000"/>
+                          <a:spcPct val="110000"/>
                         </a:lnSpc>
                       </a:pPr>
                       <a:r>
@@ -12084,11 +11643,11 @@
                           </a:solidFill>
                           <a:latin typeface="Arial"/>
                         </a:rPr>
-                        <a:t>3. CASEVAC chain saturation (South).</a:t>
+                        <a:t>CASEVAC chain saturation (South).</a:t>
                       </a:r>
                     </a:p>
                   </a:txBody>
-                  <a:tcPr anchor="ctr" marL="109728" marR="109728" marT="54864" marB="54864">
+                  <a:tcPr anchor="ctr" marL="109728" marR="109728" marT="45720" marB="45720">
                     <a:lnB w="9525" cap="flat" cmpd="sng" algn="ctr">
                       <a:solidFill>
                         <a:srgbClr val="4B5320"/>
@@ -12115,7 +11674,7 @@
                   </a:tcPr>
                 </a:tc>
               </a:tr>
-              <a:tr h="667512">
+              <a:tr h="704088">
                 <a:tc>
                   <a:txBody>
                     <a:bodyPr wrap="square"/>
@@ -12123,11 +11682,11 @@
                     <a:p>
                       <a:pPr algn="ctr">
                         <a:lnSpc>
-                          <a:spcPct val="115000"/>
+                          <a:spcPct val="110000"/>
                         </a:lnSpc>
                       </a:pPr>
                       <a:r>
-                        <a:rPr sz="2200" b="1">
+                        <a:rPr sz="2000" b="1">
                           <a:solidFill>
                             <a:srgbClr val="4B5320"/>
                           </a:solidFill>
@@ -12137,7 +11696,7 @@
                       </a:r>
                     </a:p>
                   </a:txBody>
-                  <a:tcPr anchor="ctr" marL="109728" marR="109728" marT="54864" marB="54864">
+                  <a:tcPr anchor="ctr" marL="109728" marR="109728" marT="45720" marB="45720">
                     <a:lnB w="9525" cap="flat" cmpd="sng" algn="ctr">
                       <a:solidFill>
                         <a:srgbClr val="4B5320"/>
@@ -12170,7 +11729,7 @@
                     <a:p>
                       <a:pPr algn="l">
                         <a:lnSpc>
-                          <a:spcPct val="115000"/>
+                          <a:spcPct val="110000"/>
                         </a:lnSpc>
                       </a:pPr>
                       <a:r>
@@ -12180,13 +11739,13 @@
                           </a:solidFill>
                           <a:latin typeface="Arial"/>
                         </a:rPr>
-                        <a:t>1. DAA/BAA displacement and med evac capacity assessed.</a:t>
+                        <a:t>DAA/BAA displacement and med evac capacity assessed.</a:t>
                       </a:r>
                     </a:p>
                     <a:p>
                       <a:pPr algn="l">
                         <a:lnSpc>
-                          <a:spcPct val="115000"/>
+                          <a:spcPct val="110000"/>
                         </a:lnSpc>
                       </a:pPr>
                       <a:r>
@@ -12196,13 +11755,13 @@
                           </a:solidFill>
                           <a:latin typeface="Arial"/>
                         </a:rPr>
-                        <a:t>2. MSR cut disrupts CASEVAC/replen.</a:t>
+                        <a:t>MSR cut disrupts CASEVAC/replen.</a:t>
                       </a:r>
                     </a:p>
                     <a:p>
                       <a:pPr algn="l">
                         <a:lnSpc>
-                          <a:spcPct val="115000"/>
+                          <a:spcPct val="110000"/>
                         </a:lnSpc>
                       </a:pPr>
                       <a:r>
@@ -12212,11 +11771,11 @@
                           </a:solidFill>
                           <a:latin typeface="Arial"/>
                         </a:rPr>
-                        <a:t>3. Critical ammo/med state drives terminal decision.</a:t>
+                        <a:t>Critical ammo/med state drives terminal decision.</a:t>
                       </a:r>
                     </a:p>
                   </a:txBody>
-                  <a:tcPr anchor="ctr" marL="109728" marR="109728" marT="54864" marB="54864">
+                  <a:tcPr anchor="ctr" marL="109728" marR="109728" marT="45720" marB="45720">
                     <a:lnB w="9525" cap="flat" cmpd="sng" algn="ctr">
                       <a:solidFill>
                         <a:srgbClr val="4B5320"/>
@@ -12249,13 +11808,13 @@
       </p:graphicFrame>
       <p:sp>
         <p:nvSpPr>
-          <p:cNvPr id="11" name="TextBox 10"/>
+          <p:cNvPr id="10" name="TextBox 9"/>
           <p:cNvSpPr txBox="1"/>
           <p:nvPr/>
         </p:nvSpPr>
         <p:spPr>
           <a:xfrm>
-            <a:off x="548640" y="6080760"/>
+            <a:off x="548640" y="6035040"/>
             <a:ext cx="11094415" cy="320040"/>
           </a:xfrm>
           <a:prstGeom prst="rect">
@@ -12293,6 +11852,14 @@
 <file path=ppt/slides/slide9.xml><?xml version="1.0" encoding="utf-8"?>
 <p:sld xmlns:a="http://schemas.openxmlformats.org/drawingml/2006/main" xmlns:p="http://schemas.openxmlformats.org/presentationml/2006/main" xmlns:r="http://schemas.openxmlformats.org/officeDocument/2006/relationships">
   <p:cSld>
+    <p:bg>
+      <p:bgPr>
+        <a:solidFill>
+          <a:srgbClr val="F4F2EC"/>
+        </a:solidFill>
+        <a:effectLst/>
+      </p:bgPr>
+    </p:bg>
     <p:spTree>
       <p:nvGrpSpPr>
         <p:cNvPr id="1" name=""/>
@@ -12302,51 +11869,7 @@
       <p:grpSpPr/>
       <p:sp>
         <p:nvSpPr>
-          <p:cNvPr id="2" name="Rectangle 1"/>
-          <p:cNvSpPr/>
-          <p:nvPr/>
-        </p:nvSpPr>
-        <p:spPr>
-          <a:xfrm>
-            <a:off x="0" y="0"/>
-            <a:ext cx="12191695" cy="6858000"/>
-          </a:xfrm>
-          <a:prstGeom prst="rect">
-            <a:avLst/>
-          </a:prstGeom>
-          <a:solidFill>
-            <a:srgbClr val="F4F2EC"/>
-          </a:solidFill>
-          <a:ln>
-            <a:noFill/>
-          </a:ln>
-          <a:effectLst/>
-        </p:spPr>
-        <p:style>
-          <a:lnRef idx="1">
-            <a:schemeClr val="accent1"/>
-          </a:lnRef>
-          <a:fillRef idx="3">
-            <a:schemeClr val="accent1"/>
-          </a:fillRef>
-          <a:effectRef idx="2">
-            <a:schemeClr val="accent1"/>
-          </a:effectRef>
-          <a:fontRef idx="minor">
-            <a:schemeClr val="lt1"/>
-          </a:fontRef>
-        </p:style>
-        <p:txBody>
-          <a:bodyPr rtlCol="0" anchor="ctr"/>
-          <a:lstStyle/>
-          <a:p>
-            <a:pPr algn="ctr"/>
-          </a:p>
-        </p:txBody>
-      </p:sp>
-      <p:sp>
-        <p:nvSpPr>
-          <p:cNvPr id="3" name="TextBox 2"/>
+          <p:cNvPr id="2" name="TextBox 1"/>
           <p:cNvSpPr txBox="1"/>
           <p:nvPr/>
         </p:nvSpPr>
@@ -12367,8 +11890,8 @@
           <a:lstStyle/>
           <a:p>
             <a:pPr algn="r"/>
-            <a:fld id="{779282AE-1F2D-41F8-BE3D-FA28072F8B4D}" type="slidenum">
-              <a:rPr lang="en-US" sz="1600" b="1">
+            <a:fld id="{72640C48-E94F-4059-81B2-47F5BA6BEEF7}" type="slidenum">
+              <a:rPr lang="en-US" sz="1600" b="1" dirty="0">
                 <a:solidFill>
                   <a:srgbClr val="B08D57"/>
                 </a:solidFill>
@@ -12390,7 +11913,7 @@
       </p:sp>
       <p:sp>
         <p:nvSpPr>
-          <p:cNvPr id="4" name="TextBox 3"/>
+          <p:cNvPr id="3" name="TextBox 2"/>
           <p:cNvSpPr txBox="1"/>
           <p:nvPr/>
         </p:nvSpPr>
@@ -12425,7 +11948,7 @@
       </p:sp>
       <p:sp>
         <p:nvSpPr>
-          <p:cNvPr id="5" name="TextBox 4"/>
+          <p:cNvPr id="4" name="TextBox 3"/>
           <p:cNvSpPr txBox="1"/>
           <p:nvPr/>
         </p:nvSpPr>
@@ -12460,7 +11983,7 @@
       </p:sp>
       <p:sp>
         <p:nvSpPr>
-          <p:cNvPr id="6" name="TextBox 5"/>
+          <p:cNvPr id="5" name="TextBox 4"/>
           <p:cNvSpPr txBox="1"/>
           <p:nvPr/>
         </p:nvSpPr>
@@ -12495,7 +12018,7 @@
       </p:sp>
       <p:sp>
         <p:nvSpPr>
-          <p:cNvPr id="7" name="TextBox 6"/>
+          <p:cNvPr id="6" name="TextBox 5"/>
           <p:cNvSpPr txBox="1"/>
           <p:nvPr/>
         </p:nvSpPr>
@@ -12530,7 +12053,7 @@
       </p:sp>
       <p:cxnSp>
         <p:nvCxnSpPr>
-          <p:cNvPr id="8" name="Connector 7"/>
+          <p:cNvPr id="7" name="Connector 6"/>
           <p:cNvCxnSpPr/>
           <p:nvPr/>
         </p:nvCxnSpPr>
@@ -12565,14 +12088,14 @@
       </p:cxnSp>
       <p:sp>
         <p:nvSpPr>
-          <p:cNvPr id="9" name="TextBox 8"/>
+          <p:cNvPr id="8" name="TextBox 7"/>
           <p:cNvSpPr txBox="1"/>
           <p:nvPr/>
         </p:nvSpPr>
         <p:spPr>
           <a:xfrm>
-            <a:off x="548640" y="1481328"/>
-            <a:ext cx="11094415" cy="411480"/>
+            <a:off x="548640" y="1417320"/>
+            <a:ext cx="11094415" cy="365760"/>
           </a:xfrm>
           <a:prstGeom prst="rect">
             <a:avLst/>
@@ -12600,27 +12123,27 @@
       </p:sp>
       <p:graphicFrame>
         <p:nvGraphicFramePr>
-          <p:cNvPr id="10" name="Table 9"/>
+          <p:cNvPr id="9" name="Table 8"/>
           <p:cNvGraphicFramePr>
             <a:graphicFrameLocks noGrp="1"/>
           </p:cNvGraphicFramePr>
           <p:nvPr/>
         </p:nvGraphicFramePr>
         <p:xfrm>
-          <a:off x="548640" y="1965960"/>
-          <a:ext cx="11094415" cy="3794760"/>
+          <a:off x="548640" y="1874519"/>
+          <a:ext cx="11094415" cy="3931920"/>
         </p:xfrm>
         <a:graphic>
           <a:graphicData uri="http://schemas.openxmlformats.org/drawingml/2006/table">
             <a:tbl>
               <a:tblPr firstRow="0" bandRow="0">
-                <a:tableStyleId>{5940675A-B579-460E-94D1-54222C63F5DA}</a:tableStyleId>
+                <a:tableStyleId>{2D5ABB26-0587-4C30-8999-92F81FD0307C}</a:tableStyleId>
               </a:tblPr>
               <a:tblGrid>
-                <a:gridCol w="1463040"/>
-                <a:gridCol w="9631375"/>
+                <a:gridCol w="1371600"/>
+                <a:gridCol w="9722815"/>
               </a:tblGrid>
-              <a:tr h="457200">
+              <a:tr h="411480">
                 <a:tc>
                   <a:txBody>
                     <a:bodyPr wrap="square"/>
@@ -12628,11 +12151,11 @@
                     <a:p>
                       <a:pPr algn="ctr">
                         <a:lnSpc>
-                          <a:spcPct val="115000"/>
+                          <a:spcPct val="110000"/>
                         </a:lnSpc>
                       </a:pPr>
                       <a:r>
-                        <a:rPr sz="2200" b="1">
+                        <a:rPr sz="2000" b="1">
                           <a:solidFill>
                             <a:srgbClr val="F4F2EC"/>
                           </a:solidFill>
@@ -12642,7 +12165,7 @@
                       </a:r>
                     </a:p>
                   </a:txBody>
-                  <a:tcPr anchor="ctr" marL="109728" marR="109728" marT="54864" marB="54864">
+                  <a:tcPr anchor="ctr" marL="109728" marR="109728" marT="45720" marB="45720">
                     <a:lnB w="9525" cap="flat" cmpd="sng" algn="ctr">
                       <a:solidFill>
                         <a:srgbClr val="4B5320"/>
@@ -12675,11 +12198,11 @@
                     <a:p>
                       <a:pPr algn="ctr">
                         <a:lnSpc>
-                          <a:spcPct val="115000"/>
+                          <a:spcPct val="110000"/>
                         </a:lnSpc>
                       </a:pPr>
                       <a:r>
-                        <a:rPr sz="2200" b="1">
+                        <a:rPr sz="2000" b="1">
                           <a:solidFill>
                             <a:srgbClr val="F4F2EC"/>
                           </a:solidFill>
@@ -12689,7 +12212,7 @@
                       </a:r>
                     </a:p>
                   </a:txBody>
-                  <a:tcPr anchor="ctr" marL="109728" marR="109728" marT="54864" marB="54864">
+                  <a:tcPr anchor="ctr" marL="109728" marR="109728" marT="45720" marB="45720">
                     <a:lnB w="9525" cap="flat" cmpd="sng" algn="ctr">
                       <a:solidFill>
                         <a:srgbClr val="4B5320"/>
@@ -12716,7 +12239,7 @@
                   </a:tcPr>
                 </a:tc>
               </a:tr>
-              <a:tr h="667512">
+              <a:tr h="704088">
                 <a:tc>
                   <a:txBody>
                     <a:bodyPr wrap="square"/>
@@ -12724,11 +12247,11 @@
                     <a:p>
                       <a:pPr algn="ctr">
                         <a:lnSpc>
-                          <a:spcPct val="115000"/>
+                          <a:spcPct val="110000"/>
                         </a:lnSpc>
                       </a:pPr>
                       <a:r>
-                        <a:rPr sz="2200" b="1">
+                        <a:rPr sz="2000" b="1">
                           <a:solidFill>
                             <a:srgbClr val="4B5320"/>
                           </a:solidFill>
@@ -12738,7 +12261,7 @@
                       </a:r>
                     </a:p>
                   </a:txBody>
-                  <a:tcPr anchor="ctr" marL="109728" marR="109728" marT="54864" marB="54864">
+                  <a:tcPr anchor="ctr" marL="109728" marR="109728" marT="45720" marB="45720">
                     <a:lnB w="9525" cap="flat" cmpd="sng" algn="ctr">
                       <a:solidFill>
                         <a:srgbClr val="4B5320"/>
@@ -12771,7 +12294,7 @@
                     <a:p>
                       <a:pPr algn="l">
                         <a:lnSpc>
-                          <a:spcPct val="115000"/>
+                          <a:spcPct val="110000"/>
                         </a:lnSpc>
                       </a:pPr>
                       <a:r>
@@ -12781,13 +12304,13 @@
                           </a:solidFill>
                           <a:latin typeface="Arial"/>
                         </a:rPr>
-                        <a:t>1. UWF/volunteer forces tasked within div AOP.</a:t>
+                        <a:t>UWF/volunteer forces tasked within div AOP.</a:t>
                       </a:r>
                     </a:p>
                     <a:p>
                       <a:pPr algn="l">
                         <a:lnSpc>
-                          <a:spcPct val="115000"/>
+                          <a:spcPct val="110000"/>
                         </a:lnSpc>
                       </a:pPr>
                       <a:r>
@@ -12797,11 +12320,11 @@
                           </a:solidFill>
                           <a:latin typeface="Arial"/>
                         </a:rPr>
-                        <a:t>2. UWF stay-behind cells and reporting drills estb.</a:t>
+                        <a:t>UWF stay-behind cells and reporting drills estb.</a:t>
                       </a:r>
                     </a:p>
                   </a:txBody>
-                  <a:tcPr anchor="ctr" marL="109728" marR="109728" marT="54864" marB="54864">
+                  <a:tcPr anchor="ctr" marL="109728" marR="109728" marT="45720" marB="45720">
                     <a:lnB w="9525" cap="flat" cmpd="sng" algn="ctr">
                       <a:solidFill>
                         <a:srgbClr val="4B5320"/>
@@ -12828,7 +12351,7 @@
                   </a:tcPr>
                 </a:tc>
               </a:tr>
-              <a:tr h="667512">
+              <a:tr h="704088">
                 <a:tc>
                   <a:txBody>
                     <a:bodyPr wrap="square"/>
@@ -12836,11 +12359,11 @@
                     <a:p>
                       <a:pPr algn="ctr">
                         <a:lnSpc>
-                          <a:spcPct val="115000"/>
+                          <a:spcPct val="110000"/>
                         </a:lnSpc>
                       </a:pPr>
                       <a:r>
-                        <a:rPr sz="2200" b="1">
+                        <a:rPr sz="2000" b="1">
                           <a:solidFill>
                             <a:srgbClr val="4B5320"/>
                           </a:solidFill>
@@ -12850,7 +12373,7 @@
                       </a:r>
                     </a:p>
                   </a:txBody>
-                  <a:tcPr anchor="ctr" marL="109728" marR="109728" marT="54864" marB="54864">
+                  <a:tcPr anchor="ctr" marL="109728" marR="109728" marT="45720" marB="45720">
                     <a:lnB w="9525" cap="flat" cmpd="sng" algn="ctr">
                       <a:solidFill>
                         <a:srgbClr val="4B5320"/>
@@ -12883,7 +12406,7 @@
                     <a:p>
                       <a:pPr algn="l">
                         <a:lnSpc>
-                          <a:spcPct val="115000"/>
+                          <a:spcPct val="110000"/>
                         </a:lnSpc>
                       </a:pPr>
                       <a:r>
@@ -12893,13 +12416,13 @@
                           </a:solidFill>
                           <a:latin typeface="Arial"/>
                         </a:rPr>
-                        <a:t>1. UWF stay-behind int on RL mov beyond IB (both sectors).</a:t>
+                        <a:t>UWF stay-behind int on RL mov beyond IB (both sectors).</a:t>
                       </a:r>
                     </a:p>
                     <a:p>
                       <a:pPr algn="l">
                         <a:lnSpc>
-                          <a:spcPct val="115000"/>
+                          <a:spcPct val="110000"/>
                         </a:lnSpc>
                       </a:pPr>
                       <a:r>
@@ -12909,11 +12432,11 @@
                           </a:solidFill>
                           <a:latin typeface="Arial"/>
                         </a:rPr>
-                        <a:t>2. UWF-Bde int handover and reporting.</a:t>
+                        <a:t>UWF-Bde int handover and reporting.</a:t>
                       </a:r>
                     </a:p>
                   </a:txBody>
-                  <a:tcPr anchor="ctr" marL="109728" marR="109728" marT="54864" marB="54864">
+                  <a:tcPr anchor="ctr" marL="109728" marR="109728" marT="45720" marB="45720">
                     <a:lnB w="9525" cap="flat" cmpd="sng" algn="ctr">
                       <a:solidFill>
                         <a:srgbClr val="4B5320"/>
@@ -12940,7 +12463,7 @@
                   </a:tcPr>
                 </a:tc>
               </a:tr>
-              <a:tr h="667512">
+              <a:tr h="704088">
                 <a:tc>
                   <a:txBody>
                     <a:bodyPr wrap="square"/>
@@ -12948,11 +12471,11 @@
                     <a:p>
                       <a:pPr algn="ctr">
                         <a:lnSpc>
-                          <a:spcPct val="115000"/>
+                          <a:spcPct val="110000"/>
                         </a:lnSpc>
                       </a:pPr>
                       <a:r>
-                        <a:rPr sz="2200" b="1">
+                        <a:rPr sz="2000" b="1">
                           <a:solidFill>
                             <a:srgbClr val="4B5320"/>
                           </a:solidFill>
@@ -12962,7 +12485,7 @@
                       </a:r>
                     </a:p>
                   </a:txBody>
-                  <a:tcPr anchor="ctr" marL="109728" marR="109728" marT="54864" marB="54864">
+                  <a:tcPr anchor="ctr" marL="109728" marR="109728" marT="45720" marB="45720">
                     <a:lnB w="9525" cap="flat" cmpd="sng" algn="ctr">
                       <a:solidFill>
                         <a:srgbClr val="4B5320"/>
@@ -12995,7 +12518,7 @@
                     <a:p>
                       <a:pPr algn="l">
                         <a:lnSpc>
-                          <a:spcPct val="115000"/>
+                          <a:spcPct val="110000"/>
                         </a:lnSpc>
                       </a:pPr>
                       <a:r>
@@ -13005,13 +12528,13 @@
                           </a:solidFill>
                           <a:latin typeface="Arial"/>
                         </a:rPr>
-                        <a:t>1. UWF guides for route/approach march (both sectors).</a:t>
+                        <a:t>UWF guides for route/approach march (both sectors).</a:t>
                       </a:r>
                     </a:p>
                     <a:p>
                       <a:pPr algn="l">
                         <a:lnSpc>
-                          <a:spcPct val="115000"/>
+                          <a:spcPct val="110000"/>
                         </a:lnSpc>
                       </a:pPr>
                       <a:r>
@@ -13021,11 +12544,11 @@
                           </a:solidFill>
                           <a:latin typeface="Arial"/>
                         </a:rPr>
-                        <a:t>2. UWF int on RL res mov and reinforcement.</a:t>
+                        <a:t>UWF int on RL res mov and reinforcement.</a:t>
                       </a:r>
                     </a:p>
                   </a:txBody>
-                  <a:tcPr anchor="ctr" marL="109728" marR="109728" marT="54864" marB="54864">
+                  <a:tcPr anchor="ctr" marL="109728" marR="109728" marT="45720" marB="45720">
                     <a:lnB w="9525" cap="flat" cmpd="sng" algn="ctr">
                       <a:solidFill>
                         <a:srgbClr val="4B5320"/>
@@ -13052,7 +12575,7 @@
                   </a:tcPr>
                 </a:tc>
               </a:tr>
-              <a:tr h="667512">
+              <a:tr h="704088">
                 <a:tc>
                   <a:txBody>
                     <a:bodyPr wrap="square"/>
@@ -13060,11 +12583,11 @@
                     <a:p>
                       <a:pPr algn="ctr">
                         <a:lnSpc>
-                          <a:spcPct val="115000"/>
+                          <a:spcPct val="110000"/>
                         </a:lnSpc>
                       </a:pPr>
                       <a:r>
-                        <a:rPr sz="2200" b="1">
+                        <a:rPr sz="2000" b="1">
                           <a:solidFill>
                             <a:srgbClr val="4B5320"/>
                           </a:solidFill>
@@ -13074,7 +12597,7 @@
                       </a:r>
                     </a:p>
                   </a:txBody>
-                  <a:tcPr anchor="ctr" marL="109728" marR="109728" marT="54864" marB="54864">
+                  <a:tcPr anchor="ctr" marL="109728" marR="109728" marT="45720" marB="45720">
                     <a:lnB w="9525" cap="flat" cmpd="sng" algn="ctr">
                       <a:solidFill>
                         <a:srgbClr val="4B5320"/>
@@ -13107,7 +12630,7 @@
                     <a:p>
                       <a:pPr algn="l">
                         <a:lnSpc>
-                          <a:spcPct val="115000"/>
+                          <a:spcPct val="110000"/>
                         </a:lnSpc>
                       </a:pPr>
                       <a:r>
@@ -13117,13 +12640,13 @@
                           </a:solidFill>
                           <a:latin typeface="Arial"/>
                         </a:rPr>
-                        <a:t>1. UWF int on RL FUP activity and bypass indicators (North).</a:t>
+                        <a:t>UWF int on RL FUP activity and bypass indicators (North).</a:t>
                       </a:r>
                     </a:p>
                     <a:p>
                       <a:pPr algn="l">
                         <a:lnSpc>
-                          <a:spcPct val="115000"/>
+                          <a:spcPct val="110000"/>
                         </a:lnSpc>
                       </a:pPr>
                       <a:r>
@@ -13133,11 +12656,11 @@
                           </a:solidFill>
                           <a:latin typeface="Arial"/>
                         </a:rPr>
-                        <a:t>2. UWF int on RL armr reinforcement (South).</a:t>
+                        <a:t>UWF int on RL armr reinforcement (South).</a:t>
                       </a:r>
                     </a:p>
                   </a:txBody>
-                  <a:tcPr anchor="ctr" marL="109728" marR="109728" marT="54864" marB="54864">
+                  <a:tcPr anchor="ctr" marL="109728" marR="109728" marT="45720" marB="45720">
                     <a:lnB w="9525" cap="flat" cmpd="sng" algn="ctr">
                       <a:solidFill>
                         <a:srgbClr val="4B5320"/>
@@ -13164,7 +12687,7 @@
                   </a:tcPr>
                 </a:tc>
               </a:tr>
-              <a:tr h="667512">
+              <a:tr h="704088">
                 <a:tc>
                   <a:txBody>
                     <a:bodyPr wrap="square"/>
@@ -13172,11 +12695,11 @@
                     <a:p>
                       <a:pPr algn="ctr">
                         <a:lnSpc>
-                          <a:spcPct val="115000"/>
+                          <a:spcPct val="110000"/>
                         </a:lnSpc>
                       </a:pPr>
                       <a:r>
-                        <a:rPr sz="2200" b="1">
+                        <a:rPr sz="2000" b="1">
                           <a:solidFill>
                             <a:srgbClr val="4B5320"/>
                           </a:solidFill>
@@ -13186,7 +12709,7 @@
                       </a:r>
                     </a:p>
                   </a:txBody>
-                  <a:tcPr anchor="ctr" marL="109728" marR="109728" marT="54864" marB="54864">
+                  <a:tcPr anchor="ctr" marL="109728" marR="109728" marT="45720" marB="45720">
                     <a:lnB w="9525" cap="flat" cmpd="sng" algn="ctr">
                       <a:solidFill>
                         <a:srgbClr val="4B5320"/>
@@ -13219,7 +12742,7 @@
                     <a:p>
                       <a:pPr algn="l">
                         <a:lnSpc>
-                          <a:spcPct val="115000"/>
+                          <a:spcPct val="110000"/>
                         </a:lnSpc>
                       </a:pPr>
                       <a:r>
@@ -13229,13 +12752,13 @@
                           </a:solidFill>
                           <a:latin typeface="Arial"/>
                         </a:rPr>
-                        <a:t>1. UWF rpt on RL heliborne/para insertion in depth.</a:t>
+                        <a:t>UWF rpt on RL heliborne/para insertion in depth.</a:t>
                       </a:r>
                     </a:p>
                     <a:p>
                       <a:pPr algn="l">
                         <a:lnSpc>
-                          <a:spcPct val="115000"/>
+                          <a:spcPct val="110000"/>
                         </a:lnSpc>
                       </a:pPr>
                       <a:r>
@@ -13245,11 +12768,11 @@
                           </a:solidFill>
                           <a:latin typeface="Arial"/>
                         </a:rPr>
-                        <a:t>2. UWF int on RL Div Res mov towards BISHALGARH.</a:t>
+                        <a:t>UWF int on RL Div Res mov towards BISHALGARH.</a:t>
                       </a:r>
                     </a:p>
                   </a:txBody>
-                  <a:tcPr anchor="ctr" marL="109728" marR="109728" marT="54864" marB="54864">
+                  <a:tcPr anchor="ctr" marL="109728" marR="109728" marT="45720" marB="45720">
                     <a:lnB w="9525" cap="flat" cmpd="sng" algn="ctr">
                       <a:solidFill>
                         <a:srgbClr val="4B5320"/>
@@ -13282,13 +12805,13 @@
       </p:graphicFrame>
       <p:sp>
         <p:nvSpPr>
-          <p:cNvPr id="11" name="TextBox 10"/>
+          <p:cNvPr id="10" name="TextBox 9"/>
           <p:cNvSpPr txBox="1"/>
           <p:nvPr/>
         </p:nvSpPr>
         <p:spPr>
           <a:xfrm>
-            <a:off x="548640" y="6080760"/>
+            <a:off x="548640" y="6035040"/>
             <a:ext cx="11094415" cy="320040"/>
           </a:xfrm>
           <a:prstGeom prst="rect">
